--- a/VulnSuite_Executive_Deck_FINAL.pptx
+++ b/VulnSuite_Executive_Deck_FINAL.pptx
@@ -24,6 +24,11 @@
     <p:sldId id="272" r:id="rId24"/>
     <p:sldId id="273" r:id="rId25"/>
     <p:sldId id="274" r:id="rId26"/>
+    <p:sldId id="275" r:id="rId27"/>
+    <p:sldId id="276" r:id="rId28"/>
+    <p:sldId id="277" r:id="rId29"/>
+    <p:sldId id="278" r:id="rId30"/>
+    <p:sldId id="279" r:id="rId31"/>
   </p:sldIdLst>
   <p:sldSz cx="12191695" cy="6858000" type="screen4x3"/>
   <p:notesSz cx="6858000" cy="9144000"/>
@@ -520,22 +525,27 @@
           <a:lstStyle/>
           <a:p>
             <a:r>
-              <a:t>VulnSuite helps security teams understand where systems are exposed, investigate suspicious server activity and coordinate approved responses. It connects assessment findings with operational evidence while keeping responsibility, review and deployment requirements visible.</a:t>
-            </a:r>
-          </a:p>
-          <a:p>
-            <a:r>
-              <a:t>Scope: Introducing VulnSuite | Vulnerability assessment, server monitoring and approved security response.</a:t>
-            </a:r>
-          </a:p>
-          <a:p>
-            <a:r>
-              <a:t>Implementation and limitations: vulnsuite/protection/OPERATIONS.md</a:t>
-            </a:r>
-          </a:p>
-          <a:p>
-            <a:r>
-              <a:t>Staging and maintenance: deploy/protection/OPERATIONS.md</a:t>
+              <a:t>VulnSuite is an internal security platform that finds and prioritises vulnerabilities, monitors servers for intrusion and coordinates approved response. It connects assessment findings with operational evidence while keeping responsibility, review and deployment requirements visible.</a:t>
+            </a:r>
+          </a:p>
+          <a:p>
+            <a:r>
+              <a:t>Scope: Introducing VulnSuite | Built for Indian BFSI: RBI Cyber Security Framework and CERT-In obligations are embedded in every finding.</a:t>
+            </a:r>
+          </a:p>
+          <a:p>
+            <a:r>
+              <a:t>How to use: docs/HOW_TO_USE.md</a:t>
+            </a:r>
+          </a:p>
+          <a:p>
+            <a:r>
+              <a:t>Engineering reference: vulnsuite/CLAUDE.md</a:t>
+            </a:r>
+          </a:p>
+          <a:p>
+            <a:r>
+              <a:t>Protection operations: vulnsuite/protection/OPERATIONS.md and deploy/protection/OPERATIONS.md</a:t>
             </a:r>
           </a:p>
           <a:p>
@@ -610,22 +620,27 @@
           <a:lstStyle/>
           <a:p>
             <a:r>
-              <a:t>Activity that appears ordinary on one server can become suspicious when repeated across several hosts. Correlating authentication events helps analysts recognise possible account misuse or movement between systems, while retaining context needed to assess legitimate administrative activity.</a:t>
-            </a:r>
-          </a:p>
-          <a:p>
-            <a:r>
-              <a:t>Scope: NAT, shared accounts and legitimate automation need review; protocol labels require supporting source evidence.</a:t>
-            </a:r>
-          </a:p>
-          <a:p>
-            <a:r>
-              <a:t>Implementation and limitations: vulnsuite/protection/OPERATIONS.md</a:t>
-            </a:r>
-          </a:p>
-          <a:p>
-            <a:r>
-              <a:t>Staging and maintenance: deploy/protection/OPERATIONS.md</a:t>
+              <a:t>Auditors and incident reviewers need to know who did what, when, and why a risk was accepted. Every authenticated API call is recorded in a table nobody can rewrite, and analyst decisions carry a justification, an owner and an expiry that the platform enforces.</a:t>
+            </a:r>
+          </a:p>
+          <a:p>
+            <a:r>
+              <a:t>Scope: A finding is auto-closed only when the tool that reported it completed cleanly and no longer reports it.</a:t>
+            </a:r>
+          </a:p>
+          <a:p>
+            <a:r>
+              <a:t>How to use: docs/HOW_TO_USE.md</a:t>
+            </a:r>
+          </a:p>
+          <a:p>
+            <a:r>
+              <a:t>Engineering reference: vulnsuite/CLAUDE.md</a:t>
+            </a:r>
+          </a:p>
+          <a:p>
+            <a:r>
+              <a:t>Protection operations: vulnsuite/protection/OPERATIONS.md and deploy/protection/OPERATIONS.md</a:t>
             </a:r>
           </a:p>
           <a:p>
@@ -700,22 +715,27 @@
           <a:lstStyle/>
           <a:p>
             <a:r>
-              <a:t>Web application firewalls provide an enforcement point for traffic reaching protected applications. Connecting their signals with investigations helps teams understand attempted abuse and review scoped blocking decisions, with tuning and deployment checks needed to avoid disrupting legitimate requests.</a:t>
-            </a:r>
-          </a:p>
-          <a:p>
-            <a:r>
-              <a:t>Scope: Rule ordering, provider permissions, propagation and real traffic enforcement remain staging checks.</a:t>
-            </a:r>
-          </a:p>
-          <a:p>
-            <a:r>
-              <a:t>Implementation and limitations: vulnsuite/protection/OPERATIONS.md</a:t>
-            </a:r>
-          </a:p>
-          <a:p>
-            <a:r>
-              <a:t>Staging and maintenance: deploy/protection/OPERATIONS.md</a:t>
+              <a:t>An analyst investigating an alert needs to understand the affected host, its known weaknesses and any response already underway. The console brings that context together, helping teams coordinate investigation while making unavailable information visible.</a:t>
+            </a:r>
+          </a:p>
+          <a:p>
+            <a:r>
+              <a:t>Scope: The console shows bounded recent lists; it is not an exhaustive cross-platform evidence search.</a:t>
+            </a:r>
+          </a:p>
+          <a:p>
+            <a:r>
+              <a:t>How to use: docs/HOW_TO_USE.md</a:t>
+            </a:r>
+          </a:p>
+          <a:p>
+            <a:r>
+              <a:t>Engineering reference: vulnsuite/CLAUDE.md</a:t>
+            </a:r>
+          </a:p>
+          <a:p>
+            <a:r>
+              <a:t>Protection operations: vulnsuite/protection/OPERATIONS.md and deploy/protection/OPERATIONS.md</a:t>
             </a:r>
           </a:p>
           <a:p>
@@ -790,22 +810,27 @@
           <a:lstStyle/>
           <a:p>
             <a:r>
-              <a:t>Containment can interrupt business services, so response decisions need clear evidence and accountability. VulnSuite places supported file quarantine and host isolation behind separate approval and local policy checks, with recorded outcomes and reviewed recovery paths.</a:t>
-            </a:r>
-          </a:p>
-          <a:p>
-            <a:r>
-              <a:t>Scope: Containment is disabled by default. Windows expiry uses local recovery tasks; Linux uses kernel timeouts.</a:t>
-            </a:r>
-          </a:p>
-          <a:p>
-            <a:r>
-              <a:t>Implementation and limitations: vulnsuite/protection/OPERATIONS.md</a:t>
-            </a:r>
-          </a:p>
-          <a:p>
-            <a:r>
-              <a:t>Staging and maintenance: deploy/protection/OPERATIONS.md</a:t>
+              <a:t>Server monitoring depends on collecting useful activity from the operating system and making gaps visible. Windows event sources and Linux audit records provide investigation evidence, while sensor health indicators help teams distinguish quiet systems from missing telemetry.</a:t>
+            </a:r>
+          </a:p>
+          <a:p>
+            <a:r>
+              <a:t>Scope: Windows and Linux support monitoring and approved containment. Native enforcement and recovery require staging validation.</a:t>
+            </a:r>
+          </a:p>
+          <a:p>
+            <a:r>
+              <a:t>How to use: docs/HOW_TO_USE.md</a:t>
+            </a:r>
+          </a:p>
+          <a:p>
+            <a:r>
+              <a:t>Engineering reference: vulnsuite/CLAUDE.md</a:t>
+            </a:r>
+          </a:p>
+          <a:p>
+            <a:r>
+              <a:t>Protection operations: vulnsuite/protection/OPERATIONS.md and deploy/protection/OPERATIONS.md</a:t>
             </a:r>
           </a:p>
           <a:p>
@@ -880,22 +905,27 @@
           <a:lstStyle/>
           <a:p>
             <a:r>
-              <a:t>The assessment service evaluates exposure; the protection service handles telemetry, investigations and response. Their separate responsibilities help teams plan access, storage, maintenance and integration around the requirements of each service.</a:t>
-            </a:r>
-          </a:p>
-          <a:p>
-            <a:r>
-              <a:t>Scope: SQLite protection persistence is not a horizontally scalable or highly available PostgreSQL backend.</a:t>
-            </a:r>
-          </a:p>
-          <a:p>
-            <a:r>
-              <a:t>Implementation and limitations: vulnsuite/protection/OPERATIONS.md</a:t>
-            </a:r>
-          </a:p>
-          <a:p>
-            <a:r>
-              <a:t>Staging and maintenance: deploy/protection/OPERATIONS.md</a:t>
+              <a:t>Selected process patterns and reviewed malware indicators provide clues that warrant investigation. A known-bad hash match supplies specific file evidence; analysts can review its context before approving action, while missing scanners or telemetry remain visible as coverage limitations.</a:t>
+            </a:r>
+          </a:p>
+          <a:p>
+            <a:r>
+              <a:t>Scope: Coverage excludes complete memory scanning and full-disk protection. File quarantine does not terminate a running process.</a:t>
+            </a:r>
+          </a:p>
+          <a:p>
+            <a:r>
+              <a:t>How to use: docs/HOW_TO_USE.md</a:t>
+            </a:r>
+          </a:p>
+          <a:p>
+            <a:r>
+              <a:t>Engineering reference: vulnsuite/CLAUDE.md</a:t>
+            </a:r>
+          </a:p>
+          <a:p>
+            <a:r>
+              <a:t>Protection operations: vulnsuite/protection/OPERATIONS.md and deploy/protection/OPERATIONS.md</a:t>
             </a:r>
           </a:p>
           <a:p>
@@ -970,22 +1000,27 @@
           <a:lstStyle/>
           <a:p>
             <a:r>
-              <a:t>Host monitoring depends on knowing which agents are enrolled, authorised and reporting correctly. Central lifecycle controls help maintain that inventory, replace credentials, withdraw access and identify policy or version differences that require administrator attention.</a:t>
-            </a:r>
-          </a:p>
-          <a:p>
-            <a:r>
-              <a:t>Scope: Agent software installation and upgrades use an administrator-controlled rollout.</a:t>
-            </a:r>
-          </a:p>
-          <a:p>
-            <a:r>
-              <a:t>Implementation and limitations: vulnsuite/protection/OPERATIONS.md</a:t>
-            </a:r>
-          </a:p>
-          <a:p>
-            <a:r>
-              <a:t>Staging and maintenance: deploy/protection/OPERATIONS.md</a:t>
+              <a:t>Activity that appears ordinary on one server can become suspicious when repeated across several hosts. Correlating authentication events helps analysts recognise possible account misuse or movement between systems, while retaining context needed to assess legitimate administrative activity.</a:t>
+            </a:r>
+          </a:p>
+          <a:p>
+            <a:r>
+              <a:t>Scope: NAT, shared accounts and legitimate automation need review; protocol labels require supporting source evidence.</a:t>
+            </a:r>
+          </a:p>
+          <a:p>
+            <a:r>
+              <a:t>How to use: docs/HOW_TO_USE.md</a:t>
+            </a:r>
+          </a:p>
+          <a:p>
+            <a:r>
+              <a:t>Engineering reference: vulnsuite/CLAUDE.md</a:t>
+            </a:r>
+          </a:p>
+          <a:p>
+            <a:r>
+              <a:t>Protection operations: vulnsuite/protection/OPERATIONS.md and deploy/protection/OPERATIONS.md</a:t>
             </a:r>
           </a:p>
           <a:p>
@@ -1060,22 +1095,27 @@
           <a:lstStyle/>
           <a:p>
             <a:r>
-              <a:t>Investigations often involve several people and external operational systems. Incident records preserve ownership and decisions, while signed notifications carry relevant information to organisation-operated integrations, helping teams coordinate work and recover delivery after temporary service failures.</a:t>
-            </a:r>
-          </a:p>
-          <a:p>
-            <a:r>
-              <a:t>Scope: Webhooks support organisation-operated adapters; native Jira, ServiceNow or Splunk connectors are not implied.</a:t>
-            </a:r>
-          </a:p>
-          <a:p>
-            <a:r>
-              <a:t>Implementation and limitations: vulnsuite/protection/OPERATIONS.md</a:t>
-            </a:r>
-          </a:p>
-          <a:p>
-            <a:r>
-              <a:t>Staging and maintenance: deploy/protection/OPERATIONS.md</a:t>
+              <a:t>Web application firewalls provide an enforcement point for traffic reaching protected applications. Connecting their signals with investigations helps teams understand attempted abuse and review scoped blocking decisions, with tuning and deployment checks needed to avoid disrupting legitimate requests.</a:t>
+            </a:r>
+          </a:p>
+          <a:p>
+            <a:r>
+              <a:t>Scope: Rule ordering, provider permissions, propagation and real traffic enforcement remain staging checks.</a:t>
+            </a:r>
+          </a:p>
+          <a:p>
+            <a:r>
+              <a:t>How to use: docs/HOW_TO_USE.md</a:t>
+            </a:r>
+          </a:p>
+          <a:p>
+            <a:r>
+              <a:t>Engineering reference: vulnsuite/CLAUDE.md</a:t>
+            </a:r>
+          </a:p>
+          <a:p>
+            <a:r>
+              <a:t>Protection operations: vulnsuite/protection/OPERATIONS.md and deploy/protection/OPERATIONS.md</a:t>
             </a:r>
           </a:p>
           <a:p>
@@ -1150,22 +1190,27 @@
           <a:lstStyle/>
           <a:p>
             <a:r>
-              <a:t>Network interruptions and growing evidence volumes can affect security operations. Persistent queues and acknowledgement checks support recovery after outages, while backup and retention controls help teams manage stored evidence according to investigation needs and operational requirements.</a:t>
-            </a:r>
-          </a:p>
-          <a:p>
-            <a:r>
-              <a:t>Scope: Schedule maintenance explicitly and measure capacity, recovery objectives and backup security in the target environment.</a:t>
-            </a:r>
-          </a:p>
-          <a:p>
-            <a:r>
-              <a:t>Implementation and limitations: vulnsuite/protection/OPERATIONS.md</a:t>
-            </a:r>
-          </a:p>
-          <a:p>
-            <a:r>
-              <a:t>Staging and maintenance: deploy/protection/OPERATIONS.md</a:t>
+              <a:t>Containment can interrupt business services, so response decisions need clear evidence and accountability. VulnSuite places supported file quarantine and host isolation behind separate approval and local policy checks, with recorded outcomes and reviewed recovery paths.</a:t>
+            </a:r>
+          </a:p>
+          <a:p>
+            <a:r>
+              <a:t>Scope: Containment is disabled by default. Windows expiry uses local recovery tasks; Linux uses kernel timeouts.</a:t>
+            </a:r>
+          </a:p>
+          <a:p>
+            <a:r>
+              <a:t>How to use: docs/HOW_TO_USE.md</a:t>
+            </a:r>
+          </a:p>
+          <a:p>
+            <a:r>
+              <a:t>Engineering reference: vulnsuite/CLAUDE.md</a:t>
+            </a:r>
+          </a:p>
+          <a:p>
+            <a:r>
+              <a:t>Protection operations: vulnsuite/protection/OPERATIONS.md and deploy/protection/OPERATIONS.md</a:t>
             </a:r>
           </a:p>
           <a:p>
@@ -1240,22 +1285,27 @@
           <a:lstStyle/>
           <a:p>
             <a:r>
-              <a:t>The validation results demonstrate exercised code paths and selected native file behaviours. They provide evidence for technical review, while full containment effectiveness, host compatibility and operational performance require testing in the intended environment.</a:t>
-            </a:r>
-          </a:p>
-          <a:p>
-            <a:r>
-              <a:t>Scope: Automated tests and narrow native file checks do not establish live containment efficacy or production readiness.</a:t>
-            </a:r>
-          </a:p>
-          <a:p>
-            <a:r>
-              <a:t>Implementation and limitations: vulnsuite/protection/OPERATIONS.md</a:t>
-            </a:r>
-          </a:p>
-          <a:p>
-            <a:r>
-              <a:t>Staging and maintenance: deploy/protection/OPERATIONS.md</a:t>
+              <a:t>The assessment service evaluates exposure; the protection service handles telemetry, investigations and response. Their separate responsibilities help teams plan access, storage, maintenance and integration around the requirements of each service.</a:t>
+            </a:r>
+          </a:p>
+          <a:p>
+            <a:r>
+              <a:t>Scope: SQLite protection persistence is not a horizontally scalable or highly available PostgreSQL backend.</a:t>
+            </a:r>
+          </a:p>
+          <a:p>
+            <a:r>
+              <a:t>How to use: docs/HOW_TO_USE.md</a:t>
+            </a:r>
+          </a:p>
+          <a:p>
+            <a:r>
+              <a:t>Engineering reference: vulnsuite/CLAUDE.md</a:t>
+            </a:r>
+          </a:p>
+          <a:p>
+            <a:r>
+              <a:t>Protection operations: vulnsuite/protection/OPERATIONS.md and deploy/protection/OPERATIONS.md</a:t>
             </a:r>
           </a:p>
           <a:p>
@@ -1330,22 +1380,27 @@
           <a:lstStyle/>
           <a:p>
             <a:r>
-              <a:t>Deployment conditions determine whether security controls work as intended. Staging should verify identity, telemetry, permissions, enforcement and recovery together, including how containment behaves during service interruptions and host restarts.</a:t>
-            </a:r>
-          </a:p>
-          <a:p>
-            <a:r>
-              <a:t>Scope: Validate native Windows ACLs, firewall enforcement, scheduled-task expiry and reboot recovery before enabling containment.</a:t>
-            </a:r>
-          </a:p>
-          <a:p>
-            <a:r>
-              <a:t>Implementation and limitations: vulnsuite/protection/OPERATIONS.md</a:t>
-            </a:r>
-          </a:p>
-          <a:p>
-            <a:r>
-              <a:t>Staging and maintenance: deploy/protection/OPERATIONS.md</a:t>
+              <a:t>Host monitoring depends on knowing which agents are enrolled, authorised and reporting correctly. Central lifecycle controls help maintain that inventory, replace credentials, withdraw access and identify policy or version differences that require administrator attention.</a:t>
+            </a:r>
+          </a:p>
+          <a:p>
+            <a:r>
+              <a:t>Scope: Agent software installation and upgrades use an administrator-controlled rollout.</a:t>
+            </a:r>
+          </a:p>
+          <a:p>
+            <a:r>
+              <a:t>How to use: docs/HOW_TO_USE.md</a:t>
+            </a:r>
+          </a:p>
+          <a:p>
+            <a:r>
+              <a:t>Engineering reference: vulnsuite/CLAUDE.md</a:t>
+            </a:r>
+          </a:p>
+          <a:p>
+            <a:r>
+              <a:t>Protection operations: vulnsuite/protection/OPERATIONS.md and deploy/protection/OPERATIONS.md</a:t>
             </a:r>
           </a:p>
           <a:p>
@@ -1420,22 +1475,27 @@
           <a:lstStyle/>
           <a:p>
             <a:r>
-              <a:t>A suitable deployment starts with clear asset scope, accountable owners and measurable acceptance criteria. These decisions help teams assess coverage, operational impact, recovery expectations and the conditions under which approved response should be enabled.</a:t>
-            </a:r>
-          </a:p>
-          <a:p>
-            <a:r>
-              <a:t>Scope: Production deployment requires environment-specific validation and an approved operating procedure.</a:t>
-            </a:r>
-          </a:p>
-          <a:p>
-            <a:r>
-              <a:t>Implementation and limitations: vulnsuite/protection/OPERATIONS.md</a:t>
-            </a:r>
-          </a:p>
-          <a:p>
-            <a:r>
-              <a:t>Staging and maintenance: deploy/protection/OPERATIONS.md</a:t>
+              <a:t>Investigations often involve several people and external operational systems. Incident records preserve ownership and decisions, while signed notifications carry relevant information to organisation-operated integrations, helping teams coordinate work and recover delivery after temporary service failures.</a:t>
+            </a:r>
+          </a:p>
+          <a:p>
+            <a:r>
+              <a:t>Scope: Webhooks support organisation-operated adapters; native Jira, ServiceNow or Splunk connectors are not implied.</a:t>
+            </a:r>
+          </a:p>
+          <a:p>
+            <a:r>
+              <a:t>How to use: docs/HOW_TO_USE.md</a:t>
+            </a:r>
+          </a:p>
+          <a:p>
+            <a:r>
+              <a:t>Engineering reference: vulnsuite/CLAUDE.md</a:t>
+            </a:r>
+          </a:p>
+          <a:p>
+            <a:r>
+              <a:t>Protection operations: vulnsuite/protection/OPERATIONS.md and deploy/protection/OPERATIONS.md</a:t>
             </a:r>
           </a:p>
           <a:p>
@@ -1520,12 +1580,492 @@
           </a:p>
           <a:p>
             <a:r>
-              <a:t>Implementation and limitations: vulnsuite/protection/OPERATIONS.md</a:t>
-            </a:r>
-          </a:p>
-          <a:p>
-            <a:r>
-              <a:t>Staging and maintenance: deploy/protection/OPERATIONS.md</a:t>
+              <a:t>How to use: docs/HOW_TO_USE.md</a:t>
+            </a:r>
+          </a:p>
+          <a:p>
+            <a:r>
+              <a:t>Engineering reference: vulnsuite/CLAUDE.md</a:t>
+            </a:r>
+          </a:p>
+          <a:p>
+            <a:r>
+              <a:t>Protection operations: vulnsuite/protection/OPERATIONS.md and deploy/protection/OPERATIONS.md</a:t>
+            </a:r>
+          </a:p>
+          <a:p>
+            <a:r>
+              <a:t>Automated validation does not establish live enforcement or full EDR coverage.</a:t>
+            </a:r>
+          </a:p>
+        </p:txBody>
+      </p:sp>
+      <p:sp>
+        <p:nvSpPr>
+          <p:cNvPr id="4" name="Slide Number Placeholder 3"/>
+          <p:cNvSpPr>
+            <a:spLocks noGrp="1"/>
+          </p:cNvSpPr>
+          <p:nvPr>
+            <p:ph type="sldNum" idx="5" sz="quarter"/>
+          </p:nvPr>
+        </p:nvSpPr>
+        <p:spPr/>
+      </p:sp>
+    </p:spTree>
+  </p:cSld>
+  <p:clrMapOvr>
+    <a:masterClrMapping/>
+  </p:clrMapOvr>
+</p:notes>
+</file>
+
+<file path=ppt/notesSlides/notesSlide20.xml><?xml version="1.0" encoding="utf-8"?>
+<p:notes xmlns:a="http://schemas.openxmlformats.org/drawingml/2006/main" xmlns:p="http://schemas.openxmlformats.org/presentationml/2006/main" xmlns:r="http://schemas.openxmlformats.org/officeDocument/2006/relationships">
+  <p:cSld>
+    <p:spTree>
+      <p:nvGrpSpPr>
+        <p:cNvPr id="1" name=""/>
+        <p:cNvGrpSpPr/>
+        <p:nvPr/>
+      </p:nvGrpSpPr>
+      <p:grpSpPr>
+        <a:xfrm>
+          <a:off x="0" y="0"/>
+          <a:ext cx="0" cy="0"/>
+          <a:chOff x="0" y="0"/>
+          <a:chExt cx="0" cy="0"/>
+        </a:xfrm>
+      </p:grpSpPr>
+      <p:sp>
+        <p:nvSpPr>
+          <p:cNvPr id="2" name="Slide Image Placeholder 1"/>
+          <p:cNvSpPr>
+            <a:spLocks noGrp="1"/>
+          </p:cNvSpPr>
+          <p:nvPr>
+            <p:ph type="sldImg" idx="2"/>
+          </p:nvPr>
+        </p:nvSpPr>
+        <p:spPr/>
+      </p:sp>
+      <p:sp>
+        <p:nvSpPr>
+          <p:cNvPr id="3" name="Notes Placeholder 2"/>
+          <p:cNvSpPr>
+            <a:spLocks noGrp="1"/>
+          </p:cNvSpPr>
+          <p:nvPr>
+            <p:ph type="body" idx="3" sz="quarter"/>
+          </p:nvPr>
+        </p:nvSpPr>
+        <p:spPr/>
+        <p:txBody>
+          <a:bodyPr/>
+          <a:lstStyle/>
+          <a:p>
+            <a:r>
+              <a:t>Network interruptions and growing evidence volumes can affect security operations. Persistent queues and acknowledgement checks support recovery after outages, while backup and retention controls help teams manage stored evidence according to investigation needs and operational requirements.</a:t>
+            </a:r>
+          </a:p>
+          <a:p>
+            <a:r>
+              <a:t>Scope: Schedule maintenance explicitly and measure capacity, recovery objectives and backup security in the target environment.</a:t>
+            </a:r>
+          </a:p>
+          <a:p>
+            <a:r>
+              <a:t>How to use: docs/HOW_TO_USE.md</a:t>
+            </a:r>
+          </a:p>
+          <a:p>
+            <a:r>
+              <a:t>Engineering reference: vulnsuite/CLAUDE.md</a:t>
+            </a:r>
+          </a:p>
+          <a:p>
+            <a:r>
+              <a:t>Protection operations: vulnsuite/protection/OPERATIONS.md and deploy/protection/OPERATIONS.md</a:t>
+            </a:r>
+          </a:p>
+          <a:p>
+            <a:r>
+              <a:t>Automated validation does not establish live enforcement or full EDR coverage.</a:t>
+            </a:r>
+          </a:p>
+        </p:txBody>
+      </p:sp>
+      <p:sp>
+        <p:nvSpPr>
+          <p:cNvPr id="4" name="Slide Number Placeholder 3"/>
+          <p:cNvSpPr>
+            <a:spLocks noGrp="1"/>
+          </p:cNvSpPr>
+          <p:nvPr>
+            <p:ph type="sldNum" idx="5" sz="quarter"/>
+          </p:nvPr>
+        </p:nvSpPr>
+        <p:spPr/>
+      </p:sp>
+    </p:spTree>
+  </p:cSld>
+  <p:clrMapOvr>
+    <a:masterClrMapping/>
+  </p:clrMapOvr>
+</p:notes>
+</file>
+
+<file path=ppt/notesSlides/notesSlide21.xml><?xml version="1.0" encoding="utf-8"?>
+<p:notes xmlns:a="http://schemas.openxmlformats.org/drawingml/2006/main" xmlns:p="http://schemas.openxmlformats.org/presentationml/2006/main" xmlns:r="http://schemas.openxmlformats.org/officeDocument/2006/relationships">
+  <p:cSld>
+    <p:spTree>
+      <p:nvGrpSpPr>
+        <p:cNvPr id="1" name=""/>
+        <p:cNvGrpSpPr/>
+        <p:nvPr/>
+      </p:nvGrpSpPr>
+      <p:grpSpPr>
+        <a:xfrm>
+          <a:off x="0" y="0"/>
+          <a:ext cx="0" cy="0"/>
+          <a:chOff x="0" y="0"/>
+          <a:chExt cx="0" cy="0"/>
+        </a:xfrm>
+      </p:grpSpPr>
+      <p:sp>
+        <p:nvSpPr>
+          <p:cNvPr id="2" name="Slide Image Placeholder 1"/>
+          <p:cNvSpPr>
+            <a:spLocks noGrp="1"/>
+          </p:cNvSpPr>
+          <p:nvPr>
+            <p:ph type="sldImg" idx="2"/>
+          </p:nvPr>
+        </p:nvSpPr>
+        <p:spPr/>
+      </p:sp>
+      <p:sp>
+        <p:nvSpPr>
+          <p:cNvPr id="3" name="Notes Placeholder 2"/>
+          <p:cNvSpPr>
+            <a:spLocks noGrp="1"/>
+          </p:cNvSpPr>
+          <p:nvPr>
+            <p:ph type="body" idx="3" sz="quarter"/>
+          </p:nvPr>
+        </p:nvSpPr>
+        <p:spPr/>
+        <p:txBody>
+          <a:bodyPr/>
+          <a:lstStyle/>
+          <a:p>
+            <a:r>
+              <a:t>A security tool that downloads twenty scanners is a supply-chain target. Every binary in the image is pinned to a known checksum and verified at build time, the containers run unprivileged, and the whole stack can operate without internet access using locally mirrored vulnerability data.</a:t>
+            </a:r>
+          </a:p>
+          <a:p>
+            <a:r>
+              <a:t>Scope: Tests fail the build if any download lacks a pin or the runtime user is removed.</a:t>
+            </a:r>
+          </a:p>
+          <a:p>
+            <a:r>
+              <a:t>How to use: docs/HOW_TO_USE.md</a:t>
+            </a:r>
+          </a:p>
+          <a:p>
+            <a:r>
+              <a:t>Engineering reference: vulnsuite/CLAUDE.md</a:t>
+            </a:r>
+          </a:p>
+          <a:p>
+            <a:r>
+              <a:t>Protection operations: vulnsuite/protection/OPERATIONS.md and deploy/protection/OPERATIONS.md</a:t>
+            </a:r>
+          </a:p>
+          <a:p>
+            <a:r>
+              <a:t>Automated validation does not establish live enforcement or full EDR coverage.</a:t>
+            </a:r>
+          </a:p>
+        </p:txBody>
+      </p:sp>
+      <p:sp>
+        <p:nvSpPr>
+          <p:cNvPr id="4" name="Slide Number Placeholder 3"/>
+          <p:cNvSpPr>
+            <a:spLocks noGrp="1"/>
+          </p:cNvSpPr>
+          <p:nvPr>
+            <p:ph type="sldNum" idx="5" sz="quarter"/>
+          </p:nvPr>
+        </p:nvSpPr>
+        <p:spPr/>
+      </p:sp>
+    </p:spTree>
+  </p:cSld>
+  <p:clrMapOvr>
+    <a:masterClrMapping/>
+  </p:clrMapOvr>
+</p:notes>
+</file>
+
+<file path=ppt/notesSlides/notesSlide22.xml><?xml version="1.0" encoding="utf-8"?>
+<p:notes xmlns:a="http://schemas.openxmlformats.org/drawingml/2006/main" xmlns:p="http://schemas.openxmlformats.org/presentationml/2006/main" xmlns:r="http://schemas.openxmlformats.org/officeDocument/2006/relationships">
+  <p:cSld>
+    <p:spTree>
+      <p:nvGrpSpPr>
+        <p:cNvPr id="1" name=""/>
+        <p:cNvGrpSpPr/>
+        <p:nvPr/>
+      </p:nvGrpSpPr>
+      <p:grpSpPr>
+        <a:xfrm>
+          <a:off x="0" y="0"/>
+          <a:ext cx="0" cy="0"/>
+          <a:chOff x="0" y="0"/>
+          <a:chExt cx="0" cy="0"/>
+        </a:xfrm>
+      </p:grpSpPr>
+      <p:sp>
+        <p:nvSpPr>
+          <p:cNvPr id="2" name="Slide Image Placeholder 1"/>
+          <p:cNvSpPr>
+            <a:spLocks noGrp="1"/>
+          </p:cNvSpPr>
+          <p:nvPr>
+            <p:ph type="sldImg" idx="2"/>
+          </p:nvPr>
+        </p:nvSpPr>
+        <p:spPr/>
+      </p:sp>
+      <p:sp>
+        <p:nvSpPr>
+          <p:cNvPr id="3" name="Notes Placeholder 2"/>
+          <p:cNvSpPr>
+            <a:spLocks noGrp="1"/>
+          </p:cNvSpPr>
+          <p:nvPr>
+            <p:ph type="body" idx="3" sz="quarter"/>
+          </p:nvPr>
+        </p:nvSpPr>
+        <p:spPr/>
+        <p:txBody>
+          <a:bodyPr/>
+          <a:lstStyle/>
+          <a:p>
+            <a:r>
+              <a:t>The validation results demonstrate exercised code paths and selected native file behaviours. They provide evidence for technical review, while full containment effectiveness, host compatibility and operational performance require testing in the intended environment.</a:t>
+            </a:r>
+          </a:p>
+          <a:p>
+            <a:r>
+              <a:t>Scope: Automated tests and narrow native file checks do not establish live containment efficacy or production readiness.</a:t>
+            </a:r>
+          </a:p>
+          <a:p>
+            <a:r>
+              <a:t>How to use: docs/HOW_TO_USE.md</a:t>
+            </a:r>
+          </a:p>
+          <a:p>
+            <a:r>
+              <a:t>Engineering reference: vulnsuite/CLAUDE.md</a:t>
+            </a:r>
+          </a:p>
+          <a:p>
+            <a:r>
+              <a:t>Protection operations: vulnsuite/protection/OPERATIONS.md and deploy/protection/OPERATIONS.md</a:t>
+            </a:r>
+          </a:p>
+          <a:p>
+            <a:r>
+              <a:t>Automated validation does not establish live enforcement or full EDR coverage.</a:t>
+            </a:r>
+          </a:p>
+        </p:txBody>
+      </p:sp>
+      <p:sp>
+        <p:nvSpPr>
+          <p:cNvPr id="4" name="Slide Number Placeholder 3"/>
+          <p:cNvSpPr>
+            <a:spLocks noGrp="1"/>
+          </p:cNvSpPr>
+          <p:nvPr>
+            <p:ph type="sldNum" idx="5" sz="quarter"/>
+          </p:nvPr>
+        </p:nvSpPr>
+        <p:spPr/>
+      </p:sp>
+    </p:spTree>
+  </p:cSld>
+  <p:clrMapOvr>
+    <a:masterClrMapping/>
+  </p:clrMapOvr>
+</p:notes>
+</file>
+
+<file path=ppt/notesSlides/notesSlide23.xml><?xml version="1.0" encoding="utf-8"?>
+<p:notes xmlns:a="http://schemas.openxmlformats.org/drawingml/2006/main" xmlns:p="http://schemas.openxmlformats.org/presentationml/2006/main" xmlns:r="http://schemas.openxmlformats.org/officeDocument/2006/relationships">
+  <p:cSld>
+    <p:spTree>
+      <p:nvGrpSpPr>
+        <p:cNvPr id="1" name=""/>
+        <p:cNvGrpSpPr/>
+        <p:nvPr/>
+      </p:nvGrpSpPr>
+      <p:grpSpPr>
+        <a:xfrm>
+          <a:off x="0" y="0"/>
+          <a:ext cx="0" cy="0"/>
+          <a:chOff x="0" y="0"/>
+          <a:chExt cx="0" cy="0"/>
+        </a:xfrm>
+      </p:grpSpPr>
+      <p:sp>
+        <p:nvSpPr>
+          <p:cNvPr id="2" name="Slide Image Placeholder 1"/>
+          <p:cNvSpPr>
+            <a:spLocks noGrp="1"/>
+          </p:cNvSpPr>
+          <p:nvPr>
+            <p:ph type="sldImg" idx="2"/>
+          </p:nvPr>
+        </p:nvSpPr>
+        <p:spPr/>
+      </p:sp>
+      <p:sp>
+        <p:nvSpPr>
+          <p:cNvPr id="3" name="Notes Placeholder 2"/>
+          <p:cNvSpPr>
+            <a:spLocks noGrp="1"/>
+          </p:cNvSpPr>
+          <p:nvPr>
+            <p:ph type="body" idx="3" sz="quarter"/>
+          </p:nvPr>
+        </p:nvSpPr>
+        <p:spPr/>
+        <p:txBody>
+          <a:bodyPr/>
+          <a:lstStyle/>
+          <a:p>
+            <a:r>
+              <a:t>Deployment conditions determine whether security controls work as intended. Staging should verify identity, database roles, telemetry, permissions, enforcement and recovery together, including how containment behaves during service interruptions and host restarts.</a:t>
+            </a:r>
+          </a:p>
+          <a:p>
+            <a:r>
+              <a:t>Scope: Validate native Windows ACLs, firewall enforcement, scheduled-task expiry and reboot recovery before enabling containment.</a:t>
+            </a:r>
+          </a:p>
+          <a:p>
+            <a:r>
+              <a:t>How to use: docs/HOW_TO_USE.md</a:t>
+            </a:r>
+          </a:p>
+          <a:p>
+            <a:r>
+              <a:t>Engineering reference: vulnsuite/CLAUDE.md</a:t>
+            </a:r>
+          </a:p>
+          <a:p>
+            <a:r>
+              <a:t>Protection operations: vulnsuite/protection/OPERATIONS.md and deploy/protection/OPERATIONS.md</a:t>
+            </a:r>
+          </a:p>
+          <a:p>
+            <a:r>
+              <a:t>Automated validation does not establish live enforcement or full EDR coverage.</a:t>
+            </a:r>
+          </a:p>
+        </p:txBody>
+      </p:sp>
+      <p:sp>
+        <p:nvSpPr>
+          <p:cNvPr id="4" name="Slide Number Placeholder 3"/>
+          <p:cNvSpPr>
+            <a:spLocks noGrp="1"/>
+          </p:cNvSpPr>
+          <p:nvPr>
+            <p:ph type="sldNum" idx="5" sz="quarter"/>
+          </p:nvPr>
+        </p:nvSpPr>
+        <p:spPr/>
+      </p:sp>
+    </p:spTree>
+  </p:cSld>
+  <p:clrMapOvr>
+    <a:masterClrMapping/>
+  </p:clrMapOvr>
+</p:notes>
+</file>
+
+<file path=ppt/notesSlides/notesSlide24.xml><?xml version="1.0" encoding="utf-8"?>
+<p:notes xmlns:a="http://schemas.openxmlformats.org/drawingml/2006/main" xmlns:p="http://schemas.openxmlformats.org/presentationml/2006/main" xmlns:r="http://schemas.openxmlformats.org/officeDocument/2006/relationships">
+  <p:cSld>
+    <p:spTree>
+      <p:nvGrpSpPr>
+        <p:cNvPr id="1" name=""/>
+        <p:cNvGrpSpPr/>
+        <p:nvPr/>
+      </p:nvGrpSpPr>
+      <p:grpSpPr>
+        <a:xfrm>
+          <a:off x="0" y="0"/>
+          <a:ext cx="0" cy="0"/>
+          <a:chOff x="0" y="0"/>
+          <a:chExt cx="0" cy="0"/>
+        </a:xfrm>
+      </p:grpSpPr>
+      <p:sp>
+        <p:nvSpPr>
+          <p:cNvPr id="2" name="Slide Image Placeholder 1"/>
+          <p:cNvSpPr>
+            <a:spLocks noGrp="1"/>
+          </p:cNvSpPr>
+          <p:nvPr>
+            <p:ph type="sldImg" idx="2"/>
+          </p:nvPr>
+        </p:nvSpPr>
+        <p:spPr/>
+      </p:sp>
+      <p:sp>
+        <p:nvSpPr>
+          <p:cNvPr id="3" name="Notes Placeholder 2"/>
+          <p:cNvSpPr>
+            <a:spLocks noGrp="1"/>
+          </p:cNvSpPr>
+          <p:nvPr>
+            <p:ph type="body" idx="3" sz="quarter"/>
+          </p:nvPr>
+        </p:nvSpPr>
+        <p:spPr/>
+        <p:txBody>
+          <a:bodyPr/>
+          <a:lstStyle/>
+          <a:p>
+            <a:r>
+              <a:t>A suitable deployment starts with clear asset scope, accountable owners and measurable acceptance criteria. These decisions help teams assess coverage, operational impact, recovery expectations and the conditions under which approved response should be enabled.</a:t>
+            </a:r>
+          </a:p>
+          <a:p>
+            <a:r>
+              <a:t>Scope: Production deployment requires environment-specific validation and an approved operating procedure.</a:t>
+            </a:r>
+          </a:p>
+          <a:p>
+            <a:r>
+              <a:t>How to use: docs/HOW_TO_USE.md</a:t>
+            </a:r>
+          </a:p>
+          <a:p>
+            <a:r>
+              <a:t>Engineering reference: vulnsuite/CLAUDE.md</a:t>
+            </a:r>
+          </a:p>
+          <a:p>
+            <a:r>
+              <a:t>Protection operations: vulnsuite/protection/OPERATIONS.md and deploy/protection/OPERATIONS.md</a:t>
             </a:r>
           </a:p>
           <a:p>
@@ -1600,7 +2140,7 @@
           <a:lstStyle/>
           <a:p>
             <a:r>
-              <a:t>Different assets expose different kinds of risk, from vulnerable libraries to unsafe infrastructure settings and suspicious host activity. VulnSuite brings assessment and monitoring into a common operational context, with coverage determined by configured tools and telemetry sources.</a:t>
+              <a:t>Different assets expose different kinds of risk, from vulnerable libraries to unsafe cloud settings and suspicious host activity. VulnSuite brings assessment and monitoring into a common operational context, with coverage determined by configured tools and telemetry sources.</a:t>
             </a:r>
           </a:p>
           <a:p>
@@ -1610,12 +2150,17 @@
           </a:p>
           <a:p>
             <a:r>
-              <a:t>Implementation and limitations: vulnsuite/protection/OPERATIONS.md</a:t>
-            </a:r>
-          </a:p>
-          <a:p>
-            <a:r>
-              <a:t>Staging and maintenance: deploy/protection/OPERATIONS.md</a:t>
+              <a:t>How to use: docs/HOW_TO_USE.md</a:t>
+            </a:r>
+          </a:p>
+          <a:p>
+            <a:r>
+              <a:t>Engineering reference: vulnsuite/CLAUDE.md</a:t>
+            </a:r>
+          </a:p>
+          <a:p>
+            <a:r>
+              <a:t>Protection operations: vulnsuite/protection/OPERATIONS.md and deploy/protection/OPERATIONS.md</a:t>
             </a:r>
           </a:p>
           <a:p>
@@ -1690,22 +2235,27 @@
           <a:lstStyle/>
           <a:p>
             <a:r>
-              <a:t>Applications inherit risk from their own code, third-party dependencies and build artifacts. These checks help teams understand what software contains, identify known weaknesses and retain supporting evidence so remediation and software release decisions can be reviewed.</a:t>
-            </a:r>
-          </a:p>
-          <a:p>
-            <a:r>
-              <a:t>Scope: Coverage depends on configured targets, installed tools and available advisory data.</a:t>
-            </a:r>
-          </a:p>
-          <a:p>
-            <a:r>
-              <a:t>Implementation and limitations: vulnsuite/protection/OPERATIONS.md</a:t>
-            </a:r>
-          </a:p>
-          <a:p>
-            <a:r>
-              <a:t>Staging and maintenance: deploy/protection/OPERATIONS.md</a:t>
+              <a:t>A single risk engine scores every finding, whichever tool produced it, so one queue replaces twenty tool-specific reports. Regulatory context travels with the finding: the RBI clause it maps to, and for critical items the CERT-In incident record needed within six hours.</a:t>
+            </a:r>
+          </a:p>
+          <a:p>
+            <a:r>
+              <a:t>Scope: Missing CVSS falls back to severity; missing EPSS uses a configured floor so nothing is silently dropped.</a:t>
+            </a:r>
+          </a:p>
+          <a:p>
+            <a:r>
+              <a:t>How to use: docs/HOW_TO_USE.md</a:t>
+            </a:r>
+          </a:p>
+          <a:p>
+            <a:r>
+              <a:t>Engineering reference: vulnsuite/CLAUDE.md</a:t>
+            </a:r>
+          </a:p>
+          <a:p>
+            <a:r>
+              <a:t>Protection operations: vulnsuite/protection/OPERATIONS.md and deploy/protection/OPERATIONS.md</a:t>
             </a:r>
           </a:p>
           <a:p>
@@ -1780,22 +2330,27 @@
           <a:lstStyle/>
           <a:p>
             <a:r>
-              <a:t>Exposed services, weak configurations and application interfaces can create paths into an organisation. Assessment collectors help identify these conditions across selected targets, giving teams evidence to prioritise fixes and confirm which systems need closer investigation.</a:t>
-            </a:r>
-          </a:p>
-          <a:p>
-            <a:r>
-              <a:t>Scope: Assessment scans complement host monitoring and inline WAF enforcement.</a:t>
-            </a:r>
-          </a:p>
-          <a:p>
-            <a:r>
-              <a:t>Implementation and limitations: vulnsuite/protection/OPERATIONS.md</a:t>
-            </a:r>
-          </a:p>
-          <a:p>
-            <a:r>
-              <a:t>Staging and maintenance: deploy/protection/OPERATIONS.md</a:t>
+              <a:t>Applications inherit risk from their own code, third-party dependencies and build artifacts. These checks help teams understand what software contains, identify known weaknesses and retain supporting evidence so remediation and software release decisions can be reviewed.</a:t>
+            </a:r>
+          </a:p>
+          <a:p>
+            <a:r>
+              <a:t>Scope: Coverage depends on configured targets, installed tools and available advisory data.</a:t>
+            </a:r>
+          </a:p>
+          <a:p>
+            <a:r>
+              <a:t>How to use: docs/HOW_TO_USE.md</a:t>
+            </a:r>
+          </a:p>
+          <a:p>
+            <a:r>
+              <a:t>Engineering reference: vulnsuite/CLAUDE.md</a:t>
+            </a:r>
+          </a:p>
+          <a:p>
+            <a:r>
+              <a:t>Protection operations: vulnsuite/protection/OPERATIONS.md and deploy/protection/OPERATIONS.md</a:t>
             </a:r>
           </a:p>
           <a:p>
@@ -1870,22 +2425,27 @@
           <a:lstStyle/>
           <a:p>
             <a:r>
-              <a:t>Security operations involve sensitive evidence and actions that can interrupt services. Verified identity and explicit permissions establish who may view information or approve changes, while tenant boundaries limit assessment access to the organisation identified by trusted tokens.</a:t>
-            </a:r>
-          </a:p>
-          <a:p>
-            <a:r>
-              <a:t>Scope: JWT verification and RLS controls are implemented; live IdP integration and database-role enforcement need staging.</a:t>
-            </a:r>
-          </a:p>
-          <a:p>
-            <a:r>
-              <a:t>Implementation and limitations: vulnsuite/protection/OPERATIONS.md</a:t>
-            </a:r>
-          </a:p>
-          <a:p>
-            <a:r>
-              <a:t>Staging and maintenance: deploy/protection/OPERATIONS.md</a:t>
+              <a:t>Exposed services, weak configurations and application interfaces can create paths into an organisation. Assessment collectors identify these conditions across selected targets, giving teams evidence to prioritise fixes and confirm which systems need closer investigation.</a:t>
+            </a:r>
+          </a:p>
+          <a:p>
+            <a:r>
+              <a:t>Scope: Assessment scans complement host monitoring and inline WAF enforcement.</a:t>
+            </a:r>
+          </a:p>
+          <a:p>
+            <a:r>
+              <a:t>How to use: docs/HOW_TO_USE.md</a:t>
+            </a:r>
+          </a:p>
+          <a:p>
+            <a:r>
+              <a:t>Engineering reference: vulnsuite/CLAUDE.md</a:t>
+            </a:r>
+          </a:p>
+          <a:p>
+            <a:r>
+              <a:t>Protection operations: vulnsuite/protection/OPERATIONS.md and deploy/protection/OPERATIONS.md</a:t>
             </a:r>
           </a:p>
           <a:p>
@@ -1960,22 +2520,27 @@
           <a:lstStyle/>
           <a:p>
             <a:r>
-              <a:t>An analyst investigating an alert needs to understand the affected host, its known weaknesses and any response already underway. The console brings that context together, helping teams coordinate investigation while making unavailable information visible.</a:t>
-            </a:r>
-          </a:p>
-          <a:p>
-            <a:r>
-              <a:t>Scope: The console shows bounded recent lists; it is not an exhaustive cross-platform evidence search.</a:t>
-            </a:r>
-          </a:p>
-          <a:p>
-            <a:r>
-              <a:t>Implementation and limitations: vulnsuite/protection/OPERATIONS.md</a:t>
-            </a:r>
-          </a:p>
-          <a:p>
-            <a:r>
-              <a:t>Staging and maintenance: deploy/protection/OPERATIONS.md</a:t>
+              <a:t>Cloud estates change daily. Discovery keeps the asset inventory current across Azure, AWS and GCP, and posture benchmarks run under credentials that an administrator has explicitly bound to the tenant, so a scan can never reach further than the account it was approved for.</a:t>
+            </a:r>
+          </a:p>
+          <a:p>
+            <a:r>
+              <a:t>Scope: Read-only cloud roles are expected; VulnSuite never requests write permissions in the target accounts.</a:t>
+            </a:r>
+          </a:p>
+          <a:p>
+            <a:r>
+              <a:t>How to use: docs/HOW_TO_USE.md</a:t>
+            </a:r>
+          </a:p>
+          <a:p>
+            <a:r>
+              <a:t>Engineering reference: vulnsuite/CLAUDE.md</a:t>
+            </a:r>
+          </a:p>
+          <a:p>
+            <a:r>
+              <a:t>Protection operations: vulnsuite/protection/OPERATIONS.md and deploy/protection/OPERATIONS.md</a:t>
             </a:r>
           </a:p>
           <a:p>
@@ -2050,22 +2615,27 @@
           <a:lstStyle/>
           <a:p>
             <a:r>
-              <a:t>Server monitoring depends on collecting useful activity from the operating system and making gaps visible. Windows event sources and Linux audit records provide investigation evidence, while sensor health indicators help teams distinguish quiet systems from missing telemetry.</a:t>
-            </a:r>
-          </a:p>
-          <a:p>
-            <a:r>
-              <a:t>Scope: Windows and Linux support monitoring and approved containment. Native enforcement and recovery require staging validation.</a:t>
-            </a:r>
-          </a:p>
-          <a:p>
-            <a:r>
-              <a:t>Implementation and limitations: vulnsuite/protection/OPERATIONS.md</a:t>
-            </a:r>
-          </a:p>
-          <a:p>
-            <a:r>
-              <a:t>Staging and maintenance: deploy/protection/OPERATIONS.md</a:t>
+              <a:t>A scanning platform is itself a risk if it can be pointed at systems the organisation does not own. VulnSuite scans private networks freely but requires an administrator to attest ownership of public domains and ranges, and validates every target before it reaches a scanner.</a:t>
+            </a:r>
+          </a:p>
+          <a:p>
+            <a:r>
+              <a:t>Scope: A bypassed API check is still caught at worker time; defence in depth is deliberate.</a:t>
+            </a:r>
+          </a:p>
+          <a:p>
+            <a:r>
+              <a:t>How to use: docs/HOW_TO_USE.md</a:t>
+            </a:r>
+          </a:p>
+          <a:p>
+            <a:r>
+              <a:t>Engineering reference: vulnsuite/CLAUDE.md</a:t>
+            </a:r>
+          </a:p>
+          <a:p>
+            <a:r>
+              <a:t>Protection operations: vulnsuite/protection/OPERATIONS.md and deploy/protection/OPERATIONS.md</a:t>
             </a:r>
           </a:p>
           <a:p>
@@ -2140,22 +2710,27 @@
           <a:lstStyle/>
           <a:p>
             <a:r>
-              <a:t>Selected process patterns and reviewed malware indicators provide clues that warrant investigation. A known-bad hash match supplies specific file evidence; analysts can review its context before approving action, while missing scanners or telemetry remain visible as coverage limitations.</a:t>
-            </a:r>
-          </a:p>
-          <a:p>
-            <a:r>
-              <a:t>Scope: Coverage excludes complete memory scanning and full-disk protection. File quarantine does not terminate a running process.</a:t>
-            </a:r>
-          </a:p>
-          <a:p>
-            <a:r>
-              <a:t>Implementation and limitations: vulnsuite/protection/OPERATIONS.md</a:t>
-            </a:r>
-          </a:p>
-          <a:p>
-            <a:r>
-              <a:t>Staging and maintenance: deploy/protection/OPERATIONS.md</a:t>
+              <a:t>Security operations involve sensitive evidence and actions that can interrupt services. Verified identity and explicit permissions establish who may act, while PostgreSQL enforces tenant boundaries itself, so an application bug cannot expose another organisation’s data.</a:t>
+            </a:r>
+          </a:p>
+          <a:p>
+            <a:r>
+              <a:t>Scope: JWT verification and RLS controls are implemented; live IdP integration and database-role enforcement need staging.</a:t>
+            </a:r>
+          </a:p>
+          <a:p>
+            <a:r>
+              <a:t>How to use: docs/HOW_TO_USE.md</a:t>
+            </a:r>
+          </a:p>
+          <a:p>
+            <a:r>
+              <a:t>Engineering reference: vulnsuite/CLAUDE.md</a:t>
+            </a:r>
+          </a:p>
+          <a:p>
+            <a:r>
+              <a:t>Protection operations: vulnsuite/protection/OPERATIONS.md and deploy/protection/OPERATIONS.md</a:t>
             </a:r>
           </a:p>
           <a:p>
@@ -5243,7 +5818,7 @@
               </a:defRPr>
             </a:pPr>
             <a:r>
-              <a:t>VULNERABILITY ASSESSMENT + SERVER PROTECTION</a:t>
+              <a:t>VULNERABILITY ASSESSMENT + SERVER PROTECTION + SECURITY OPERATIONS</a:t>
             </a:r>
           </a:p>
         </p:txBody>
@@ -5324,7 +5899,7 @@
               </a:defRPr>
             </a:pPr>
             <a:r>
-              <a:t>VulnSuite helps security teams understand where systems are exposed, investigate suspicious server activity and coordinate approved responses. It connects assessment findings with operational evidence while keeping responsibility, review and deployment requirements visible.</a:t>
+              <a:t>VulnSuite is an internal security platform that finds and prioritises vulnerabilities, monitors servers for intrusion and coordinates approved response. It connects assessment findings with operational evidence while keeping responsibility, review and deployment requirements visible.</a:t>
             </a:r>
           </a:p>
         </p:txBody>
@@ -5449,7 +6024,7 @@
               </a:defRPr>
             </a:pPr>
             <a:r>
-              <a:t>Assessment and detection</a:t>
+              <a:t>What the suite does</a:t>
             </a:r>
           </a:p>
         </p:txBody>
@@ -5492,7 +6067,7 @@
               </a:defRPr>
             </a:pPr>
             <a:r>
-              <a:t>Code, dependencies and infrastructure assessment</a:t>
+              <a:t>Finds vulnerabilities across code, cloud, containers, hosts and APIs</a:t>
             </a:r>
           </a:p>
           <a:p>
@@ -5512,7 +6087,7 @@
               </a:defRPr>
             </a:pPr>
             <a:r>
-              <a:t>Linux and Windows security telemetry</a:t>
+              <a:t>Scores and prioritises them by business risk</a:t>
             </a:r>
           </a:p>
           <a:p>
@@ -5532,7 +6107,27 @@
               </a:defRPr>
             </a:pPr>
             <a:r>
-              <a:t>Malware signals and cross-host correlation</a:t>
+              <a:t>Monitors Linux and Windows servers for intrusion</a:t>
+            </a:r>
+          </a:p>
+          <a:p>
+            <a:pPr marL="182880" indent="-164592">
+              <a:lnSpc>
+                <a:spcPts val="2200"/>
+              </a:lnSpc>
+              <a:spcAft>
+                <a:spcPts val="800"/>
+              </a:spcAft>
+              <a:buChar char="•"/>
+              <a:defRPr sz="1700">
+                <a:solidFill>
+                  <a:srgbClr val="334155"/>
+                </a:solidFill>
+                <a:latin typeface="DejaVu Sans"/>
+              </a:defRPr>
+            </a:pPr>
+            <a:r>
+              <a:t>Coordinates investigation and approved response</a:t>
             </a:r>
           </a:p>
         </p:txBody>
@@ -5657,7 +6252,7 @@
               </a:defRPr>
             </a:pPr>
             <a:r>
-              <a:t>Security operations</a:t>
+              <a:t>How it is governed</a:t>
             </a:r>
           </a:p>
         </p:txBody>
@@ -5700,7 +6295,7 @@
               </a:defRPr>
             </a:pPr>
             <a:r>
-              <a:t>Verified identity, roles and a shared SOC view</a:t>
+              <a:t>Identity-provider login, four least-privilege roles</a:t>
             </a:r>
           </a:p>
           <a:p>
@@ -5720,7 +6315,7 @@
               </a:defRPr>
             </a:pPr>
             <a:r>
-              <a:t>Incident ownership and central agent enrollment</a:t>
+              <a:t>Tenant isolation enforced inside PostgreSQL</a:t>
             </a:r>
           </a:p>
           <a:p>
@@ -5740,7 +6335,27 @@
               </a:defRPr>
             </a:pPr>
             <a:r>
-              <a:t>Reviewed quarantine, isolation and cloud-WAF response</a:t>
+              <a:t>Immutable audit trail of every API action</a:t>
+            </a:r>
+          </a:p>
+          <a:p>
+            <a:pPr marL="182880" indent="-164592">
+              <a:lnSpc>
+                <a:spcPts val="2200"/>
+              </a:lnSpc>
+              <a:spcAft>
+                <a:spcPts val="800"/>
+              </a:spcAft>
+              <a:buChar char="•"/>
+              <a:defRPr sz="1700">
+                <a:solidFill>
+                  <a:srgbClr val="334155"/>
+                </a:solidFill>
+                <a:latin typeface="DejaVu Sans"/>
+              </a:defRPr>
+            </a:pPr>
+            <a:r>
+              <a:t>Passive by default; scans need explicit authorisation</a:t>
             </a:r>
           </a:p>
         </p:txBody>
@@ -5779,7 +6394,7 @@
               </a:defRPr>
             </a:pPr>
             <a:r>
-              <a:t>Introducing VulnSuite | Vulnerability assessment, server monitoring and approved security response.</a:t>
+              <a:t>Introducing VulnSuite | Built for Indian BFSI: RBI Cyber Security Framework and CERT-In obligations are embedded in every finding.</a:t>
             </a:r>
           </a:p>
         </p:txBody>
@@ -5857,7 +6472,7 @@
               </a:defRPr>
             </a:pPr>
             <a:r>
-              <a:t>01 / 19</a:t>
+              <a:t>01 / 24</a:t>
             </a:r>
           </a:p>
         </p:txBody>
@@ -5957,7 +6572,7 @@
               </a:defRPr>
             </a:pPr>
             <a:r>
-              <a:t>CROSS-HOST CORRELATION</a:t>
+              <a:t>ACCOUNTABILITY</a:t>
             </a:r>
           </a:p>
         </p:txBody>
@@ -5996,7 +6611,7 @@
               </a:defRPr>
             </a:pPr>
             <a:r>
-              <a:t>Lateral-movement signals</a:t>
+              <a:t>Audit trail and analyst triage</a:t>
             </a:r>
           </a:p>
         </p:txBody>
@@ -6038,7 +6653,7 @@
               </a:defRPr>
             </a:pPr>
             <a:r>
-              <a:t>Activity that appears ordinary on one server can become suspicious when repeated across several hosts. Correlating authentication events helps analysts recognise possible account misuse or movement between systems, while retaining context needed to assess legitimate administrative activity.</a:t>
+              <a:t>Auditors and incident reviewers need to know who did what, when, and why a risk was accepted. Every authenticated API call is recorded in a table nobody can rewrite, and analyst decisions carry a justification, an owner and an expiry that the platform enforces.</a:t>
             </a:r>
           </a:p>
         </p:txBody>
@@ -6163,7 +6778,7 @@
               </a:defRPr>
             </a:pPr>
             <a:r>
-              <a:t>Correlated patterns</a:t>
+              <a:t>Immutable API audit trail</a:t>
             </a:r>
           </a:p>
         </p:txBody>
@@ -6206,7 +6821,7 @@
               </a:defRPr>
             </a:pPr>
             <a:r>
-              <a:t>Password spraying across multiple hosts</a:t>
+              <a:t>Actor, tenant, action, outcome and client IP per call</a:t>
             </a:r>
           </a:p>
           <a:p>
@@ -6226,7 +6841,7 @@
               </a:defRPr>
             </a:pPr>
             <a:r>
-              <a:t>Same-user successful-login fan-out</a:t>
+              <a:t>Request IDs echoed back for log correlation</a:t>
             </a:r>
           </a:p>
           <a:p>
@@ -6246,7 +6861,7 @@
               </a:defRPr>
             </a:pPr>
             <a:r>
-              <a:t>Suspected pivots from already flagged hosts</a:t>
+              <a:t>Handler detail: targets requested, triage changes made</a:t>
             </a:r>
           </a:p>
           <a:p>
@@ -6266,7 +6881,7 @@
               </a:defRPr>
             </a:pPr>
             <a:r>
-              <a:t>Remote-access evidence from supported event sources</a:t>
+              <a:t>Insert-only table guarded by a database trigger</a:t>
             </a:r>
           </a:p>
         </p:txBody>
@@ -6391,7 +7006,7 @@
               </a:defRPr>
             </a:pPr>
             <a:r>
-              <a:t>Investigation context</a:t>
+              <a:t>Triage workflow</a:t>
             </a:r>
           </a:p>
         </p:txBody>
@@ -6434,7 +7049,7 @@
               </a:defRPr>
             </a:pPr>
             <a:r>
-              <a:t>Administrator-defined host-to-IP ownership</a:t>
+              <a:t>Open, triaged, accepted and false-positive states</a:t>
             </a:r>
           </a:p>
           <a:p>
@@ -6454,7 +7069,7 @@
               </a:defRPr>
             </a:pPr>
             <a:r>
-              <a:t>Time-bounded correlation with retained evidence</a:t>
+              <a:t>Justification required for acceptance and false positive</a:t>
             </a:r>
           </a:p>
           <a:p>
@@ -6474,7 +7089,7 @@
               </a:defRPr>
             </a:pPr>
             <a:r>
-              <a:t>Retry, out-of-order and restart handling</a:t>
+              <a:t>Acceptances expire within 365 days and reopen automatically</a:t>
             </a:r>
           </a:p>
           <a:p>
@@ -6494,7 +7109,7 @@
               </a:defRPr>
             </a:pPr>
             <a:r>
-              <a:t>Expiring exceptions for reviewed false positives</a:t>
+              <a:t>Re-scans never silently close analyst-owned findings</a:t>
             </a:r>
           </a:p>
         </p:txBody>
@@ -6533,7 +7148,7 @@
               </a:defRPr>
             </a:pPr>
             <a:r>
-              <a:t>NAT, shared accounts and legitimate automation need review; protocol labels require supporting source evidence.</a:t>
+              <a:t>A finding is auto-closed only when the tool that reported it completed cleanly and no longer reports it.</a:t>
             </a:r>
           </a:p>
         </p:txBody>
@@ -6611,7 +7226,7 @@
               </a:defRPr>
             </a:pPr>
             <a:r>
-              <a:t>10 / 19</a:t>
+              <a:t>10 / 24</a:t>
             </a:r>
           </a:p>
         </p:txBody>
@@ -6711,7 +7326,7 @@
               </a:defRPr>
             </a:pPr>
             <a:r>
-              <a:t>MODSECURITY + CLOUDFLARE</a:t>
+              <a:t>ALERTS + FINDINGS + AGENTS</a:t>
             </a:r>
           </a:p>
         </p:txBody>
@@ -6750,7 +7365,7 @@
               </a:defRPr>
             </a:pPr>
             <a:r>
-              <a:t>WAF integration</a:t>
+              <a:t>Unified operations console</a:t>
             </a:r>
           </a:p>
         </p:txBody>
@@ -6792,7 +7407,7 @@
               </a:defRPr>
             </a:pPr>
             <a:r>
-              <a:t>Web application firewalls provide an enforcement point for traffic reaching protected applications. Connecting their signals with investigations helps teams understand attempted abuse and review scoped blocking decisions, with tuning and deployment checks needed to avoid disrupting legitimate requests.</a:t>
+              <a:t>An analyst investigating an alert needs to understand the affected host, its known weaknesses and any response already underway. The console brings that context together, helping teams coordinate investigation while making unavailable information visible.</a:t>
             </a:r>
           </a:p>
         </p:txBody>
@@ -6917,7 +7532,7 @@
               </a:defRPr>
             </a:pPr>
             <a:r>
-              <a:t>On-premises or proxy WAF</a:t>
+              <a:t>Shared investigation view</a:t>
             </a:r>
           </a:p>
         </p:txBody>
@@ -6960,7 +7575,7 @@
               </a:defRPr>
             </a:pPr>
             <a:r>
-              <a:t>Nginx / ModSecurity and OWASP CRS templates</a:t>
+              <a:t>View intrusion alerts and vulnerability findings</a:t>
             </a:r>
           </a:p>
           <a:p>
@@ -6980,7 +7595,7 @@
               </a:defRPr>
             </a:pPr>
             <a:r>
-              <a:t>Sanitised serial-JSON rule-match collection</a:t>
+              <a:t>Inspect agent health, sensor status and version drift</a:t>
             </a:r>
           </a:p>
           <a:p>
@@ -7000,7 +7615,7 @@
               </a:defRPr>
             </a:pPr>
             <a:r>
-              <a:t>DetectionOnly starting configuration</a:t>
+              <a:t>Create and assign incidents from selected alerts</a:t>
             </a:r>
           </a:p>
           <a:p>
@@ -7020,7 +7635,7 @@
               </a:defRPr>
             </a:pPr>
             <a:r>
-              <a:t>No request-body or credential export</a:t>
+              <a:t>Review response plans before approval</a:t>
             </a:r>
           </a:p>
         </p:txBody>
@@ -7145,7 +7760,7 @@
               </a:defRPr>
             </a:pPr>
             <a:r>
-              <a:t>Cloudflare response connector</a:t>
+              <a:t>Operational safeguards</a:t>
             </a:r>
           </a:p>
         </p:txBody>
@@ -7188,7 +7803,7 @@
               </a:defRPr>
             </a:pPr>
             <a:r>
-              <a:t>Use a configured zone and custom-ruleset scope</a:t>
+              <a:t>Apply the same API role checks to console actions</a:t>
             </a:r>
           </a:p>
           <a:p>
@@ -7208,7 +7823,7 @@
               </a:defRPr>
             </a:pPr>
             <a:r>
-              <a:t>Apply an approved source-IP block</a:t>
+              <a:t>Keep access tokens in browser-tab memory</a:t>
             </a:r>
           </a:p>
           <a:p>
@@ -7228,7 +7843,7 @@
               </a:defRPr>
             </a:pPr>
             <a:r>
-              <a:t>Embed fixed expiry in the provider rule</a:t>
+              <a:t>Report unavailable upstream sources explicitly</a:t>
             </a:r>
           </a:p>
           <a:p>
@@ -7248,7 +7863,7 @@
               </a:defRPr>
             </a:pPr>
             <a:r>
-              <a:t>Retry cleanup without extending the deadline</a:t>
+              <a:t>Retrieve findings through a fixed HTTPS connector</a:t>
             </a:r>
           </a:p>
         </p:txBody>
@@ -7287,7 +7902,7 @@
               </a:defRPr>
             </a:pPr>
             <a:r>
-              <a:t>Rule ordering, provider permissions, propagation and real traffic enforcement remain staging checks.</a:t>
+              <a:t>The console shows bounded recent lists; it is not an exhaustive cross-platform evidence search.</a:t>
             </a:r>
           </a:p>
         </p:txBody>
@@ -7365,7 +7980,7 @@
               </a:defRPr>
             </a:pPr>
             <a:r>
-              <a:t>11 / 19</a:t>
+              <a:t>11 / 24</a:t>
             </a:r>
           </a:p>
         </p:txBody>
@@ -7465,7 +8080,7 @@
               </a:defRPr>
             </a:pPr>
             <a:r>
-              <a:t>APPROVAL + BOUNDED ENFORCEMENT</a:t>
+              <a:t>WINDOWS EVENTS + LINUX AUDIT</a:t>
             </a:r>
           </a:p>
         </p:txBody>
@@ -7504,7 +8119,7 @@
               </a:defRPr>
             </a:pPr>
             <a:r>
-              <a:t>Reviewed local containment</a:t>
+              <a:t>Windows and Linux monitoring</a:t>
             </a:r>
           </a:p>
         </p:txBody>
@@ -7546,7 +8161,7 @@
               </a:defRPr>
             </a:pPr>
             <a:r>
-              <a:t>Containment can interrupt business services, so response decisions need clear evidence and accountability. VulnSuite places supported file quarantine and host isolation behind separate approval and local policy checks, with recorded outcomes and reviewed recovery paths.</a:t>
+              <a:t>Server monitoring depends on collecting useful activity from the operating system and making gaps visible. Windows event sources and Linux audit records provide investigation evidence, while sensor health indicators help teams distinguish quiet systems from missing telemetry.</a:t>
             </a:r>
           </a:p>
         </p:txBody>
@@ -7671,7 +8286,7 @@
               </a:defRPr>
             </a:pPr>
             <a:r>
-              <a:t>Quarantine and restoration</a:t>
+              <a:t>Windows monitoring</a:t>
             </a:r>
           </a:p>
         </p:txBody>
@@ -7714,7 +8329,7 @@
               </a:defRPr>
             </a:pPr>
             <a:r>
-              <a:t>Use approved malware path and SHA256 evidence</a:t>
+              <a:t>Security log authentication and network logons</a:t>
             </a:r>
           </a:p>
           <a:p>
@@ -7734,7 +8349,7 @@
               </a:defRPr>
             </a:pPr>
             <a:r>
-              <a:t>Linux: private same-filesystem quarantine vault</a:t>
+              <a:t>RDP and SMB evidence where source events support it</a:t>
             </a:r>
           </a:p>
           <a:p>
@@ -7754,7 +8369,7 @@
               </a:defRPr>
             </a:pPr>
             <a:r>
-              <a:t>Windows: file-handle checks and protected ACLs</a:t>
+              <a:t>Sysmon process-creation records</a:t>
             </a:r>
           </a:p>
           <a:p>
@@ -7774,7 +8389,7 @@
               </a:defRPr>
             </a:pPr>
             <a:r>
-              <a:t>Restore without overwriting existing files</a:t>
+              <a:t>Selected fields without raw command-line capture</a:t>
             </a:r>
           </a:p>
         </p:txBody>
@@ -7899,7 +8514,7 @@
               </a:defRPr>
             </a:pPr>
             <a:r>
-              <a:t>Isolation and release</a:t>
+              <a:t>Linux monitoring</a:t>
             </a:r>
           </a:p>
         </p:txBody>
@@ -7942,7 +8557,7 @@
               </a:defRPr>
             </a:pPr>
             <a:r>
-              <a:t>Require separate approval and local policy</a:t>
+              <a:t>Event-driven audit execution records</a:t>
             </a:r>
           </a:p>
           <a:p>
@@ -7962,7 +8577,7 @@
               </a:defRPr>
             </a:pPr>
             <a:r>
-              <a:t>Linux: kernel-expiring nftables isolation</a:t>
+              <a:t>Linux /proc process polling</a:t>
             </a:r>
           </a:p>
           <a:p>
@@ -7982,7 +8597,7 @@
               </a:defRPr>
             </a:pPr>
             <a:r>
-              <a:t>Windows: firewall rules with local recovery tasks</a:t>
+              <a:t>SSH access, API denials and file-integrity signals</a:t>
             </a:r>
           </a:p>
           <a:p>
@@ -8002,7 +8617,7 @@
               </a:defRPr>
             </a:pPr>
             <a:r>
-              <a:t>Keep configured management exceptions</a:t>
+              <a:t>Sensor health and missing-telemetry indicators</a:t>
             </a:r>
           </a:p>
         </p:txBody>
@@ -8041,7 +8656,7 @@
               </a:defRPr>
             </a:pPr>
             <a:r>
-              <a:t>Containment is disabled by default. Windows expiry uses local recovery tasks; Linux uses kernel timeouts.</a:t>
+              <a:t>Windows and Linux support monitoring and approved containment. Native enforcement and recovery require staging validation.</a:t>
             </a:r>
           </a:p>
         </p:txBody>
@@ -8119,7 +8734,7 @@
               </a:defRPr>
             </a:pPr>
             <a:r>
-              <a:t>12 / 19</a:t>
+              <a:t>12 / 24</a:t>
             </a:r>
           </a:p>
         </p:txBody>
@@ -8219,7 +8834,7 @@
               </a:defRPr>
             </a:pPr>
             <a:r>
-              <a:t>PLATFORM ARCHITECTURE</a:t>
+              <a:t>SELECTED HOST SIGNALS</a:t>
             </a:r>
           </a:p>
         </p:txBody>
@@ -8258,7 +8873,7 @@
               </a:defRPr>
             </a:pPr>
             <a:r>
-              <a:t>How the components fit</a:t>
+              <a:t>Process and malware detection</a:t>
             </a:r>
           </a:p>
         </p:txBody>
@@ -8300,7 +8915,7 @@
               </a:defRPr>
             </a:pPr>
             <a:r>
-              <a:t>The assessment service evaluates exposure; the protection service handles telemetry, investigations and response. Their separate responsibilities help teams plan access, storage, maintenance and integration around the requirements of each service.</a:t>
+              <a:t>Selected process patterns and reviewed malware indicators provide clues that warrant investigation. A known-bad hash match supplies specific file evidence; analysts can review its context before approving action, while missing scanners or telemetry remain visible as coverage limitations.</a:t>
             </a:r>
           </a:p>
         </p:txBody>
@@ -8425,7 +9040,7 @@
               </a:defRPr>
             </a:pPr>
             <a:r>
-              <a:t>Assessment service</a:t>
+              <a:t>Suspicious activity</a:t>
             </a:r>
           </a:p>
         </p:txBody>
@@ -8468,7 +9083,7 @@
               </a:defRPr>
             </a:pPr>
             <a:r>
-              <a:t>Scanner collectors and orchestration workers</a:t>
+              <a:t>Recognised web-server parent spawning a shell</a:t>
             </a:r>
           </a:p>
           <a:p>
@@ -8488,7 +9103,7 @@
               </a:defRPr>
             </a:pPr>
             <a:r>
-              <a:t>Canonical findings and deterministic risk scoring</a:t>
+              <a:t>Execution from writable temporary locations</a:t>
             </a:r>
           </a:p>
           <a:p>
@@ -8508,7 +9123,7 @@
               </a:defRPr>
             </a:pPr>
             <a:r>
-              <a:t>Verified API access and PostgreSQL tenant policies</a:t>
+              <a:t>Deleted executable signals on Linux</a:t>
             </a:r>
           </a:p>
           <a:p>
@@ -8528,7 +9143,7 @@
               </a:defRPr>
             </a:pPr>
             <a:r>
-              <a:t>Read-only findings feed into the operations console</a:t>
+              <a:t>Event records for short-lived processes</a:t>
             </a:r>
           </a:p>
         </p:txBody>
@@ -8653,7 +9268,7 @@
               </a:defRPr>
             </a:pPr>
             <a:r>
-              <a:t>Protection service</a:t>
+              <a:t>Malware evidence</a:t>
             </a:r>
           </a:p>
         </p:txBody>
@@ -8696,7 +9311,7 @@
               </a:defRPr>
             </a:pPr>
             <a:r>
-              <a:t>Authenticated Linux and Windows agents</a:t>
+              <a:t>Known-bad SHA256 matches on selected targets</a:t>
             </a:r>
           </a:p>
           <a:p>
@@ -8716,7 +9331,7 @@
               </a:defRPr>
             </a:pPr>
             <a:r>
-              <a:t>One organisation per SQLite operational store</a:t>
+              <a:t>Optional Linux selected-file ClamAV scans</a:t>
             </a:r>
           </a:p>
           <a:p>
@@ -8736,7 +9351,7 @@
               </a:defRPr>
             </a:pPr>
             <a:r>
-              <a:t>Detection, incidents, policies and response history</a:t>
+              <a:t>Path, signature and hash retained for review</a:t>
             </a:r>
           </a:p>
           <a:p>
@@ -8756,7 +9371,7 @@
               </a:defRPr>
             </a:pPr>
             <a:r>
-              <a:t>Independent delivery and cloud-response worker</a:t>
+              <a:t>Unavailable scanners surface degraded coverage</a:t>
             </a:r>
           </a:p>
         </p:txBody>
@@ -8795,7 +9410,7 @@
               </a:defRPr>
             </a:pPr>
             <a:r>
-              <a:t>SQLite protection persistence is not a horizontally scalable or highly available PostgreSQL backend.</a:t>
+              <a:t>Coverage excludes complete memory scanning and full-disk protection. File quarantine does not terminate a running process.</a:t>
             </a:r>
           </a:p>
         </p:txBody>
@@ -8873,7 +9488,7 @@
               </a:defRPr>
             </a:pPr>
             <a:r>
-              <a:t>13 / 19</a:t>
+              <a:t>13 / 24</a:t>
             </a:r>
           </a:p>
         </p:txBody>
@@ -8973,7 +9588,7 @@
               </a:defRPr>
             </a:pPr>
             <a:r>
-              <a:t>ENROLLMENT + POLICY + HEALTH</a:t>
+              <a:t>CROSS-HOST CORRELATION</a:t>
             </a:r>
           </a:p>
         </p:txBody>
@@ -9012,7 +9627,7 @@
               </a:defRPr>
             </a:pPr>
             <a:r>
-              <a:t>Central agent lifecycle</a:t>
+              <a:t>Lateral-movement signals</a:t>
             </a:r>
           </a:p>
         </p:txBody>
@@ -9054,7 +9669,7 @@
               </a:defRPr>
             </a:pPr>
             <a:r>
-              <a:t>Host monitoring depends on knowing which agents are enrolled, authorised and reporting correctly. Central lifecycle controls help maintain that inventory, replace credentials, withdraw access and identify policy or version differences that require administrator attention.</a:t>
+              <a:t>Activity that appears ordinary on one server can become suspicious when repeated across several hosts. Correlating authentication events helps analysts recognise possible account misuse or movement between systems, while retaining context needed to assess legitimate administrative activity.</a:t>
             </a:r>
           </a:p>
         </p:txBody>
@@ -9179,7 +9794,7 @@
               </a:defRPr>
             </a:pPr>
             <a:r>
-              <a:t>Credential management</a:t>
+              <a:t>Correlated patterns</a:t>
             </a:r>
           </a:p>
         </p:txBody>
@@ -9222,7 +9837,7 @@
               </a:defRPr>
             </a:pPr>
             <a:r>
-              <a:t>Issue expiring, one-time enrollment credentials</a:t>
+              <a:t>Password spraying across multiple hosts</a:t>
             </a:r>
           </a:p>
           <a:p>
@@ -9242,7 +9857,7 @@
               </a:defRPr>
             </a:pPr>
             <a:r>
-              <a:t>Store hashes of enrolled host credentials</a:t>
+              <a:t>Same-user successful-login fan-out</a:t>
             </a:r>
           </a:p>
           <a:p>
@@ -9262,7 +9877,7 @@
               </a:defRPr>
             </a:pPr>
             <a:r>
-              <a:t>Rotate keys and revoke agent access centrally</a:t>
+              <a:t>Suspected pivots from already flagged hosts</a:t>
             </a:r>
           </a:p>
           <a:p>
@@ -9282,7 +9897,7 @@
               </a:defRPr>
             </a:pPr>
             <a:r>
-              <a:t>Cancel unexecuted responses after revocation</a:t>
+              <a:t>Remote-access evidence from supported event sources</a:t>
             </a:r>
           </a:p>
         </p:txBody>
@@ -9407,7 +10022,7 @@
               </a:defRPr>
             </a:pPr>
             <a:r>
-              <a:t>Inventory and policy</a:t>
+              <a:t>Investigation context</a:t>
             </a:r>
           </a:p>
         </p:txBody>
@@ -9450,7 +10065,7 @@
               </a:defRPr>
             </a:pPr>
             <a:r>
-              <a:t>Track platform, agent version and queue health</a:t>
+              <a:t>Administrator-defined host-to-IP ownership</a:t>
             </a:r>
           </a:p>
           <a:p>
@@ -9470,7 +10085,7 @@
               </a:defRPr>
             </a:pPr>
             <a:r>
-              <a:t>Record administrator policy-version history</a:t>
+              <a:t>Time-bounded correlation with retained evidence</a:t>
             </a:r>
           </a:p>
           <a:p>
@@ -9490,7 +10105,7 @@
               </a:defRPr>
             </a:pPr>
             <a:r>
-              <a:t>Flag drift from the desired software version</a:t>
+              <a:t>Retry, out-of-order and restart handling</a:t>
             </a:r>
           </a:p>
           <a:p>
@@ -9510,7 +10125,7 @@
               </a:defRPr>
             </a:pPr>
             <a:r>
-              <a:t>Keep privileged response enablement local to hosts</a:t>
+              <a:t>Expiring exceptions for reviewed false positives</a:t>
             </a:r>
           </a:p>
         </p:txBody>
@@ -9549,7 +10164,7 @@
               </a:defRPr>
             </a:pPr>
             <a:r>
-              <a:t>Agent software installation and upgrades use an administrator-controlled rollout.</a:t>
+              <a:t>NAT, shared accounts and legitimate automation need review; protocol labels require supporting source evidence.</a:t>
             </a:r>
           </a:p>
         </p:txBody>
@@ -9627,7 +10242,7 @@
               </a:defRPr>
             </a:pPr>
             <a:r>
-              <a:t>14 / 19</a:t>
+              <a:t>14 / 24</a:t>
             </a:r>
           </a:p>
         </p:txBody>
@@ -9727,7 +10342,7 @@
               </a:defRPr>
             </a:pPr>
             <a:r>
-              <a:t>OWNERSHIP + EVIDENCE + DELIVERY</a:t>
+              <a:t>MODSECURITY + CLOUDFLARE</a:t>
             </a:r>
           </a:p>
         </p:txBody>
@@ -9766,7 +10381,7 @@
               </a:defRPr>
             </a:pPr>
             <a:r>
-              <a:t>Incident and notification workflows</a:t>
+              <a:t>WAF integration</a:t>
             </a:r>
           </a:p>
         </p:txBody>
@@ -9808,7 +10423,7 @@
               </a:defRPr>
             </a:pPr>
             <a:r>
-              <a:t>Investigations often involve several people and external operational systems. Incident records preserve ownership and decisions, while signed notifications carry relevant information to organisation-operated integrations, helping teams coordinate work and recover delivery after temporary service failures.</a:t>
+              <a:t>Web application firewalls provide an enforcement point for traffic reaching protected applications. Connecting their signals with investigations helps teams understand attempted abuse and review scoped blocking decisions, with tuning and deployment checks needed to avoid disrupting legitimate requests.</a:t>
             </a:r>
           </a:p>
         </p:txBody>
@@ -9933,7 +10548,7 @@
               </a:defRPr>
             </a:pPr>
             <a:r>
-              <a:t>Investigation workflow</a:t>
+              <a:t>On-premises or proxy WAF</a:t>
             </a:r>
           </a:p>
         </p:txBody>
@@ -9976,7 +10591,7 @@
               </a:defRPr>
             </a:pPr>
             <a:r>
-              <a:t>Link alerts to owned incident cases</a:t>
+              <a:t>Nginx / ModSecurity and OWASP CRS templates</a:t>
             </a:r>
           </a:p>
           <a:p>
@@ -9996,7 +10611,7 @@
               </a:defRPr>
             </a:pPr>
             <a:r>
-              <a:t>Track status, notes and evidence timelines</a:t>
+              <a:t>Sanitised serial-JSON rule-match collection</a:t>
             </a:r>
           </a:p>
           <a:p>
@@ -10016,7 +10631,7 @@
               </a:defRPr>
             </a:pPr>
             <a:r>
-              <a:t>Protect concurrent edits with case versions</a:t>
+              <a:t>DetectionOnly starting configuration</a:t>
             </a:r>
           </a:p>
           <a:p>
@@ -10036,7 +10651,7 @@
               </a:defRPr>
             </a:pPr>
             <a:r>
-              <a:t>Review alerts and add scoped, expiring exceptions</a:t>
+              <a:t>No request-body or credential export</a:t>
             </a:r>
           </a:p>
         </p:txBody>
@@ -10161,7 +10776,7 @@
               </a:defRPr>
             </a:pPr>
             <a:r>
-              <a:t>SIEM and ticketing bridges</a:t>
+              <a:t>Cloudflare response connector</a:t>
             </a:r>
           </a:p>
         </p:txBody>
@@ -10204,7 +10819,7 @@
               </a:defRPr>
             </a:pPr>
             <a:r>
-              <a:t>Send signed JSON to fixed HTTPS endpoints</a:t>
+              <a:t>Use a configured zone and custom-ruleset scope</a:t>
             </a:r>
           </a:p>
           <a:p>
@@ -10224,7 +10839,7 @@
               </a:defRPr>
             </a:pPr>
             <a:r>
-              <a:t>Persist delivery state, leases and retry attempts</a:t>
+              <a:t>Apply an approved source-IP block</a:t>
             </a:r>
           </a:p>
           <a:p>
@@ -10244,7 +10859,7 @@
               </a:defRPr>
             </a:pPr>
             <a:r>
-              <a:t>Attach stable keys for receiver deduplication</a:t>
+              <a:t>Embed fixed expiry in the provider rule</a:t>
             </a:r>
           </a:p>
           <a:p>
@@ -10264,7 +10879,7 @@
               </a:defRPr>
             </a:pPr>
             <a:r>
-              <a:t>Audit outcomes without storing upstream secrets</a:t>
+              <a:t>Retry cleanup without extending the deadline</a:t>
             </a:r>
           </a:p>
         </p:txBody>
@@ -10303,7 +10918,7 @@
               </a:defRPr>
             </a:pPr>
             <a:r>
-              <a:t>Webhooks support organisation-operated adapters; native Jira, ServiceNow or Splunk connectors are not implied.</a:t>
+              <a:t>Rule ordering, provider permissions, propagation and real traffic enforcement remain staging checks.</a:t>
             </a:r>
           </a:p>
         </p:txBody>
@@ -10381,7 +10996,7 @@
               </a:defRPr>
             </a:pPr>
             <a:r>
-              <a:t>15 / 19</a:t>
+              <a:t>15 / 24</a:t>
             </a:r>
           </a:p>
         </p:txBody>
@@ -10481,7 +11096,7 @@
               </a:defRPr>
             </a:pPr>
             <a:r>
-              <a:t>RECOVERY + MAINTENANCE</a:t>
+              <a:t>APPROVAL + BOUNDED ENFORCEMENT</a:t>
             </a:r>
           </a:p>
         </p:txBody>
@@ -10520,7 +11135,7 @@
               </a:defRPr>
             </a:pPr>
             <a:r>
-              <a:t>Reliable delivery and retention</a:t>
+              <a:t>Reviewed local containment</a:t>
             </a:r>
           </a:p>
         </p:txBody>
@@ -10562,7 +11177,7 @@
               </a:defRPr>
             </a:pPr>
             <a:r>
-              <a:t>Network interruptions and growing evidence volumes can affect security operations. Persistent queues and acknowledgement checks support recovery after outages, while backup and retention controls help teams manage stored evidence according to investigation needs and operational requirements.</a:t>
+              <a:t>Containment can interrupt business services, so response decisions need clear evidence and accountability. VulnSuite places supported file quarantine and host isolation behind separate approval and local policy checks, with recorded outcomes and reviewed recovery paths.</a:t>
             </a:r>
           </a:p>
         </p:txBody>
@@ -10687,7 +11302,7 @@
               </a:defRPr>
             </a:pPr>
             <a:r>
-              <a:t>Telemetry continuity</a:t>
+              <a:t>Quarantine and restoration</a:t>
             </a:r>
           </a:p>
         </p:txBody>
@@ -10730,7 +11345,7 @@
               </a:defRPr>
             </a:pPr>
             <a:r>
-              <a:t>Keep events until exact acknowledgement</a:t>
+              <a:t>Use approved malware path and SHA256 evidence</a:t>
             </a:r>
           </a:p>
           <a:p>
@@ -10750,7 +11365,7 @@
               </a:defRPr>
             </a:pPr>
             <a:r>
-              <a:t>Replay retained events after service outages</a:t>
+              <a:t>Linux: private same-filesystem quarantine vault</a:t>
             </a:r>
           </a:p>
           <a:p>
@@ -10770,7 +11385,7 @@
               </a:defRPr>
             </a:pPr>
             <a:r>
-              <a:t>Pause collection visibly when the queue is full</a:t>
+              <a:t>Windows: file-handle checks and protected ACLs</a:t>
             </a:r>
           </a:p>
           <a:p>
@@ -10790,7 +11405,7 @@
               </a:defRPr>
             </a:pPr>
             <a:r>
-              <a:t>Archive older events without fresh containment</a:t>
+              <a:t>Restore without overwriting existing files</a:t>
             </a:r>
           </a:p>
         </p:txBody>
@@ -10915,7 +11530,7 @@
               </a:defRPr>
             </a:pPr>
             <a:r>
-              <a:t>Evidence maintenance</a:t>
+              <a:t>Isolation and release</a:t>
             </a:r>
           </a:p>
         </p:txBody>
@@ -10958,7 +11573,7 @@
               </a:defRPr>
             </a:pPr>
             <a:r>
-              <a:t>Create consistent SQLite backups and verify restore</a:t>
+              <a:t>Require separate approval and local policy</a:t>
             </a:r>
           </a:p>
           <a:p>
@@ -10978,7 +11593,7 @@
               </a:defRPr>
             </a:pPr>
             <a:r>
-              <a:t>Preview retention cleanup before applying it</a:t>
+              <a:t>Linux: kernel-expiring nftables isolation</a:t>
             </a:r>
           </a:p>
           <a:p>
@@ -10998,7 +11613,7 @@
               </a:defRPr>
             </a:pPr>
             <a:r>
-              <a:t>Preserve incident and response-linked evidence</a:t>
+              <a:t>Windows: firewall rules with local recovery tasks</a:t>
             </a:r>
           </a:p>
           <a:p>
@@ -11018,7 +11633,7 @@
               </a:defRPr>
             </a:pPr>
             <a:r>
-              <a:t>Create offline-agent and stale-sensor alerts</a:t>
+              <a:t>Keep configured management exceptions</a:t>
             </a:r>
           </a:p>
         </p:txBody>
@@ -11057,7 +11672,7 @@
               </a:defRPr>
             </a:pPr>
             <a:r>
-              <a:t>Schedule maintenance explicitly and measure capacity, recovery objectives and backup security in the target environment.</a:t>
+              <a:t>Containment is disabled by default. Windows expiry uses local recovery tasks; Linux uses kernel timeouts.</a:t>
             </a:r>
           </a:p>
         </p:txBody>
@@ -11135,7 +11750,7 @@
               </a:defRPr>
             </a:pPr>
             <a:r>
-              <a:t>16 / 19</a:t>
+              <a:t>16 / 24</a:t>
             </a:r>
           </a:p>
         </p:txBody>
@@ -11235,7 +11850,7 @@
               </a:defRPr>
             </a:pPr>
             <a:r>
-              <a:t>AUTOMATED CHECKS + NATIVE FILE CHECKS</a:t>
+              <a:t>PLATFORM ARCHITECTURE</a:t>
             </a:r>
           </a:p>
         </p:txBody>
@@ -11274,7 +11889,7 @@
               </a:defRPr>
             </a:pPr>
             <a:r>
-              <a:t>Validation evidence</a:t>
+              <a:t>How the components fit</a:t>
             </a:r>
           </a:p>
         </p:txBody>
@@ -11316,7 +11931,7 @@
               </a:defRPr>
             </a:pPr>
             <a:r>
-              <a:t>The validation results demonstrate exercised code paths and selected native file behaviours. They provide evidence for technical review, while full containment effectiveness, host compatibility and operational performance require testing in the intended environment.</a:t>
+              <a:t>The assessment service evaluates exposure; the protection service handles telemetry, investigations and response. Their separate responsibilities help teams plan access, storage, maintenance and integration around the requirements of each service.</a:t>
             </a:r>
           </a:p>
         </p:txBody>
@@ -11441,7 +12056,7 @@
               </a:defRPr>
             </a:pPr>
             <a:r>
-              <a:t>348 automated tests passed</a:t>
+              <a:t>Assessment service</a:t>
             </a:r>
           </a:p>
         </p:txBody>
@@ -11484,7 +12099,7 @@
               </a:defRPr>
             </a:pPr>
             <a:r>
-              <a:t>Access, roles and tenant boundaries</a:t>
+              <a:t>FastAPI service, Celery workers and nightly scheduler</a:t>
             </a:r>
           </a:p>
           <a:p>
@@ -11504,7 +12119,7 @@
               </a:defRPr>
             </a:pPr>
             <a:r>
-              <a:t>Detection, enrollment and incident workflows</a:t>
+              <a:t>PostgreSQL with tenant policies, Redis broker and cache</a:t>
             </a:r>
           </a:p>
           <a:p>
@@ -11524,7 +12139,7 @@
               </a:defRPr>
             </a:pPr>
             <a:r>
-              <a:t>Delivery, retention and outage recovery</a:t>
+              <a:t>Canonical findings, dedup and deterministic risk scoring</a:t>
             </a:r>
           </a:p>
           <a:p>
@@ -11544,7 +12159,7 @@
               </a:defRPr>
             </a:pPr>
             <a:r>
-              <a:t>Response workflows with mocked enforcement</a:t>
+              <a:t>Read-only findings feed into the operations console</a:t>
             </a:r>
           </a:p>
         </p:txBody>
@@ -11669,7 +12284,7 @@
               </a:defRPr>
             </a:pPr>
             <a:r>
-              <a:t>7 native Windows file checks passed</a:t>
+              <a:t>Protection service</a:t>
             </a:r>
           </a:p>
         </p:txBody>
@@ -11712,7 +12327,7 @@
               </a:defRPr>
             </a:pPr>
             <a:r>
-              <a:t>Disposable file-operation contract fixtures</a:t>
+              <a:t>Authenticated Linux and Windows agents</a:t>
             </a:r>
           </a:p>
           <a:p>
@@ -11732,7 +12347,7 @@
               </a:defRPr>
             </a:pPr>
             <a:r>
-              <a:t>Pinned-handle relative rename behavior</a:t>
+              <a:t>One organisation per SQLite operational store</a:t>
             </a:r>
           </a:p>
           <a:p>
@@ -11752,7 +12367,7 @@
               </a:defRPr>
             </a:pPr>
             <a:r>
-              <a:t>File-sharing and junction-race checks</a:t>
+              <a:t>Detection, incidents, policies and response history</a:t>
             </a:r>
           </a:p>
           <a:p>
@@ -11772,7 +12387,7 @@
               </a:defRPr>
             </a:pPr>
             <a:r>
-              <a:t>Full ACL and firewall workflows require staging</a:t>
+              <a:t>Independent delivery and cloud-response worker</a:t>
             </a:r>
           </a:p>
         </p:txBody>
@@ -11811,7 +12426,7 @@
               </a:defRPr>
             </a:pPr>
             <a:r>
-              <a:t>Automated tests and narrow native file checks do not establish live containment efficacy or production readiness.</a:t>
+              <a:t>SQLite protection persistence is not a horizontally scalable or highly available PostgreSQL backend.</a:t>
             </a:r>
           </a:p>
         </p:txBody>
@@ -11889,7 +12504,7 @@
               </a:defRPr>
             </a:pPr>
             <a:r>
-              <a:t>17 / 19</a:t>
+              <a:t>17 / 24</a:t>
             </a:r>
           </a:p>
         </p:txBody>
@@ -11989,7 +12604,7 @@
               </a:defRPr>
             </a:pPr>
             <a:r>
-              <a:t>DEPLOYMENT GATES</a:t>
+              <a:t>ENROLLMENT + POLICY + HEALTH</a:t>
             </a:r>
           </a:p>
         </p:txBody>
@@ -12028,7 +12643,7 @@
               </a:defRPr>
             </a:pPr>
             <a:r>
-              <a:t>Required staging validation</a:t>
+              <a:t>Central agent lifecycle</a:t>
             </a:r>
           </a:p>
         </p:txBody>
@@ -12070,7 +12685,7 @@
               </a:defRPr>
             </a:pPr>
             <a:r>
-              <a:t>Deployment conditions determine whether security controls work as intended. Staging should verify identity, telemetry, permissions, enforcement and recovery together, including how containment behaves during service interruptions and host restarts.</a:t>
+              <a:t>Host monitoring depends on knowing which agents are enrolled, authorised and reporting correctly. Central lifecycle controls help maintain that inventory, replace credentials, withdraw access and identify policy or version differences that require administrator attention.</a:t>
             </a:r>
           </a:p>
         </p:txBody>
@@ -12195,7 +12810,7 @@
               </a:defRPr>
             </a:pPr>
             <a:r>
-              <a:t>Identity and host environment</a:t>
+              <a:t>Credential management</a:t>
             </a:r>
           </a:p>
         </p:txBody>
@@ -12238,7 +12853,7 @@
               </a:defRPr>
             </a:pPr>
             <a:r>
-              <a:t>IdP issuance, token lifetime and revocation behavior</a:t>
+              <a:t>Issue expiring, one-time enrollment credentials</a:t>
             </a:r>
           </a:p>
           <a:p>
@@ -12258,7 +12873,7 @@
               </a:defRPr>
             </a:pPr>
             <a:r>
-              <a:t>PostgreSQL RLS with the deployed runtime role</a:t>
+              <a:t>Store hashes of enrolled host credentials</a:t>
             </a:r>
           </a:p>
           <a:p>
@@ -12278,7 +12893,7 @@
               </a:defRPr>
             </a:pPr>
             <a:r>
-              <a:t>Windows Security/Sysmon and Linux audit collection</a:t>
+              <a:t>Rotate keys and revoke agent access centrally</a:t>
             </a:r>
           </a:p>
           <a:p>
@@ -12298,7 +12913,7 @@
               </a:defRPr>
             </a:pPr>
             <a:r>
-              <a:t>Linux ClamAV installation, signatures and results</a:t>
+              <a:t>Cancel unexecuted responses after revocation</a:t>
             </a:r>
           </a:p>
         </p:txBody>
@@ -12423,7 +13038,7 @@
               </a:defRPr>
             </a:pPr>
             <a:r>
-              <a:t>Enforcement and workload</a:t>
+              <a:t>Inventory and policy</a:t>
             </a:r>
           </a:p>
         </p:txBody>
@@ -12466,7 +13081,7 @@
               </a:defRPr>
             </a:pPr>
             <a:r>
-              <a:t>Cloudflare permissions, expiry and rule ordering</a:t>
+              <a:t>Track platform, agent version and queue health</a:t>
             </a:r>
           </a:p>
           <a:p>
@@ -12486,7 +13101,7 @@
               </a:defRPr>
             </a:pPr>
             <a:r>
-              <a:t>ModSecurity / CRS tuning and real intervention</a:t>
+              <a:t>Record administrator policy-version history</a:t>
             </a:r>
           </a:p>
           <a:p>
@@ -12506,7 +13121,7 @@
               </a:defRPr>
             </a:pPr>
             <a:r>
-              <a:t>Linux/Windows isolation, expiry and rollback</a:t>
+              <a:t>Flag drift from the desired software version</a:t>
             </a:r>
           </a:p>
           <a:p>
@@ -12526,7 +13141,7 @@
               </a:defRPr>
             </a:pPr>
             <a:r>
-              <a:t>False positives, overhead, backlog and recovery</a:t>
+              <a:t>Keep privileged response enablement local to hosts</a:t>
             </a:r>
           </a:p>
         </p:txBody>
@@ -12565,7 +13180,7 @@
               </a:defRPr>
             </a:pPr>
             <a:r>
-              <a:t>Validate native Windows ACLs, firewall enforcement, scheduled-task expiry and reboot recovery before enabling containment.</a:t>
+              <a:t>Agent software installation and upgrades use an administrator-controlled rollout.</a:t>
             </a:r>
           </a:p>
         </p:txBody>
@@ -12643,7 +13258,7 @@
               </a:defRPr>
             </a:pPr>
             <a:r>
-              <a:t>18 / 19</a:t>
+              <a:t>18 / 24</a:t>
             </a:r>
           </a:p>
         </p:txBody>
@@ -12743,7 +13358,7 @@
               </a:defRPr>
             </a:pPr>
             <a:r>
-              <a:t>DEPLOYMENT PLANNING</a:t>
+              <a:t>OWNERSHIP + EVIDENCE + DELIVERY</a:t>
             </a:r>
           </a:p>
         </p:txBody>
@@ -12782,7 +13397,7 @@
               </a:defRPr>
             </a:pPr>
             <a:r>
-              <a:t>Evaluating fit for your organisation</a:t>
+              <a:t>Incident and notification workflows</a:t>
             </a:r>
           </a:p>
         </p:txBody>
@@ -12824,7 +13439,7 @@
               </a:defRPr>
             </a:pPr>
             <a:r>
-              <a:t>A suitable deployment starts with clear asset scope, accountable owners and measurable acceptance criteria. These decisions help teams assess coverage, operational impact, recovery expectations and the conditions under which approved response should be enabled.</a:t>
+              <a:t>Investigations often involve several people and external operational systems. Incident records preserve ownership and decisions, while signed notifications carry relevant information to organisation-operated integrations, helping teams coordinate work and recover delivery after temporary service failures.</a:t>
             </a:r>
           </a:p>
         </p:txBody>
@@ -12949,7 +13564,7 @@
               </a:defRPr>
             </a:pPr>
             <a:r>
-              <a:t>Scope and ownership</a:t>
+              <a:t>Investigation workflow</a:t>
             </a:r>
           </a:p>
         </p:txBody>
@@ -12992,7 +13607,7 @@
               </a:defRPr>
             </a:pPr>
             <a:r>
-              <a:t>Select applications, APIs and server assets</a:t>
+              <a:t>Link alerts to owned incident cases</a:t>
             </a:r>
           </a:p>
           <a:p>
@@ -13012,7 +13627,7 @@
               </a:defRPr>
             </a:pPr>
             <a:r>
-              <a:t>Identify incident owners and response approvers</a:t>
+              <a:t>Track status, notes and evidence timelines</a:t>
             </a:r>
           </a:p>
           <a:p>
@@ -13032,7 +13647,7 @@
               </a:defRPr>
             </a:pPr>
             <a:r>
-              <a:t>Define management-access exceptions</a:t>
+              <a:t>Protect concurrent edits with case versions</a:t>
             </a:r>
           </a:p>
           <a:p>
@@ -13052,7 +13667,7 @@
               </a:defRPr>
             </a:pPr>
             <a:r>
-              <a:t>Agree retention and recovery requirements</a:t>
+              <a:t>Review alerts and add scoped, expiring exceptions</a:t>
             </a:r>
           </a:p>
         </p:txBody>
@@ -13177,7 +13792,7 @@
               </a:defRPr>
             </a:pPr>
             <a:r>
-              <a:t>Acceptance criteria</a:t>
+              <a:t>SIEM and ticketing bridges</a:t>
             </a:r>
           </a:p>
         </p:txBody>
@@ -13220,7 +13835,7 @@
               </a:defRPr>
             </a:pPr>
             <a:r>
-              <a:t>Measure detection coverage and false positives</a:t>
+              <a:t>Send signed JSON to fixed HTTPS endpoints</a:t>
             </a:r>
           </a:p>
           <a:p>
@@ -13240,7 +13855,7 @@
               </a:defRPr>
             </a:pPr>
             <a:r>
-              <a:t>Verify roles and separate-actor approval</a:t>
+              <a:t>Persist delivery state, leases and retry attempts</a:t>
             </a:r>
           </a:p>
           <a:p>
@@ -13260,7 +13875,7 @@
               </a:defRPr>
             </a:pPr>
             <a:r>
-              <a:t>Exercise containment, expiry and restoration</a:t>
+              <a:t>Attach stable keys for receiver deduplication</a:t>
             </a:r>
           </a:p>
           <a:p>
@@ -13280,7 +13895,7 @@
               </a:defRPr>
             </a:pPr>
             <a:r>
-              <a:t>Measure host overhead and service recovery</a:t>
+              <a:t>Audit outcomes without storing upstream secrets</a:t>
             </a:r>
           </a:p>
         </p:txBody>
@@ -13319,7 +13934,7 @@
               </a:defRPr>
             </a:pPr>
             <a:r>
-              <a:t>Production deployment requires environment-specific validation and an approved operating procedure.</a:t>
+              <a:t>Webhooks support organisation-operated adapters; native Jira, ServiceNow or Splunk connectors are not implied.</a:t>
             </a:r>
           </a:p>
         </p:txBody>
@@ -13397,7 +14012,7 @@
               </a:defRPr>
             </a:pPr>
             <a:r>
-              <a:t>19 / 19</a:t>
+              <a:t>19 / 24</a:t>
             </a:r>
           </a:p>
         </p:txBody>
@@ -13766,7 +14381,7 @@
               </a:defRPr>
             </a:pPr>
             <a:r>
-              <a:t>Assess exposed services, APIs and TLS settings</a:t>
+              <a:t>Assess exposed services, APIs, TLS and cloud posture</a:t>
             </a:r>
           </a:p>
           <a:p>
@@ -13786,7 +14401,27 @@
               </a:defRPr>
             </a:pPr>
             <a:r>
-              <a:t>Prioritise findings using severity and asset context</a:t>
+              <a:t>Turn thousands of raw CVEs into a short P0–P4 queue</a:t>
+            </a:r>
+          </a:p>
+          <a:p>
+            <a:pPr marL="182880" indent="-164592">
+              <a:lnSpc>
+                <a:spcPts val="2200"/>
+              </a:lnSpc>
+              <a:spcAft>
+                <a:spcPts val="800"/>
+              </a:spcAft>
+              <a:buChar char="•"/>
+              <a:defRPr sz="1700">
+                <a:solidFill>
+                  <a:srgbClr val="334155"/>
+                </a:solidFill>
+                <a:latin typeface="DejaVu Sans"/>
+              </a:defRPr>
+            </a:pPr>
+            <a:r>
+              <a:t>Track remediation, acceptance and false positives</a:t>
             </a:r>
           </a:p>
         </p:txBody>
@@ -13997,6 +14632,26 @@
               <a:t>Approve bounded containment and inspect receipts</a:t>
             </a:r>
           </a:p>
+          <a:p>
+            <a:pPr marL="182880" indent="-164592">
+              <a:lnSpc>
+                <a:spcPts val="2200"/>
+              </a:lnSpc>
+              <a:spcAft>
+                <a:spcPts val="800"/>
+              </a:spcAft>
+              <a:buChar char="•"/>
+              <a:defRPr sz="1700">
+                <a:solidFill>
+                  <a:srgbClr val="334155"/>
+                </a:solidFill>
+                <a:latin typeface="DejaVu Sans"/>
+              </a:defRPr>
+            </a:pPr>
+            <a:r>
+              <a:t>Answer auditors from one evidence trail</a:t>
+            </a:r>
+          </a:p>
         </p:txBody>
       </p:sp>
       <p:sp>
@@ -14111,7 +14766,3777 @@
               </a:defRPr>
             </a:pPr>
             <a:r>
-              <a:t>02 / 19</a:t>
+              <a:t>02 / 24</a:t>
+            </a:r>
+          </a:p>
+        </p:txBody>
+      </p:sp>
+    </p:spTree>
+  </p:cSld>
+  <p:clrMapOvr>
+    <a:masterClrMapping/>
+  </p:clrMapOvr>
+</p:sld>
+</file>
+
+<file path=ppt/slides/slide20.xml><?xml version="1.0" encoding="utf-8"?>
+<p:sld xmlns:a="http://schemas.openxmlformats.org/drawingml/2006/main" xmlns:p="http://schemas.openxmlformats.org/presentationml/2006/main" xmlns:r="http://schemas.openxmlformats.org/officeDocument/2006/relationships">
+  <p:cSld>
+    <p:spTree>
+      <p:nvGrpSpPr>
+        <p:cNvPr id="1" name=""/>
+        <p:cNvGrpSpPr/>
+        <p:nvPr/>
+      </p:nvGrpSpPr>
+      <p:grpSpPr/>
+      <p:sp>
+        <p:nvSpPr>
+          <p:cNvPr id="2" name="Rectangle 1"/>
+          <p:cNvSpPr/>
+          <p:nvPr/>
+        </p:nvSpPr>
+        <p:spPr>
+          <a:xfrm>
+            <a:off x="0" y="0"/>
+            <a:ext cx="12191695" cy="91440"/>
+          </a:xfrm>
+          <a:prstGeom prst="rect">
+            <a:avLst/>
+          </a:prstGeom>
+          <a:solidFill>
+            <a:srgbClr val="F38020"/>
+          </a:solidFill>
+          <a:ln>
+            <a:noFill/>
+          </a:ln>
+        </p:spPr>
+        <p:style>
+          <a:lnRef idx="1">
+            <a:schemeClr val="accent1"/>
+          </a:lnRef>
+          <a:fillRef idx="3">
+            <a:schemeClr val="accent1"/>
+          </a:fillRef>
+          <a:effectRef idx="2">
+            <a:schemeClr val="accent1"/>
+          </a:effectRef>
+          <a:fontRef idx="minor">
+            <a:schemeClr val="lt1"/>
+          </a:fontRef>
+        </p:style>
+        <p:txBody>
+          <a:bodyPr rtlCol="0" anchor="ctr"/>
+          <a:lstStyle/>
+          <a:p>
+            <a:pPr algn="ctr"/>
+          </a:p>
+        </p:txBody>
+      </p:sp>
+      <p:sp>
+        <p:nvSpPr>
+          <p:cNvPr id="3" name="TextBox 2"/>
+          <p:cNvSpPr txBox="1"/>
+          <p:nvPr/>
+        </p:nvSpPr>
+        <p:spPr>
+          <a:xfrm>
+            <a:off x="502920" y="320040"/>
+            <a:ext cx="10972800" cy="274320"/>
+          </a:xfrm>
+          <a:prstGeom prst="rect">
+            <a:avLst/>
+          </a:prstGeom>
+          <a:noFill/>
+        </p:spPr>
+        <p:txBody>
+          <a:bodyPr wrap="square" lIns="0" rIns="0" tIns="0" bIns="0">
+            <a:noAutofit/>
+          </a:bodyPr>
+          <a:lstStyle/>
+          <a:p>
+            <a:pPr>
+              <a:spcAft>
+                <a:spcPts val="0"/>
+              </a:spcAft>
+              <a:defRPr sz="1100" b="1">
+                <a:solidFill>
+                  <a:srgbClr val="F38020"/>
+                </a:solidFill>
+                <a:latin typeface="DejaVu Sans"/>
+              </a:defRPr>
+            </a:pPr>
+            <a:r>
+              <a:t>RECOVERY + MAINTENANCE</a:t>
+            </a:r>
+          </a:p>
+        </p:txBody>
+      </p:sp>
+      <p:sp>
+        <p:nvSpPr>
+          <p:cNvPr id="4" name="TextBox 3"/>
+          <p:cNvSpPr txBox="1"/>
+          <p:nvPr/>
+        </p:nvSpPr>
+        <p:spPr>
+          <a:xfrm>
+            <a:off x="502920" y="795528"/>
+            <a:ext cx="11155680" cy="594360"/>
+          </a:xfrm>
+          <a:prstGeom prst="rect">
+            <a:avLst/>
+          </a:prstGeom>
+          <a:noFill/>
+        </p:spPr>
+        <p:txBody>
+          <a:bodyPr wrap="square" lIns="0" rIns="0" tIns="0" bIns="0">
+            <a:noAutofit/>
+          </a:bodyPr>
+          <a:lstStyle/>
+          <a:p>
+            <a:pPr>
+              <a:spcAft>
+                <a:spcPts val="0"/>
+              </a:spcAft>
+              <a:defRPr sz="3400" b="1">
+                <a:solidFill>
+                  <a:srgbClr val="0A2540"/>
+                </a:solidFill>
+                <a:latin typeface="DejaVu Sans"/>
+              </a:defRPr>
+            </a:pPr>
+            <a:r>
+              <a:t>Reliable delivery and retention</a:t>
+            </a:r>
+          </a:p>
+        </p:txBody>
+      </p:sp>
+      <p:sp>
+        <p:nvSpPr>
+          <p:cNvPr id="5" name="TextBox 4"/>
+          <p:cNvSpPr txBox="1"/>
+          <p:nvPr/>
+        </p:nvSpPr>
+        <p:spPr>
+          <a:xfrm>
+            <a:off x="502920" y="1417320"/>
+            <a:ext cx="11155680" cy="768096"/>
+          </a:xfrm>
+          <a:prstGeom prst="rect">
+            <a:avLst/>
+          </a:prstGeom>
+          <a:noFill/>
+        </p:spPr>
+        <p:txBody>
+          <a:bodyPr wrap="square" lIns="0" rIns="0" tIns="0" bIns="0">
+            <a:noAutofit/>
+          </a:bodyPr>
+          <a:lstStyle/>
+          <a:p>
+            <a:pPr>
+              <a:lnSpc>
+                <a:spcPts val="2000"/>
+              </a:lnSpc>
+              <a:spcAft>
+                <a:spcPts val="0"/>
+              </a:spcAft>
+              <a:defRPr sz="1550" b="0">
+                <a:solidFill>
+                  <a:srgbClr val="334155"/>
+                </a:solidFill>
+                <a:latin typeface="DejaVu Sans"/>
+              </a:defRPr>
+            </a:pPr>
+            <a:r>
+              <a:t>Network interruptions and growing evidence volumes can affect security operations. Persistent queues and acknowledgement checks support recovery after outages, while backup and retention controls help teams manage stored evidence according to investigation needs and operational requirements.</a:t>
+            </a:r>
+          </a:p>
+        </p:txBody>
+      </p:sp>
+      <p:sp>
+        <p:nvSpPr>
+          <p:cNvPr id="6" name="Rectangle 5"/>
+          <p:cNvSpPr/>
+          <p:nvPr/>
+        </p:nvSpPr>
+        <p:spPr>
+          <a:xfrm>
+            <a:off x="502920" y="2331720"/>
+            <a:ext cx="5404104" cy="3657600"/>
+          </a:xfrm>
+          <a:prstGeom prst="rect">
+            <a:avLst/>
+          </a:prstGeom>
+          <a:solidFill>
+            <a:srgbClr val="F3F6FA"/>
+          </a:solidFill>
+          <a:ln>
+            <a:noFill/>
+          </a:ln>
+        </p:spPr>
+        <p:style>
+          <a:lnRef idx="1">
+            <a:schemeClr val="accent1"/>
+          </a:lnRef>
+          <a:fillRef idx="3">
+            <a:schemeClr val="accent1"/>
+          </a:fillRef>
+          <a:effectRef idx="2">
+            <a:schemeClr val="accent1"/>
+          </a:effectRef>
+          <a:fontRef idx="minor">
+            <a:schemeClr val="lt1"/>
+          </a:fontRef>
+        </p:style>
+        <p:txBody>
+          <a:bodyPr rtlCol="0" anchor="ctr"/>
+          <a:lstStyle/>
+          <a:p>
+            <a:pPr algn="ctr"/>
+          </a:p>
+        </p:txBody>
+      </p:sp>
+      <p:sp>
+        <p:nvSpPr>
+          <p:cNvPr id="7" name="Rectangle 6"/>
+          <p:cNvSpPr/>
+          <p:nvPr/>
+        </p:nvSpPr>
+        <p:spPr>
+          <a:xfrm>
+            <a:off x="502920" y="2331720"/>
+            <a:ext cx="45720" cy="3657600"/>
+          </a:xfrm>
+          <a:prstGeom prst="rect">
+            <a:avLst/>
+          </a:prstGeom>
+          <a:solidFill>
+            <a:srgbClr val="F38020"/>
+          </a:solidFill>
+          <a:ln>
+            <a:noFill/>
+          </a:ln>
+        </p:spPr>
+        <p:style>
+          <a:lnRef idx="1">
+            <a:schemeClr val="accent1"/>
+          </a:lnRef>
+          <a:fillRef idx="3">
+            <a:schemeClr val="accent1"/>
+          </a:fillRef>
+          <a:effectRef idx="2">
+            <a:schemeClr val="accent1"/>
+          </a:effectRef>
+          <a:fontRef idx="minor">
+            <a:schemeClr val="lt1"/>
+          </a:fontRef>
+        </p:style>
+        <p:txBody>
+          <a:bodyPr rtlCol="0" anchor="ctr"/>
+          <a:lstStyle/>
+          <a:p>
+            <a:pPr algn="ctr"/>
+          </a:p>
+        </p:txBody>
+      </p:sp>
+      <p:sp>
+        <p:nvSpPr>
+          <p:cNvPr id="8" name="TextBox 7"/>
+          <p:cNvSpPr txBox="1"/>
+          <p:nvPr/>
+        </p:nvSpPr>
+        <p:spPr>
+          <a:xfrm>
+            <a:off x="749808" y="2542032"/>
+            <a:ext cx="4901184" cy="594360"/>
+          </a:xfrm>
+          <a:prstGeom prst="rect">
+            <a:avLst/>
+          </a:prstGeom>
+          <a:noFill/>
+        </p:spPr>
+        <p:txBody>
+          <a:bodyPr wrap="square" lIns="0" rIns="0" tIns="0" bIns="0">
+            <a:noAutofit/>
+          </a:bodyPr>
+          <a:lstStyle/>
+          <a:p>
+            <a:pPr>
+              <a:spcAft>
+                <a:spcPts val="0"/>
+              </a:spcAft>
+              <a:defRPr sz="2000" b="1">
+                <a:solidFill>
+                  <a:srgbClr val="0A2540"/>
+                </a:solidFill>
+                <a:latin typeface="DejaVu Sans"/>
+              </a:defRPr>
+            </a:pPr>
+            <a:r>
+              <a:t>Telemetry continuity</a:t>
+            </a:r>
+          </a:p>
+        </p:txBody>
+      </p:sp>
+      <p:sp>
+        <p:nvSpPr>
+          <p:cNvPr id="9" name="TextBox 8"/>
+          <p:cNvSpPr txBox="1"/>
+          <p:nvPr/>
+        </p:nvSpPr>
+        <p:spPr>
+          <a:xfrm>
+            <a:off x="749808" y="3236976"/>
+            <a:ext cx="4846320" cy="2615184"/>
+          </a:xfrm>
+          <a:prstGeom prst="rect">
+            <a:avLst/>
+          </a:prstGeom>
+          <a:noFill/>
+        </p:spPr>
+        <p:txBody>
+          <a:bodyPr wrap="square" lIns="0" rIns="0" tIns="0" bIns="0">
+            <a:noAutofit/>
+          </a:bodyPr>
+          <a:lstStyle/>
+          <a:p>
+            <a:pPr marL="182880" indent="-164592">
+              <a:lnSpc>
+                <a:spcPts val="2200"/>
+              </a:lnSpc>
+              <a:spcAft>
+                <a:spcPts val="800"/>
+              </a:spcAft>
+              <a:buChar char="•"/>
+              <a:defRPr sz="1700" b="0">
+                <a:solidFill>
+                  <a:srgbClr val="334155"/>
+                </a:solidFill>
+                <a:latin typeface="DejaVu Sans"/>
+              </a:defRPr>
+            </a:pPr>
+            <a:r>
+              <a:t>Keep events until exact acknowledgement</a:t>
+            </a:r>
+          </a:p>
+          <a:p>
+            <a:pPr marL="182880" indent="-164592">
+              <a:lnSpc>
+                <a:spcPts val="2200"/>
+              </a:lnSpc>
+              <a:spcAft>
+                <a:spcPts val="800"/>
+              </a:spcAft>
+              <a:buChar char="•"/>
+              <a:defRPr sz="1700">
+                <a:solidFill>
+                  <a:srgbClr val="334155"/>
+                </a:solidFill>
+                <a:latin typeface="DejaVu Sans"/>
+              </a:defRPr>
+            </a:pPr>
+            <a:r>
+              <a:t>Replay retained events after service outages</a:t>
+            </a:r>
+          </a:p>
+          <a:p>
+            <a:pPr marL="182880" indent="-164592">
+              <a:lnSpc>
+                <a:spcPts val="2200"/>
+              </a:lnSpc>
+              <a:spcAft>
+                <a:spcPts val="800"/>
+              </a:spcAft>
+              <a:buChar char="•"/>
+              <a:defRPr sz="1700">
+                <a:solidFill>
+                  <a:srgbClr val="334155"/>
+                </a:solidFill>
+                <a:latin typeface="DejaVu Sans"/>
+              </a:defRPr>
+            </a:pPr>
+            <a:r>
+              <a:t>Pause collection visibly when the queue is full</a:t>
+            </a:r>
+          </a:p>
+          <a:p>
+            <a:pPr marL="182880" indent="-164592">
+              <a:lnSpc>
+                <a:spcPts val="2200"/>
+              </a:lnSpc>
+              <a:spcAft>
+                <a:spcPts val="800"/>
+              </a:spcAft>
+              <a:buChar char="•"/>
+              <a:defRPr sz="1700">
+                <a:solidFill>
+                  <a:srgbClr val="334155"/>
+                </a:solidFill>
+                <a:latin typeface="DejaVu Sans"/>
+              </a:defRPr>
+            </a:pPr>
+            <a:r>
+              <a:t>Archive older events without fresh containment</a:t>
+            </a:r>
+          </a:p>
+        </p:txBody>
+      </p:sp>
+      <p:sp>
+        <p:nvSpPr>
+          <p:cNvPr id="10" name="Rectangle 9"/>
+          <p:cNvSpPr/>
+          <p:nvPr/>
+        </p:nvSpPr>
+        <p:spPr>
+          <a:xfrm>
+            <a:off x="6281928" y="2331720"/>
+            <a:ext cx="5404104" cy="3657600"/>
+          </a:xfrm>
+          <a:prstGeom prst="rect">
+            <a:avLst/>
+          </a:prstGeom>
+          <a:solidFill>
+            <a:srgbClr val="F3F6FA"/>
+          </a:solidFill>
+          <a:ln>
+            <a:noFill/>
+          </a:ln>
+        </p:spPr>
+        <p:style>
+          <a:lnRef idx="1">
+            <a:schemeClr val="accent1"/>
+          </a:lnRef>
+          <a:fillRef idx="3">
+            <a:schemeClr val="accent1"/>
+          </a:fillRef>
+          <a:effectRef idx="2">
+            <a:schemeClr val="accent1"/>
+          </a:effectRef>
+          <a:fontRef idx="minor">
+            <a:schemeClr val="lt1"/>
+          </a:fontRef>
+        </p:style>
+        <p:txBody>
+          <a:bodyPr rtlCol="0" anchor="ctr"/>
+          <a:lstStyle/>
+          <a:p>
+            <a:pPr algn="ctr"/>
+          </a:p>
+        </p:txBody>
+      </p:sp>
+      <p:sp>
+        <p:nvSpPr>
+          <p:cNvPr id="11" name="Rectangle 10"/>
+          <p:cNvSpPr/>
+          <p:nvPr/>
+        </p:nvSpPr>
+        <p:spPr>
+          <a:xfrm>
+            <a:off x="6281928" y="2331720"/>
+            <a:ext cx="45720" cy="3657600"/>
+          </a:xfrm>
+          <a:prstGeom prst="rect">
+            <a:avLst/>
+          </a:prstGeom>
+          <a:solidFill>
+            <a:srgbClr val="F38020"/>
+          </a:solidFill>
+          <a:ln>
+            <a:noFill/>
+          </a:ln>
+        </p:spPr>
+        <p:style>
+          <a:lnRef idx="1">
+            <a:schemeClr val="accent1"/>
+          </a:lnRef>
+          <a:fillRef idx="3">
+            <a:schemeClr val="accent1"/>
+          </a:fillRef>
+          <a:effectRef idx="2">
+            <a:schemeClr val="accent1"/>
+          </a:effectRef>
+          <a:fontRef idx="minor">
+            <a:schemeClr val="lt1"/>
+          </a:fontRef>
+        </p:style>
+        <p:txBody>
+          <a:bodyPr rtlCol="0" anchor="ctr"/>
+          <a:lstStyle/>
+          <a:p>
+            <a:pPr algn="ctr"/>
+          </a:p>
+        </p:txBody>
+      </p:sp>
+      <p:sp>
+        <p:nvSpPr>
+          <p:cNvPr id="12" name="TextBox 11"/>
+          <p:cNvSpPr txBox="1"/>
+          <p:nvPr/>
+        </p:nvSpPr>
+        <p:spPr>
+          <a:xfrm>
+            <a:off x="6528816" y="2542032"/>
+            <a:ext cx="4901184" cy="594360"/>
+          </a:xfrm>
+          <a:prstGeom prst="rect">
+            <a:avLst/>
+          </a:prstGeom>
+          <a:noFill/>
+        </p:spPr>
+        <p:txBody>
+          <a:bodyPr wrap="square" lIns="0" rIns="0" tIns="0" bIns="0">
+            <a:noAutofit/>
+          </a:bodyPr>
+          <a:lstStyle/>
+          <a:p>
+            <a:pPr>
+              <a:spcAft>
+                <a:spcPts val="0"/>
+              </a:spcAft>
+              <a:defRPr sz="2000" b="1">
+                <a:solidFill>
+                  <a:srgbClr val="0A2540"/>
+                </a:solidFill>
+                <a:latin typeface="DejaVu Sans"/>
+              </a:defRPr>
+            </a:pPr>
+            <a:r>
+              <a:t>Evidence maintenance</a:t>
+            </a:r>
+          </a:p>
+        </p:txBody>
+      </p:sp>
+      <p:sp>
+        <p:nvSpPr>
+          <p:cNvPr id="13" name="TextBox 12"/>
+          <p:cNvSpPr txBox="1"/>
+          <p:nvPr/>
+        </p:nvSpPr>
+        <p:spPr>
+          <a:xfrm>
+            <a:off x="6528816" y="3236976"/>
+            <a:ext cx="4846320" cy="2615184"/>
+          </a:xfrm>
+          <a:prstGeom prst="rect">
+            <a:avLst/>
+          </a:prstGeom>
+          <a:noFill/>
+        </p:spPr>
+        <p:txBody>
+          <a:bodyPr wrap="square" lIns="0" rIns="0" tIns="0" bIns="0">
+            <a:noAutofit/>
+          </a:bodyPr>
+          <a:lstStyle/>
+          <a:p>
+            <a:pPr marL="182880" indent="-164592">
+              <a:lnSpc>
+                <a:spcPts val="2200"/>
+              </a:lnSpc>
+              <a:spcAft>
+                <a:spcPts val="800"/>
+              </a:spcAft>
+              <a:buChar char="•"/>
+              <a:defRPr sz="1700" b="0">
+                <a:solidFill>
+                  <a:srgbClr val="334155"/>
+                </a:solidFill>
+                <a:latin typeface="DejaVu Sans"/>
+              </a:defRPr>
+            </a:pPr>
+            <a:r>
+              <a:t>Create consistent SQLite backups and verify restore</a:t>
+            </a:r>
+          </a:p>
+          <a:p>
+            <a:pPr marL="182880" indent="-164592">
+              <a:lnSpc>
+                <a:spcPts val="2200"/>
+              </a:lnSpc>
+              <a:spcAft>
+                <a:spcPts val="800"/>
+              </a:spcAft>
+              <a:buChar char="•"/>
+              <a:defRPr sz="1700">
+                <a:solidFill>
+                  <a:srgbClr val="334155"/>
+                </a:solidFill>
+                <a:latin typeface="DejaVu Sans"/>
+              </a:defRPr>
+            </a:pPr>
+            <a:r>
+              <a:t>Preview retention cleanup before applying it</a:t>
+            </a:r>
+          </a:p>
+          <a:p>
+            <a:pPr marL="182880" indent="-164592">
+              <a:lnSpc>
+                <a:spcPts val="2200"/>
+              </a:lnSpc>
+              <a:spcAft>
+                <a:spcPts val="800"/>
+              </a:spcAft>
+              <a:buChar char="•"/>
+              <a:defRPr sz="1700">
+                <a:solidFill>
+                  <a:srgbClr val="334155"/>
+                </a:solidFill>
+                <a:latin typeface="DejaVu Sans"/>
+              </a:defRPr>
+            </a:pPr>
+            <a:r>
+              <a:t>Preserve incident and response-linked evidence</a:t>
+            </a:r>
+          </a:p>
+          <a:p>
+            <a:pPr marL="182880" indent="-164592">
+              <a:lnSpc>
+                <a:spcPts val="2200"/>
+              </a:lnSpc>
+              <a:spcAft>
+                <a:spcPts val="800"/>
+              </a:spcAft>
+              <a:buChar char="•"/>
+              <a:defRPr sz="1700">
+                <a:solidFill>
+                  <a:srgbClr val="334155"/>
+                </a:solidFill>
+                <a:latin typeface="DejaVu Sans"/>
+              </a:defRPr>
+            </a:pPr>
+            <a:r>
+              <a:t>Create offline-agent and stale-sensor alerts</a:t>
+            </a:r>
+          </a:p>
+        </p:txBody>
+      </p:sp>
+      <p:sp>
+        <p:nvSpPr>
+          <p:cNvPr id="14" name="TextBox 13"/>
+          <p:cNvSpPr txBox="1"/>
+          <p:nvPr/>
+        </p:nvSpPr>
+        <p:spPr>
+          <a:xfrm>
+            <a:off x="502920" y="6080760"/>
+            <a:ext cx="11155680" cy="384048"/>
+          </a:xfrm>
+          <a:prstGeom prst="rect">
+            <a:avLst/>
+          </a:prstGeom>
+          <a:noFill/>
+        </p:spPr>
+        <p:txBody>
+          <a:bodyPr wrap="square" lIns="0" rIns="0" tIns="0" bIns="0">
+            <a:noAutofit/>
+          </a:bodyPr>
+          <a:lstStyle/>
+          <a:p>
+            <a:pPr>
+              <a:spcAft>
+                <a:spcPts val="0"/>
+              </a:spcAft>
+              <a:defRPr sz="1100" b="0">
+                <a:solidFill>
+                  <a:srgbClr val="64748B"/>
+                </a:solidFill>
+                <a:latin typeface="DejaVu Sans"/>
+              </a:defRPr>
+            </a:pPr>
+            <a:r>
+              <a:t>Schedule maintenance explicitly and measure capacity, recovery objectives and backup security in the target environment.</a:t>
+            </a:r>
+          </a:p>
+        </p:txBody>
+      </p:sp>
+      <p:sp>
+        <p:nvSpPr>
+          <p:cNvPr id="15" name="TextBox 14"/>
+          <p:cNvSpPr txBox="1"/>
+          <p:nvPr/>
+        </p:nvSpPr>
+        <p:spPr>
+          <a:xfrm>
+            <a:off x="502920" y="6519672"/>
+            <a:ext cx="10058400" cy="182880"/>
+          </a:xfrm>
+          <a:prstGeom prst="rect">
+            <a:avLst/>
+          </a:prstGeom>
+          <a:noFill/>
+        </p:spPr>
+        <p:txBody>
+          <a:bodyPr wrap="square" lIns="0" rIns="0" tIns="0" bIns="0">
+            <a:noAutofit/>
+          </a:bodyPr>
+          <a:lstStyle/>
+          <a:p>
+            <a:pPr>
+              <a:spcAft>
+                <a:spcPts val="0"/>
+              </a:spcAft>
+              <a:defRPr sz="900" b="0">
+                <a:solidFill>
+                  <a:srgbClr val="64748B"/>
+                </a:solidFill>
+                <a:latin typeface="DejaVu Sans"/>
+              </a:defRPr>
+            </a:pPr>
+            <a:r>
+              <a:t>CONFIDENTIAL • INTERNAL REVIEW  |  19 October 2026</a:t>
+            </a:r>
+          </a:p>
+        </p:txBody>
+      </p:sp>
+      <p:sp>
+        <p:nvSpPr>
+          <p:cNvPr id="16" name="TextBox 15"/>
+          <p:cNvSpPr txBox="1"/>
+          <p:nvPr/>
+        </p:nvSpPr>
+        <p:spPr>
+          <a:xfrm>
+            <a:off x="11045952" y="6519672"/>
+            <a:ext cx="685800" cy="182880"/>
+          </a:xfrm>
+          <a:prstGeom prst="rect">
+            <a:avLst/>
+          </a:prstGeom>
+          <a:noFill/>
+        </p:spPr>
+        <p:txBody>
+          <a:bodyPr wrap="square" lIns="0" rIns="0" tIns="0" bIns="0">
+            <a:noAutofit/>
+          </a:bodyPr>
+          <a:lstStyle/>
+          <a:p>
+            <a:pPr>
+              <a:spcAft>
+                <a:spcPts val="0"/>
+              </a:spcAft>
+              <a:defRPr sz="900" b="0">
+                <a:solidFill>
+                  <a:srgbClr val="64748B"/>
+                </a:solidFill>
+                <a:latin typeface="DejaVu Sans"/>
+              </a:defRPr>
+            </a:pPr>
+            <a:r>
+              <a:t>20 / 24</a:t>
+            </a:r>
+          </a:p>
+        </p:txBody>
+      </p:sp>
+    </p:spTree>
+  </p:cSld>
+  <p:clrMapOvr>
+    <a:masterClrMapping/>
+  </p:clrMapOvr>
+</p:sld>
+</file>
+
+<file path=ppt/slides/slide21.xml><?xml version="1.0" encoding="utf-8"?>
+<p:sld xmlns:a="http://schemas.openxmlformats.org/drawingml/2006/main" xmlns:p="http://schemas.openxmlformats.org/presentationml/2006/main" xmlns:r="http://schemas.openxmlformats.org/officeDocument/2006/relationships">
+  <p:cSld>
+    <p:spTree>
+      <p:nvGrpSpPr>
+        <p:cNvPr id="1" name=""/>
+        <p:cNvGrpSpPr/>
+        <p:nvPr/>
+      </p:nvGrpSpPr>
+      <p:grpSpPr/>
+      <p:sp>
+        <p:nvSpPr>
+          <p:cNvPr id="2" name="Rectangle 1"/>
+          <p:cNvSpPr/>
+          <p:nvPr/>
+        </p:nvSpPr>
+        <p:spPr>
+          <a:xfrm>
+            <a:off x="0" y="0"/>
+            <a:ext cx="12191695" cy="91440"/>
+          </a:xfrm>
+          <a:prstGeom prst="rect">
+            <a:avLst/>
+          </a:prstGeom>
+          <a:solidFill>
+            <a:srgbClr val="F38020"/>
+          </a:solidFill>
+          <a:ln>
+            <a:noFill/>
+          </a:ln>
+        </p:spPr>
+        <p:style>
+          <a:lnRef idx="1">
+            <a:schemeClr val="accent1"/>
+          </a:lnRef>
+          <a:fillRef idx="3">
+            <a:schemeClr val="accent1"/>
+          </a:fillRef>
+          <a:effectRef idx="2">
+            <a:schemeClr val="accent1"/>
+          </a:effectRef>
+          <a:fontRef idx="minor">
+            <a:schemeClr val="lt1"/>
+          </a:fontRef>
+        </p:style>
+        <p:txBody>
+          <a:bodyPr rtlCol="0" anchor="ctr"/>
+          <a:lstStyle/>
+          <a:p>
+            <a:pPr algn="ctr"/>
+          </a:p>
+        </p:txBody>
+      </p:sp>
+      <p:sp>
+        <p:nvSpPr>
+          <p:cNvPr id="3" name="TextBox 2"/>
+          <p:cNvSpPr txBox="1"/>
+          <p:nvPr/>
+        </p:nvSpPr>
+        <p:spPr>
+          <a:xfrm>
+            <a:off x="502920" y="320040"/>
+            <a:ext cx="10972800" cy="274320"/>
+          </a:xfrm>
+          <a:prstGeom prst="rect">
+            <a:avLst/>
+          </a:prstGeom>
+          <a:noFill/>
+        </p:spPr>
+        <p:txBody>
+          <a:bodyPr wrap="square" lIns="0" rIns="0" tIns="0" bIns="0">
+            <a:noAutofit/>
+          </a:bodyPr>
+          <a:lstStyle/>
+          <a:p>
+            <a:pPr>
+              <a:spcAft>
+                <a:spcPts val="0"/>
+              </a:spcAft>
+              <a:defRPr sz="1100" b="1">
+                <a:solidFill>
+                  <a:srgbClr val="F38020"/>
+                </a:solidFill>
+                <a:latin typeface="DejaVu Sans"/>
+              </a:defRPr>
+            </a:pPr>
+            <a:r>
+              <a:t>IMAGE SUPPLY CHAIN + AIR-GAP</a:t>
+            </a:r>
+          </a:p>
+        </p:txBody>
+      </p:sp>
+      <p:sp>
+        <p:nvSpPr>
+          <p:cNvPr id="4" name="TextBox 3"/>
+          <p:cNvSpPr txBox="1"/>
+          <p:nvPr/>
+        </p:nvSpPr>
+        <p:spPr>
+          <a:xfrm>
+            <a:off x="502920" y="795528"/>
+            <a:ext cx="11155680" cy="594360"/>
+          </a:xfrm>
+          <a:prstGeom prst="rect">
+            <a:avLst/>
+          </a:prstGeom>
+          <a:noFill/>
+        </p:spPr>
+        <p:txBody>
+          <a:bodyPr wrap="square" lIns="0" rIns="0" tIns="0" bIns="0">
+            <a:noAutofit/>
+          </a:bodyPr>
+          <a:lstStyle/>
+          <a:p>
+            <a:pPr>
+              <a:spcAft>
+                <a:spcPts val="0"/>
+              </a:spcAft>
+              <a:defRPr sz="3400" b="1">
+                <a:solidFill>
+                  <a:srgbClr val="0A2540"/>
+                </a:solidFill>
+                <a:latin typeface="DejaVu Sans"/>
+              </a:defRPr>
+            </a:pPr>
+            <a:r>
+              <a:t>Hardened deployment</a:t>
+            </a:r>
+          </a:p>
+        </p:txBody>
+      </p:sp>
+      <p:sp>
+        <p:nvSpPr>
+          <p:cNvPr id="5" name="TextBox 4"/>
+          <p:cNvSpPr txBox="1"/>
+          <p:nvPr/>
+        </p:nvSpPr>
+        <p:spPr>
+          <a:xfrm>
+            <a:off x="502920" y="1417320"/>
+            <a:ext cx="11155680" cy="768096"/>
+          </a:xfrm>
+          <a:prstGeom prst="rect">
+            <a:avLst/>
+          </a:prstGeom>
+          <a:noFill/>
+        </p:spPr>
+        <p:txBody>
+          <a:bodyPr wrap="square" lIns="0" rIns="0" tIns="0" bIns="0">
+            <a:noAutofit/>
+          </a:bodyPr>
+          <a:lstStyle/>
+          <a:p>
+            <a:pPr>
+              <a:lnSpc>
+                <a:spcPts val="2000"/>
+              </a:lnSpc>
+              <a:spcAft>
+                <a:spcPts val="0"/>
+              </a:spcAft>
+              <a:defRPr sz="1550" b="0">
+                <a:solidFill>
+                  <a:srgbClr val="334155"/>
+                </a:solidFill>
+                <a:latin typeface="DejaVu Sans"/>
+              </a:defRPr>
+            </a:pPr>
+            <a:r>
+              <a:t>A security tool that downloads twenty scanners is a supply-chain target. Every binary in the image is pinned to a known checksum and verified at build time, the containers run unprivileged, and the whole stack can operate without internet access using locally mirrored vulnerability data.</a:t>
+            </a:r>
+          </a:p>
+        </p:txBody>
+      </p:sp>
+      <p:sp>
+        <p:nvSpPr>
+          <p:cNvPr id="6" name="Rectangle 5"/>
+          <p:cNvSpPr/>
+          <p:nvPr/>
+        </p:nvSpPr>
+        <p:spPr>
+          <a:xfrm>
+            <a:off x="502920" y="2331720"/>
+            <a:ext cx="5404104" cy="3657600"/>
+          </a:xfrm>
+          <a:prstGeom prst="rect">
+            <a:avLst/>
+          </a:prstGeom>
+          <a:solidFill>
+            <a:srgbClr val="F3F6FA"/>
+          </a:solidFill>
+          <a:ln>
+            <a:noFill/>
+          </a:ln>
+        </p:spPr>
+        <p:style>
+          <a:lnRef idx="1">
+            <a:schemeClr val="accent1"/>
+          </a:lnRef>
+          <a:fillRef idx="3">
+            <a:schemeClr val="accent1"/>
+          </a:fillRef>
+          <a:effectRef idx="2">
+            <a:schemeClr val="accent1"/>
+          </a:effectRef>
+          <a:fontRef idx="minor">
+            <a:schemeClr val="lt1"/>
+          </a:fontRef>
+        </p:style>
+        <p:txBody>
+          <a:bodyPr rtlCol="0" anchor="ctr"/>
+          <a:lstStyle/>
+          <a:p>
+            <a:pPr algn="ctr"/>
+          </a:p>
+        </p:txBody>
+      </p:sp>
+      <p:sp>
+        <p:nvSpPr>
+          <p:cNvPr id="7" name="Rectangle 6"/>
+          <p:cNvSpPr/>
+          <p:nvPr/>
+        </p:nvSpPr>
+        <p:spPr>
+          <a:xfrm>
+            <a:off x="502920" y="2331720"/>
+            <a:ext cx="45720" cy="3657600"/>
+          </a:xfrm>
+          <a:prstGeom prst="rect">
+            <a:avLst/>
+          </a:prstGeom>
+          <a:solidFill>
+            <a:srgbClr val="F38020"/>
+          </a:solidFill>
+          <a:ln>
+            <a:noFill/>
+          </a:ln>
+        </p:spPr>
+        <p:style>
+          <a:lnRef idx="1">
+            <a:schemeClr val="accent1"/>
+          </a:lnRef>
+          <a:fillRef idx="3">
+            <a:schemeClr val="accent1"/>
+          </a:fillRef>
+          <a:effectRef idx="2">
+            <a:schemeClr val="accent1"/>
+          </a:effectRef>
+          <a:fontRef idx="minor">
+            <a:schemeClr val="lt1"/>
+          </a:fontRef>
+        </p:style>
+        <p:txBody>
+          <a:bodyPr rtlCol="0" anchor="ctr"/>
+          <a:lstStyle/>
+          <a:p>
+            <a:pPr algn="ctr"/>
+          </a:p>
+        </p:txBody>
+      </p:sp>
+      <p:sp>
+        <p:nvSpPr>
+          <p:cNvPr id="8" name="TextBox 7"/>
+          <p:cNvSpPr txBox="1"/>
+          <p:nvPr/>
+        </p:nvSpPr>
+        <p:spPr>
+          <a:xfrm>
+            <a:off x="749808" y="2542032"/>
+            <a:ext cx="4901184" cy="594360"/>
+          </a:xfrm>
+          <a:prstGeom prst="rect">
+            <a:avLst/>
+          </a:prstGeom>
+          <a:noFill/>
+        </p:spPr>
+        <p:txBody>
+          <a:bodyPr wrap="square" lIns="0" rIns="0" tIns="0" bIns="0">
+            <a:noAutofit/>
+          </a:bodyPr>
+          <a:lstStyle/>
+          <a:p>
+            <a:pPr>
+              <a:spcAft>
+                <a:spcPts val="0"/>
+              </a:spcAft>
+              <a:defRPr sz="2000" b="1">
+                <a:solidFill>
+                  <a:srgbClr val="0A2540"/>
+                </a:solidFill>
+                <a:latin typeface="DejaVu Sans"/>
+              </a:defRPr>
+            </a:pPr>
+            <a:r>
+              <a:t>Build integrity</a:t>
+            </a:r>
+          </a:p>
+        </p:txBody>
+      </p:sp>
+      <p:sp>
+        <p:nvSpPr>
+          <p:cNvPr id="9" name="TextBox 8"/>
+          <p:cNvSpPr txBox="1"/>
+          <p:nvPr/>
+        </p:nvSpPr>
+        <p:spPr>
+          <a:xfrm>
+            <a:off x="749808" y="3236976"/>
+            <a:ext cx="4846320" cy="2615184"/>
+          </a:xfrm>
+          <a:prstGeom prst="rect">
+            <a:avLst/>
+          </a:prstGeom>
+          <a:noFill/>
+        </p:spPr>
+        <p:txBody>
+          <a:bodyPr wrap="square" lIns="0" rIns="0" tIns="0" bIns="0">
+            <a:noAutofit/>
+          </a:bodyPr>
+          <a:lstStyle/>
+          <a:p>
+            <a:pPr marL="182880" indent="-164592">
+              <a:lnSpc>
+                <a:spcPts val="2200"/>
+              </a:lnSpc>
+              <a:spcAft>
+                <a:spcPts val="800"/>
+              </a:spcAft>
+              <a:buChar char="•"/>
+              <a:defRPr sz="1700" b="0">
+                <a:solidFill>
+                  <a:srgbClr val="334155"/>
+                </a:solidFill>
+                <a:latin typeface="DejaVu Sans"/>
+              </a:defRPr>
+            </a:pPr>
+            <a:r>
+              <a:t>Every scanner download SHA-256 pinned and verified</a:t>
+            </a:r>
+          </a:p>
+          <a:p>
+            <a:pPr marL="182880" indent="-164592">
+              <a:lnSpc>
+                <a:spcPts val="2200"/>
+              </a:lnSpc>
+              <a:spcAft>
+                <a:spcPts val="800"/>
+              </a:spcAft>
+              <a:buChar char="•"/>
+              <a:defRPr sz="1700">
+                <a:solidFill>
+                  <a:srgbClr val="334155"/>
+                </a:solidFill>
+                <a:latin typeface="DejaVu Sans"/>
+              </a:defRPr>
+            </a:pPr>
+            <a:r>
+              <a:t>No pipe-to-shell, no floating "latest" versions</a:t>
+            </a:r>
+          </a:p>
+          <a:p>
+            <a:pPr marL="182880" indent="-164592">
+              <a:lnSpc>
+                <a:spcPts val="2200"/>
+              </a:lnSpc>
+              <a:spcAft>
+                <a:spcPts val="800"/>
+              </a:spcAft>
+              <a:buChar char="•"/>
+              <a:defRPr sz="1700">
+                <a:solidFill>
+                  <a:srgbClr val="334155"/>
+                </a:solidFill>
+                <a:latin typeface="DejaVu Sans"/>
+              </a:defRPr>
+            </a:pPr>
+            <a:r>
+              <a:t>Containers run as an unprivileged user</a:t>
+            </a:r>
+          </a:p>
+          <a:p>
+            <a:pPr marL="182880" indent="-164592">
+              <a:lnSpc>
+                <a:spcPts val="2200"/>
+              </a:lnSpc>
+              <a:spcAft>
+                <a:spcPts val="800"/>
+              </a:spcAft>
+              <a:buChar char="•"/>
+              <a:defRPr sz="1700">
+                <a:solidFill>
+                  <a:srgbClr val="334155"/>
+                </a:solidFill>
+                <a:latin typeface="DejaVu Sans"/>
+              </a:defRPr>
+            </a:pPr>
+            <a:r>
+              <a:t>Hash-locked Python dependencies</a:t>
+            </a:r>
+          </a:p>
+        </p:txBody>
+      </p:sp>
+      <p:sp>
+        <p:nvSpPr>
+          <p:cNvPr id="10" name="Rectangle 9"/>
+          <p:cNvSpPr/>
+          <p:nvPr/>
+        </p:nvSpPr>
+        <p:spPr>
+          <a:xfrm>
+            <a:off x="6281928" y="2331720"/>
+            <a:ext cx="5404104" cy="3657600"/>
+          </a:xfrm>
+          <a:prstGeom prst="rect">
+            <a:avLst/>
+          </a:prstGeom>
+          <a:solidFill>
+            <a:srgbClr val="F3F6FA"/>
+          </a:solidFill>
+          <a:ln>
+            <a:noFill/>
+          </a:ln>
+        </p:spPr>
+        <p:style>
+          <a:lnRef idx="1">
+            <a:schemeClr val="accent1"/>
+          </a:lnRef>
+          <a:fillRef idx="3">
+            <a:schemeClr val="accent1"/>
+          </a:fillRef>
+          <a:effectRef idx="2">
+            <a:schemeClr val="accent1"/>
+          </a:effectRef>
+          <a:fontRef idx="minor">
+            <a:schemeClr val="lt1"/>
+          </a:fontRef>
+        </p:style>
+        <p:txBody>
+          <a:bodyPr rtlCol="0" anchor="ctr"/>
+          <a:lstStyle/>
+          <a:p>
+            <a:pPr algn="ctr"/>
+          </a:p>
+        </p:txBody>
+      </p:sp>
+      <p:sp>
+        <p:nvSpPr>
+          <p:cNvPr id="11" name="Rectangle 10"/>
+          <p:cNvSpPr/>
+          <p:nvPr/>
+        </p:nvSpPr>
+        <p:spPr>
+          <a:xfrm>
+            <a:off x="6281928" y="2331720"/>
+            <a:ext cx="45720" cy="3657600"/>
+          </a:xfrm>
+          <a:prstGeom prst="rect">
+            <a:avLst/>
+          </a:prstGeom>
+          <a:solidFill>
+            <a:srgbClr val="F38020"/>
+          </a:solidFill>
+          <a:ln>
+            <a:noFill/>
+          </a:ln>
+        </p:spPr>
+        <p:style>
+          <a:lnRef idx="1">
+            <a:schemeClr val="accent1"/>
+          </a:lnRef>
+          <a:fillRef idx="3">
+            <a:schemeClr val="accent1"/>
+          </a:fillRef>
+          <a:effectRef idx="2">
+            <a:schemeClr val="accent1"/>
+          </a:effectRef>
+          <a:fontRef idx="minor">
+            <a:schemeClr val="lt1"/>
+          </a:fontRef>
+        </p:style>
+        <p:txBody>
+          <a:bodyPr rtlCol="0" anchor="ctr"/>
+          <a:lstStyle/>
+          <a:p>
+            <a:pPr algn="ctr"/>
+          </a:p>
+        </p:txBody>
+      </p:sp>
+      <p:sp>
+        <p:nvSpPr>
+          <p:cNvPr id="12" name="TextBox 11"/>
+          <p:cNvSpPr txBox="1"/>
+          <p:nvPr/>
+        </p:nvSpPr>
+        <p:spPr>
+          <a:xfrm>
+            <a:off x="6528816" y="2542032"/>
+            <a:ext cx="4901184" cy="594360"/>
+          </a:xfrm>
+          <a:prstGeom prst="rect">
+            <a:avLst/>
+          </a:prstGeom>
+          <a:noFill/>
+        </p:spPr>
+        <p:txBody>
+          <a:bodyPr wrap="square" lIns="0" rIns="0" tIns="0" bIns="0">
+            <a:noAutofit/>
+          </a:bodyPr>
+          <a:lstStyle/>
+          <a:p>
+            <a:pPr>
+              <a:spcAft>
+                <a:spcPts val="0"/>
+              </a:spcAft>
+              <a:defRPr sz="2000" b="1">
+                <a:solidFill>
+                  <a:srgbClr val="0A2540"/>
+                </a:solidFill>
+                <a:latin typeface="DejaVu Sans"/>
+              </a:defRPr>
+            </a:pPr>
+            <a:r>
+              <a:t>Runtime posture</a:t>
+            </a:r>
+          </a:p>
+        </p:txBody>
+      </p:sp>
+      <p:sp>
+        <p:nvSpPr>
+          <p:cNvPr id="13" name="TextBox 12"/>
+          <p:cNvSpPr txBox="1"/>
+          <p:nvPr/>
+        </p:nvSpPr>
+        <p:spPr>
+          <a:xfrm>
+            <a:off x="6528816" y="3236976"/>
+            <a:ext cx="4846320" cy="2615184"/>
+          </a:xfrm>
+          <a:prstGeom prst="rect">
+            <a:avLst/>
+          </a:prstGeom>
+          <a:noFill/>
+        </p:spPr>
+        <p:txBody>
+          <a:bodyPr wrap="square" lIns="0" rIns="0" tIns="0" bIns="0">
+            <a:noAutofit/>
+          </a:bodyPr>
+          <a:lstStyle/>
+          <a:p>
+            <a:pPr marL="182880" indent="-164592">
+              <a:lnSpc>
+                <a:spcPts val="2200"/>
+              </a:lnSpc>
+              <a:spcAft>
+                <a:spcPts val="800"/>
+              </a:spcAft>
+              <a:buChar char="•"/>
+              <a:defRPr sz="1700" b="0">
+                <a:solidFill>
+                  <a:srgbClr val="334155"/>
+                </a:solidFill>
+                <a:latin typeface="DejaVu Sans"/>
+              </a:defRPr>
+            </a:pPr>
+            <a:r>
+              <a:t>Redis authenticated; browser origins explicit, never wildcard</a:t>
+            </a:r>
+          </a:p>
+          <a:p>
+            <a:pPr marL="182880" indent="-164592">
+              <a:lnSpc>
+                <a:spcPts val="2200"/>
+              </a:lnSpc>
+              <a:spcAft>
+                <a:spcPts val="800"/>
+              </a:spcAft>
+              <a:buChar char="•"/>
+              <a:defRPr sz="1700">
+                <a:solidFill>
+                  <a:srgbClr val="334155"/>
+                </a:solidFill>
+                <a:latin typeface="DejaVu Sans"/>
+              </a:defRPr>
+            </a:pPr>
+            <a:r>
+              <a:t>No scanner telemetry egress</a:t>
+            </a:r>
+          </a:p>
+          <a:p>
+            <a:pPr marL="182880" indent="-164592">
+              <a:lnSpc>
+                <a:spcPts val="2200"/>
+              </a:lnSpc>
+              <a:spcAft>
+                <a:spcPts val="800"/>
+              </a:spcAft>
+              <a:buChar char="•"/>
+              <a:defRPr sz="1700">
+                <a:solidFill>
+                  <a:srgbClr val="334155"/>
+                </a:solidFill>
+                <a:latin typeface="DejaVu Sans"/>
+              </a:defRPr>
+            </a:pPr>
+            <a:r>
+              <a:t>Full offline mode with local vulnerability databases</a:t>
+            </a:r>
+          </a:p>
+          <a:p>
+            <a:pPr marL="182880" indent="-164592">
+              <a:lnSpc>
+                <a:spcPts val="2200"/>
+              </a:lnSpc>
+              <a:spcAft>
+                <a:spcPts val="800"/>
+              </a:spcAft>
+              <a:buChar char="•"/>
+              <a:defRPr sz="1700">
+                <a:solidFill>
+                  <a:srgbClr val="334155"/>
+                </a:solidFill>
+                <a:latin typeface="DejaVu Sans"/>
+              </a:defRPr>
+            </a:pPr>
+            <a:r>
+              <a:t>Secrets injected from a vault, never baked into images</a:t>
+            </a:r>
+          </a:p>
+        </p:txBody>
+      </p:sp>
+      <p:sp>
+        <p:nvSpPr>
+          <p:cNvPr id="14" name="TextBox 13"/>
+          <p:cNvSpPr txBox="1"/>
+          <p:nvPr/>
+        </p:nvSpPr>
+        <p:spPr>
+          <a:xfrm>
+            <a:off x="502920" y="6080760"/>
+            <a:ext cx="11155680" cy="384048"/>
+          </a:xfrm>
+          <a:prstGeom prst="rect">
+            <a:avLst/>
+          </a:prstGeom>
+          <a:noFill/>
+        </p:spPr>
+        <p:txBody>
+          <a:bodyPr wrap="square" lIns="0" rIns="0" tIns="0" bIns="0">
+            <a:noAutofit/>
+          </a:bodyPr>
+          <a:lstStyle/>
+          <a:p>
+            <a:pPr>
+              <a:spcAft>
+                <a:spcPts val="0"/>
+              </a:spcAft>
+              <a:defRPr sz="1100" b="0">
+                <a:solidFill>
+                  <a:srgbClr val="64748B"/>
+                </a:solidFill>
+                <a:latin typeface="DejaVu Sans"/>
+              </a:defRPr>
+            </a:pPr>
+            <a:r>
+              <a:t>Tests fail the build if any download lacks a pin or the runtime user is removed.</a:t>
+            </a:r>
+          </a:p>
+        </p:txBody>
+      </p:sp>
+      <p:sp>
+        <p:nvSpPr>
+          <p:cNvPr id="15" name="TextBox 14"/>
+          <p:cNvSpPr txBox="1"/>
+          <p:nvPr/>
+        </p:nvSpPr>
+        <p:spPr>
+          <a:xfrm>
+            <a:off x="502920" y="6519672"/>
+            <a:ext cx="10058400" cy="182880"/>
+          </a:xfrm>
+          <a:prstGeom prst="rect">
+            <a:avLst/>
+          </a:prstGeom>
+          <a:noFill/>
+        </p:spPr>
+        <p:txBody>
+          <a:bodyPr wrap="square" lIns="0" rIns="0" tIns="0" bIns="0">
+            <a:noAutofit/>
+          </a:bodyPr>
+          <a:lstStyle/>
+          <a:p>
+            <a:pPr>
+              <a:spcAft>
+                <a:spcPts val="0"/>
+              </a:spcAft>
+              <a:defRPr sz="900" b="0">
+                <a:solidFill>
+                  <a:srgbClr val="64748B"/>
+                </a:solidFill>
+                <a:latin typeface="DejaVu Sans"/>
+              </a:defRPr>
+            </a:pPr>
+            <a:r>
+              <a:t>CONFIDENTIAL • INTERNAL REVIEW  |  19 October 2026</a:t>
+            </a:r>
+          </a:p>
+        </p:txBody>
+      </p:sp>
+      <p:sp>
+        <p:nvSpPr>
+          <p:cNvPr id="16" name="TextBox 15"/>
+          <p:cNvSpPr txBox="1"/>
+          <p:nvPr/>
+        </p:nvSpPr>
+        <p:spPr>
+          <a:xfrm>
+            <a:off x="11045952" y="6519672"/>
+            <a:ext cx="685800" cy="182880"/>
+          </a:xfrm>
+          <a:prstGeom prst="rect">
+            <a:avLst/>
+          </a:prstGeom>
+          <a:noFill/>
+        </p:spPr>
+        <p:txBody>
+          <a:bodyPr wrap="square" lIns="0" rIns="0" tIns="0" bIns="0">
+            <a:noAutofit/>
+          </a:bodyPr>
+          <a:lstStyle/>
+          <a:p>
+            <a:pPr>
+              <a:spcAft>
+                <a:spcPts val="0"/>
+              </a:spcAft>
+              <a:defRPr sz="900" b="0">
+                <a:solidFill>
+                  <a:srgbClr val="64748B"/>
+                </a:solidFill>
+                <a:latin typeface="DejaVu Sans"/>
+              </a:defRPr>
+            </a:pPr>
+            <a:r>
+              <a:t>21 / 24</a:t>
+            </a:r>
+          </a:p>
+        </p:txBody>
+      </p:sp>
+    </p:spTree>
+  </p:cSld>
+  <p:clrMapOvr>
+    <a:masterClrMapping/>
+  </p:clrMapOvr>
+</p:sld>
+</file>
+
+<file path=ppt/slides/slide22.xml><?xml version="1.0" encoding="utf-8"?>
+<p:sld xmlns:a="http://schemas.openxmlformats.org/drawingml/2006/main" xmlns:p="http://schemas.openxmlformats.org/presentationml/2006/main" xmlns:r="http://schemas.openxmlformats.org/officeDocument/2006/relationships">
+  <p:cSld>
+    <p:spTree>
+      <p:nvGrpSpPr>
+        <p:cNvPr id="1" name=""/>
+        <p:cNvGrpSpPr/>
+        <p:nvPr/>
+      </p:nvGrpSpPr>
+      <p:grpSpPr/>
+      <p:sp>
+        <p:nvSpPr>
+          <p:cNvPr id="2" name="Rectangle 1"/>
+          <p:cNvSpPr/>
+          <p:nvPr/>
+        </p:nvSpPr>
+        <p:spPr>
+          <a:xfrm>
+            <a:off x="0" y="0"/>
+            <a:ext cx="12191695" cy="91440"/>
+          </a:xfrm>
+          <a:prstGeom prst="rect">
+            <a:avLst/>
+          </a:prstGeom>
+          <a:solidFill>
+            <a:srgbClr val="F38020"/>
+          </a:solidFill>
+          <a:ln>
+            <a:noFill/>
+          </a:ln>
+        </p:spPr>
+        <p:style>
+          <a:lnRef idx="1">
+            <a:schemeClr val="accent1"/>
+          </a:lnRef>
+          <a:fillRef idx="3">
+            <a:schemeClr val="accent1"/>
+          </a:fillRef>
+          <a:effectRef idx="2">
+            <a:schemeClr val="accent1"/>
+          </a:effectRef>
+          <a:fontRef idx="minor">
+            <a:schemeClr val="lt1"/>
+          </a:fontRef>
+        </p:style>
+        <p:txBody>
+          <a:bodyPr rtlCol="0" anchor="ctr"/>
+          <a:lstStyle/>
+          <a:p>
+            <a:pPr algn="ctr"/>
+          </a:p>
+        </p:txBody>
+      </p:sp>
+      <p:sp>
+        <p:nvSpPr>
+          <p:cNvPr id="3" name="TextBox 2"/>
+          <p:cNvSpPr txBox="1"/>
+          <p:nvPr/>
+        </p:nvSpPr>
+        <p:spPr>
+          <a:xfrm>
+            <a:off x="502920" y="320040"/>
+            <a:ext cx="10972800" cy="274320"/>
+          </a:xfrm>
+          <a:prstGeom prst="rect">
+            <a:avLst/>
+          </a:prstGeom>
+          <a:noFill/>
+        </p:spPr>
+        <p:txBody>
+          <a:bodyPr wrap="square" lIns="0" rIns="0" tIns="0" bIns="0">
+            <a:noAutofit/>
+          </a:bodyPr>
+          <a:lstStyle/>
+          <a:p>
+            <a:pPr>
+              <a:spcAft>
+                <a:spcPts val="0"/>
+              </a:spcAft>
+              <a:defRPr sz="1100" b="1">
+                <a:solidFill>
+                  <a:srgbClr val="F38020"/>
+                </a:solidFill>
+                <a:latin typeface="DejaVu Sans"/>
+              </a:defRPr>
+            </a:pPr>
+            <a:r>
+              <a:t>AUTOMATED CHECKS + NATIVE FILE CHECKS</a:t>
+            </a:r>
+          </a:p>
+        </p:txBody>
+      </p:sp>
+      <p:sp>
+        <p:nvSpPr>
+          <p:cNvPr id="4" name="TextBox 3"/>
+          <p:cNvSpPr txBox="1"/>
+          <p:nvPr/>
+        </p:nvSpPr>
+        <p:spPr>
+          <a:xfrm>
+            <a:off x="502920" y="795528"/>
+            <a:ext cx="11155680" cy="594360"/>
+          </a:xfrm>
+          <a:prstGeom prst="rect">
+            <a:avLst/>
+          </a:prstGeom>
+          <a:noFill/>
+        </p:spPr>
+        <p:txBody>
+          <a:bodyPr wrap="square" lIns="0" rIns="0" tIns="0" bIns="0">
+            <a:noAutofit/>
+          </a:bodyPr>
+          <a:lstStyle/>
+          <a:p>
+            <a:pPr>
+              <a:spcAft>
+                <a:spcPts val="0"/>
+              </a:spcAft>
+              <a:defRPr sz="3400" b="1">
+                <a:solidFill>
+                  <a:srgbClr val="0A2540"/>
+                </a:solidFill>
+                <a:latin typeface="DejaVu Sans"/>
+              </a:defRPr>
+            </a:pPr>
+            <a:r>
+              <a:t>Validation evidence</a:t>
+            </a:r>
+          </a:p>
+        </p:txBody>
+      </p:sp>
+      <p:sp>
+        <p:nvSpPr>
+          <p:cNvPr id="5" name="TextBox 4"/>
+          <p:cNvSpPr txBox="1"/>
+          <p:nvPr/>
+        </p:nvSpPr>
+        <p:spPr>
+          <a:xfrm>
+            <a:off x="502920" y="1417320"/>
+            <a:ext cx="11155680" cy="768096"/>
+          </a:xfrm>
+          <a:prstGeom prst="rect">
+            <a:avLst/>
+          </a:prstGeom>
+          <a:noFill/>
+        </p:spPr>
+        <p:txBody>
+          <a:bodyPr wrap="square" lIns="0" rIns="0" tIns="0" bIns="0">
+            <a:noAutofit/>
+          </a:bodyPr>
+          <a:lstStyle/>
+          <a:p>
+            <a:pPr>
+              <a:lnSpc>
+                <a:spcPts val="2000"/>
+              </a:lnSpc>
+              <a:spcAft>
+                <a:spcPts val="0"/>
+              </a:spcAft>
+              <a:defRPr sz="1550" b="0">
+                <a:solidFill>
+                  <a:srgbClr val="334155"/>
+                </a:solidFill>
+                <a:latin typeface="DejaVu Sans"/>
+              </a:defRPr>
+            </a:pPr>
+            <a:r>
+              <a:t>The validation results demonstrate exercised code paths and selected native file behaviours. They provide evidence for technical review, while full containment effectiveness, host compatibility and operational performance require testing in the intended environment.</a:t>
+            </a:r>
+          </a:p>
+        </p:txBody>
+      </p:sp>
+      <p:sp>
+        <p:nvSpPr>
+          <p:cNvPr id="6" name="Rectangle 5"/>
+          <p:cNvSpPr/>
+          <p:nvPr/>
+        </p:nvSpPr>
+        <p:spPr>
+          <a:xfrm>
+            <a:off x="502920" y="2331720"/>
+            <a:ext cx="5404104" cy="3657600"/>
+          </a:xfrm>
+          <a:prstGeom prst="rect">
+            <a:avLst/>
+          </a:prstGeom>
+          <a:solidFill>
+            <a:srgbClr val="F3F6FA"/>
+          </a:solidFill>
+          <a:ln>
+            <a:noFill/>
+          </a:ln>
+        </p:spPr>
+        <p:style>
+          <a:lnRef idx="1">
+            <a:schemeClr val="accent1"/>
+          </a:lnRef>
+          <a:fillRef idx="3">
+            <a:schemeClr val="accent1"/>
+          </a:fillRef>
+          <a:effectRef idx="2">
+            <a:schemeClr val="accent1"/>
+          </a:effectRef>
+          <a:fontRef idx="minor">
+            <a:schemeClr val="lt1"/>
+          </a:fontRef>
+        </p:style>
+        <p:txBody>
+          <a:bodyPr rtlCol="0" anchor="ctr"/>
+          <a:lstStyle/>
+          <a:p>
+            <a:pPr algn="ctr"/>
+          </a:p>
+        </p:txBody>
+      </p:sp>
+      <p:sp>
+        <p:nvSpPr>
+          <p:cNvPr id="7" name="Rectangle 6"/>
+          <p:cNvSpPr/>
+          <p:nvPr/>
+        </p:nvSpPr>
+        <p:spPr>
+          <a:xfrm>
+            <a:off x="502920" y="2331720"/>
+            <a:ext cx="45720" cy="3657600"/>
+          </a:xfrm>
+          <a:prstGeom prst="rect">
+            <a:avLst/>
+          </a:prstGeom>
+          <a:solidFill>
+            <a:srgbClr val="F38020"/>
+          </a:solidFill>
+          <a:ln>
+            <a:noFill/>
+          </a:ln>
+        </p:spPr>
+        <p:style>
+          <a:lnRef idx="1">
+            <a:schemeClr val="accent1"/>
+          </a:lnRef>
+          <a:fillRef idx="3">
+            <a:schemeClr val="accent1"/>
+          </a:fillRef>
+          <a:effectRef idx="2">
+            <a:schemeClr val="accent1"/>
+          </a:effectRef>
+          <a:fontRef idx="minor">
+            <a:schemeClr val="lt1"/>
+          </a:fontRef>
+        </p:style>
+        <p:txBody>
+          <a:bodyPr rtlCol="0" anchor="ctr"/>
+          <a:lstStyle/>
+          <a:p>
+            <a:pPr algn="ctr"/>
+          </a:p>
+        </p:txBody>
+      </p:sp>
+      <p:sp>
+        <p:nvSpPr>
+          <p:cNvPr id="8" name="TextBox 7"/>
+          <p:cNvSpPr txBox="1"/>
+          <p:nvPr/>
+        </p:nvSpPr>
+        <p:spPr>
+          <a:xfrm>
+            <a:off x="749808" y="2542032"/>
+            <a:ext cx="4901184" cy="594360"/>
+          </a:xfrm>
+          <a:prstGeom prst="rect">
+            <a:avLst/>
+          </a:prstGeom>
+          <a:noFill/>
+        </p:spPr>
+        <p:txBody>
+          <a:bodyPr wrap="square" lIns="0" rIns="0" tIns="0" bIns="0">
+            <a:noAutofit/>
+          </a:bodyPr>
+          <a:lstStyle/>
+          <a:p>
+            <a:pPr>
+              <a:spcAft>
+                <a:spcPts val="0"/>
+              </a:spcAft>
+              <a:defRPr sz="2000" b="1">
+                <a:solidFill>
+                  <a:srgbClr val="0A2540"/>
+                </a:solidFill>
+                <a:latin typeface="DejaVu Sans"/>
+              </a:defRPr>
+            </a:pPr>
+            <a:r>
+              <a:t>442 automated tests passed</a:t>
+            </a:r>
+          </a:p>
+        </p:txBody>
+      </p:sp>
+      <p:sp>
+        <p:nvSpPr>
+          <p:cNvPr id="9" name="TextBox 8"/>
+          <p:cNvSpPr txBox="1"/>
+          <p:nvPr/>
+        </p:nvSpPr>
+        <p:spPr>
+          <a:xfrm>
+            <a:off x="749808" y="3236976"/>
+            <a:ext cx="4846320" cy="2615184"/>
+          </a:xfrm>
+          <a:prstGeom prst="rect">
+            <a:avLst/>
+          </a:prstGeom>
+          <a:noFill/>
+        </p:spPr>
+        <p:txBody>
+          <a:bodyPr wrap="square" lIns="0" rIns="0" tIns="0" bIns="0">
+            <a:noAutofit/>
+          </a:bodyPr>
+          <a:lstStyle/>
+          <a:p>
+            <a:pPr marL="182880" indent="-164592">
+              <a:lnSpc>
+                <a:spcPts val="2200"/>
+              </a:lnSpc>
+              <a:spcAft>
+                <a:spcPts val="800"/>
+              </a:spcAft>
+              <a:buChar char="•"/>
+              <a:defRPr sz="1700" b="0">
+                <a:solidFill>
+                  <a:srgbClr val="334155"/>
+                </a:solidFill>
+                <a:latin typeface="DejaVu Sans"/>
+              </a:defRPr>
+            </a:pPr>
+            <a:r>
+              <a:t>Access, roles, tenant and database-role boundaries</a:t>
+            </a:r>
+          </a:p>
+          <a:p>
+            <a:pPr marL="182880" indent="-164592">
+              <a:lnSpc>
+                <a:spcPts val="2200"/>
+              </a:lnSpc>
+              <a:spcAft>
+                <a:spcPts val="800"/>
+              </a:spcAft>
+              <a:buChar char="•"/>
+              <a:defRPr sz="1700">
+                <a:solidFill>
+                  <a:srgbClr val="334155"/>
+                </a:solidFill>
+                <a:latin typeface="DejaVu Sans"/>
+              </a:defRPr>
+            </a:pPr>
+            <a:r>
+              <a:t>Target safety, scopes, cloud bindings and audit trail</a:t>
+            </a:r>
+          </a:p>
+          <a:p>
+            <a:pPr marL="182880" indent="-164592">
+              <a:lnSpc>
+                <a:spcPts val="2200"/>
+              </a:lnSpc>
+              <a:spcAft>
+                <a:spcPts val="800"/>
+              </a:spcAft>
+              <a:buChar char="•"/>
+              <a:defRPr sz="1700">
+                <a:solidFill>
+                  <a:srgbClr val="334155"/>
+                </a:solidFill>
+                <a:latin typeface="DejaVu Sans"/>
+              </a:defRPr>
+            </a:pPr>
+            <a:r>
+              <a:t>Triage, scan lifecycle and deployment pinning</a:t>
+            </a:r>
+          </a:p>
+          <a:p>
+            <a:pPr marL="182880" indent="-164592">
+              <a:lnSpc>
+                <a:spcPts val="2200"/>
+              </a:lnSpc>
+              <a:spcAft>
+                <a:spcPts val="800"/>
+              </a:spcAft>
+              <a:buChar char="•"/>
+              <a:defRPr sz="1700">
+                <a:solidFill>
+                  <a:srgbClr val="334155"/>
+                </a:solidFill>
+                <a:latin typeface="DejaVu Sans"/>
+              </a:defRPr>
+            </a:pPr>
+            <a:r>
+              <a:t>Detection, enrollment, incident and response workflows</a:t>
+            </a:r>
+          </a:p>
+        </p:txBody>
+      </p:sp>
+      <p:sp>
+        <p:nvSpPr>
+          <p:cNvPr id="10" name="Rectangle 9"/>
+          <p:cNvSpPr/>
+          <p:nvPr/>
+        </p:nvSpPr>
+        <p:spPr>
+          <a:xfrm>
+            <a:off x="6281928" y="2331720"/>
+            <a:ext cx="5404104" cy="3657600"/>
+          </a:xfrm>
+          <a:prstGeom prst="rect">
+            <a:avLst/>
+          </a:prstGeom>
+          <a:solidFill>
+            <a:srgbClr val="F3F6FA"/>
+          </a:solidFill>
+          <a:ln>
+            <a:noFill/>
+          </a:ln>
+        </p:spPr>
+        <p:style>
+          <a:lnRef idx="1">
+            <a:schemeClr val="accent1"/>
+          </a:lnRef>
+          <a:fillRef idx="3">
+            <a:schemeClr val="accent1"/>
+          </a:fillRef>
+          <a:effectRef idx="2">
+            <a:schemeClr val="accent1"/>
+          </a:effectRef>
+          <a:fontRef idx="minor">
+            <a:schemeClr val="lt1"/>
+          </a:fontRef>
+        </p:style>
+        <p:txBody>
+          <a:bodyPr rtlCol="0" anchor="ctr"/>
+          <a:lstStyle/>
+          <a:p>
+            <a:pPr algn="ctr"/>
+          </a:p>
+        </p:txBody>
+      </p:sp>
+      <p:sp>
+        <p:nvSpPr>
+          <p:cNvPr id="11" name="Rectangle 10"/>
+          <p:cNvSpPr/>
+          <p:nvPr/>
+        </p:nvSpPr>
+        <p:spPr>
+          <a:xfrm>
+            <a:off x="6281928" y="2331720"/>
+            <a:ext cx="45720" cy="3657600"/>
+          </a:xfrm>
+          <a:prstGeom prst="rect">
+            <a:avLst/>
+          </a:prstGeom>
+          <a:solidFill>
+            <a:srgbClr val="F38020"/>
+          </a:solidFill>
+          <a:ln>
+            <a:noFill/>
+          </a:ln>
+        </p:spPr>
+        <p:style>
+          <a:lnRef idx="1">
+            <a:schemeClr val="accent1"/>
+          </a:lnRef>
+          <a:fillRef idx="3">
+            <a:schemeClr val="accent1"/>
+          </a:fillRef>
+          <a:effectRef idx="2">
+            <a:schemeClr val="accent1"/>
+          </a:effectRef>
+          <a:fontRef idx="minor">
+            <a:schemeClr val="lt1"/>
+          </a:fontRef>
+        </p:style>
+        <p:txBody>
+          <a:bodyPr rtlCol="0" anchor="ctr"/>
+          <a:lstStyle/>
+          <a:p>
+            <a:pPr algn="ctr"/>
+          </a:p>
+        </p:txBody>
+      </p:sp>
+      <p:sp>
+        <p:nvSpPr>
+          <p:cNvPr id="12" name="TextBox 11"/>
+          <p:cNvSpPr txBox="1"/>
+          <p:nvPr/>
+        </p:nvSpPr>
+        <p:spPr>
+          <a:xfrm>
+            <a:off x="6528816" y="2542032"/>
+            <a:ext cx="4901184" cy="594360"/>
+          </a:xfrm>
+          <a:prstGeom prst="rect">
+            <a:avLst/>
+          </a:prstGeom>
+          <a:noFill/>
+        </p:spPr>
+        <p:txBody>
+          <a:bodyPr wrap="square" lIns="0" rIns="0" tIns="0" bIns="0">
+            <a:noAutofit/>
+          </a:bodyPr>
+          <a:lstStyle/>
+          <a:p>
+            <a:pPr>
+              <a:spcAft>
+                <a:spcPts val="0"/>
+              </a:spcAft>
+              <a:defRPr sz="2000" b="1">
+                <a:solidFill>
+                  <a:srgbClr val="0A2540"/>
+                </a:solidFill>
+                <a:latin typeface="DejaVu Sans"/>
+              </a:defRPr>
+            </a:pPr>
+            <a:r>
+              <a:t>7 native Windows file checks passed</a:t>
+            </a:r>
+          </a:p>
+        </p:txBody>
+      </p:sp>
+      <p:sp>
+        <p:nvSpPr>
+          <p:cNvPr id="13" name="TextBox 12"/>
+          <p:cNvSpPr txBox="1"/>
+          <p:nvPr/>
+        </p:nvSpPr>
+        <p:spPr>
+          <a:xfrm>
+            <a:off x="6528816" y="3236976"/>
+            <a:ext cx="4846320" cy="2615184"/>
+          </a:xfrm>
+          <a:prstGeom prst="rect">
+            <a:avLst/>
+          </a:prstGeom>
+          <a:noFill/>
+        </p:spPr>
+        <p:txBody>
+          <a:bodyPr wrap="square" lIns="0" rIns="0" tIns="0" bIns="0">
+            <a:noAutofit/>
+          </a:bodyPr>
+          <a:lstStyle/>
+          <a:p>
+            <a:pPr marL="182880" indent="-164592">
+              <a:lnSpc>
+                <a:spcPts val="2200"/>
+              </a:lnSpc>
+              <a:spcAft>
+                <a:spcPts val="800"/>
+              </a:spcAft>
+              <a:buChar char="•"/>
+              <a:defRPr sz="1700" b="0">
+                <a:solidFill>
+                  <a:srgbClr val="334155"/>
+                </a:solidFill>
+                <a:latin typeface="DejaVu Sans"/>
+              </a:defRPr>
+            </a:pPr>
+            <a:r>
+              <a:t>Disposable file-operation contract fixtures</a:t>
+            </a:r>
+          </a:p>
+          <a:p>
+            <a:pPr marL="182880" indent="-164592">
+              <a:lnSpc>
+                <a:spcPts val="2200"/>
+              </a:lnSpc>
+              <a:spcAft>
+                <a:spcPts val="800"/>
+              </a:spcAft>
+              <a:buChar char="•"/>
+              <a:defRPr sz="1700">
+                <a:solidFill>
+                  <a:srgbClr val="334155"/>
+                </a:solidFill>
+                <a:latin typeface="DejaVu Sans"/>
+              </a:defRPr>
+            </a:pPr>
+            <a:r>
+              <a:t>Pinned-handle relative rename behavior</a:t>
+            </a:r>
+          </a:p>
+          <a:p>
+            <a:pPr marL="182880" indent="-164592">
+              <a:lnSpc>
+                <a:spcPts val="2200"/>
+              </a:lnSpc>
+              <a:spcAft>
+                <a:spcPts val="800"/>
+              </a:spcAft>
+              <a:buChar char="•"/>
+              <a:defRPr sz="1700">
+                <a:solidFill>
+                  <a:srgbClr val="334155"/>
+                </a:solidFill>
+                <a:latin typeface="DejaVu Sans"/>
+              </a:defRPr>
+            </a:pPr>
+            <a:r>
+              <a:t>File-sharing and junction-race checks</a:t>
+            </a:r>
+          </a:p>
+          <a:p>
+            <a:pPr marL="182880" indent="-164592">
+              <a:lnSpc>
+                <a:spcPts val="2200"/>
+              </a:lnSpc>
+              <a:spcAft>
+                <a:spcPts val="800"/>
+              </a:spcAft>
+              <a:buChar char="•"/>
+              <a:defRPr sz="1700">
+                <a:solidFill>
+                  <a:srgbClr val="334155"/>
+                </a:solidFill>
+                <a:latin typeface="DejaVu Sans"/>
+              </a:defRPr>
+            </a:pPr>
+            <a:r>
+              <a:t>Full ACL and firewall workflows require staging</a:t>
+            </a:r>
+          </a:p>
+        </p:txBody>
+      </p:sp>
+      <p:sp>
+        <p:nvSpPr>
+          <p:cNvPr id="14" name="TextBox 13"/>
+          <p:cNvSpPr txBox="1"/>
+          <p:nvPr/>
+        </p:nvSpPr>
+        <p:spPr>
+          <a:xfrm>
+            <a:off x="502920" y="6080760"/>
+            <a:ext cx="11155680" cy="384048"/>
+          </a:xfrm>
+          <a:prstGeom prst="rect">
+            <a:avLst/>
+          </a:prstGeom>
+          <a:noFill/>
+        </p:spPr>
+        <p:txBody>
+          <a:bodyPr wrap="square" lIns="0" rIns="0" tIns="0" bIns="0">
+            <a:noAutofit/>
+          </a:bodyPr>
+          <a:lstStyle/>
+          <a:p>
+            <a:pPr>
+              <a:spcAft>
+                <a:spcPts val="0"/>
+              </a:spcAft>
+              <a:defRPr sz="1100" b="0">
+                <a:solidFill>
+                  <a:srgbClr val="64748B"/>
+                </a:solidFill>
+                <a:latin typeface="DejaVu Sans"/>
+              </a:defRPr>
+            </a:pPr>
+            <a:r>
+              <a:t>Automated tests and narrow native file checks do not establish live containment efficacy or production readiness.</a:t>
+            </a:r>
+          </a:p>
+        </p:txBody>
+      </p:sp>
+      <p:sp>
+        <p:nvSpPr>
+          <p:cNvPr id="15" name="TextBox 14"/>
+          <p:cNvSpPr txBox="1"/>
+          <p:nvPr/>
+        </p:nvSpPr>
+        <p:spPr>
+          <a:xfrm>
+            <a:off x="502920" y="6519672"/>
+            <a:ext cx="10058400" cy="182880"/>
+          </a:xfrm>
+          <a:prstGeom prst="rect">
+            <a:avLst/>
+          </a:prstGeom>
+          <a:noFill/>
+        </p:spPr>
+        <p:txBody>
+          <a:bodyPr wrap="square" lIns="0" rIns="0" tIns="0" bIns="0">
+            <a:noAutofit/>
+          </a:bodyPr>
+          <a:lstStyle/>
+          <a:p>
+            <a:pPr>
+              <a:spcAft>
+                <a:spcPts val="0"/>
+              </a:spcAft>
+              <a:defRPr sz="900" b="0">
+                <a:solidFill>
+                  <a:srgbClr val="64748B"/>
+                </a:solidFill>
+                <a:latin typeface="DejaVu Sans"/>
+              </a:defRPr>
+            </a:pPr>
+            <a:r>
+              <a:t>CONFIDENTIAL • INTERNAL REVIEW  |  19 October 2026</a:t>
+            </a:r>
+          </a:p>
+        </p:txBody>
+      </p:sp>
+      <p:sp>
+        <p:nvSpPr>
+          <p:cNvPr id="16" name="TextBox 15"/>
+          <p:cNvSpPr txBox="1"/>
+          <p:nvPr/>
+        </p:nvSpPr>
+        <p:spPr>
+          <a:xfrm>
+            <a:off x="11045952" y="6519672"/>
+            <a:ext cx="685800" cy="182880"/>
+          </a:xfrm>
+          <a:prstGeom prst="rect">
+            <a:avLst/>
+          </a:prstGeom>
+          <a:noFill/>
+        </p:spPr>
+        <p:txBody>
+          <a:bodyPr wrap="square" lIns="0" rIns="0" tIns="0" bIns="0">
+            <a:noAutofit/>
+          </a:bodyPr>
+          <a:lstStyle/>
+          <a:p>
+            <a:pPr>
+              <a:spcAft>
+                <a:spcPts val="0"/>
+              </a:spcAft>
+              <a:defRPr sz="900" b="0">
+                <a:solidFill>
+                  <a:srgbClr val="64748B"/>
+                </a:solidFill>
+                <a:latin typeface="DejaVu Sans"/>
+              </a:defRPr>
+            </a:pPr>
+            <a:r>
+              <a:t>22 / 24</a:t>
+            </a:r>
+          </a:p>
+        </p:txBody>
+      </p:sp>
+    </p:spTree>
+  </p:cSld>
+  <p:clrMapOvr>
+    <a:masterClrMapping/>
+  </p:clrMapOvr>
+</p:sld>
+</file>
+
+<file path=ppt/slides/slide23.xml><?xml version="1.0" encoding="utf-8"?>
+<p:sld xmlns:a="http://schemas.openxmlformats.org/drawingml/2006/main" xmlns:p="http://schemas.openxmlformats.org/presentationml/2006/main" xmlns:r="http://schemas.openxmlformats.org/officeDocument/2006/relationships">
+  <p:cSld>
+    <p:spTree>
+      <p:nvGrpSpPr>
+        <p:cNvPr id="1" name=""/>
+        <p:cNvGrpSpPr/>
+        <p:nvPr/>
+      </p:nvGrpSpPr>
+      <p:grpSpPr/>
+      <p:sp>
+        <p:nvSpPr>
+          <p:cNvPr id="2" name="Rectangle 1"/>
+          <p:cNvSpPr/>
+          <p:nvPr/>
+        </p:nvSpPr>
+        <p:spPr>
+          <a:xfrm>
+            <a:off x="0" y="0"/>
+            <a:ext cx="12191695" cy="91440"/>
+          </a:xfrm>
+          <a:prstGeom prst="rect">
+            <a:avLst/>
+          </a:prstGeom>
+          <a:solidFill>
+            <a:srgbClr val="F38020"/>
+          </a:solidFill>
+          <a:ln>
+            <a:noFill/>
+          </a:ln>
+        </p:spPr>
+        <p:style>
+          <a:lnRef idx="1">
+            <a:schemeClr val="accent1"/>
+          </a:lnRef>
+          <a:fillRef idx="3">
+            <a:schemeClr val="accent1"/>
+          </a:fillRef>
+          <a:effectRef idx="2">
+            <a:schemeClr val="accent1"/>
+          </a:effectRef>
+          <a:fontRef idx="minor">
+            <a:schemeClr val="lt1"/>
+          </a:fontRef>
+        </p:style>
+        <p:txBody>
+          <a:bodyPr rtlCol="0" anchor="ctr"/>
+          <a:lstStyle/>
+          <a:p>
+            <a:pPr algn="ctr"/>
+          </a:p>
+        </p:txBody>
+      </p:sp>
+      <p:sp>
+        <p:nvSpPr>
+          <p:cNvPr id="3" name="TextBox 2"/>
+          <p:cNvSpPr txBox="1"/>
+          <p:nvPr/>
+        </p:nvSpPr>
+        <p:spPr>
+          <a:xfrm>
+            <a:off x="502920" y="320040"/>
+            <a:ext cx="10972800" cy="274320"/>
+          </a:xfrm>
+          <a:prstGeom prst="rect">
+            <a:avLst/>
+          </a:prstGeom>
+          <a:noFill/>
+        </p:spPr>
+        <p:txBody>
+          <a:bodyPr wrap="square" lIns="0" rIns="0" tIns="0" bIns="0">
+            <a:noAutofit/>
+          </a:bodyPr>
+          <a:lstStyle/>
+          <a:p>
+            <a:pPr>
+              <a:spcAft>
+                <a:spcPts val="0"/>
+              </a:spcAft>
+              <a:defRPr sz="1100" b="1">
+                <a:solidFill>
+                  <a:srgbClr val="F38020"/>
+                </a:solidFill>
+                <a:latin typeface="DejaVu Sans"/>
+              </a:defRPr>
+            </a:pPr>
+            <a:r>
+              <a:t>DEPLOYMENT GATES</a:t>
+            </a:r>
+          </a:p>
+        </p:txBody>
+      </p:sp>
+      <p:sp>
+        <p:nvSpPr>
+          <p:cNvPr id="4" name="TextBox 3"/>
+          <p:cNvSpPr txBox="1"/>
+          <p:nvPr/>
+        </p:nvSpPr>
+        <p:spPr>
+          <a:xfrm>
+            <a:off x="502920" y="795528"/>
+            <a:ext cx="11155680" cy="594360"/>
+          </a:xfrm>
+          <a:prstGeom prst="rect">
+            <a:avLst/>
+          </a:prstGeom>
+          <a:noFill/>
+        </p:spPr>
+        <p:txBody>
+          <a:bodyPr wrap="square" lIns="0" rIns="0" tIns="0" bIns="0">
+            <a:noAutofit/>
+          </a:bodyPr>
+          <a:lstStyle/>
+          <a:p>
+            <a:pPr>
+              <a:spcAft>
+                <a:spcPts val="0"/>
+              </a:spcAft>
+              <a:defRPr sz="3400" b="1">
+                <a:solidFill>
+                  <a:srgbClr val="0A2540"/>
+                </a:solidFill>
+                <a:latin typeface="DejaVu Sans"/>
+              </a:defRPr>
+            </a:pPr>
+            <a:r>
+              <a:t>Required staging validation</a:t>
+            </a:r>
+          </a:p>
+        </p:txBody>
+      </p:sp>
+      <p:sp>
+        <p:nvSpPr>
+          <p:cNvPr id="5" name="TextBox 4"/>
+          <p:cNvSpPr txBox="1"/>
+          <p:nvPr/>
+        </p:nvSpPr>
+        <p:spPr>
+          <a:xfrm>
+            <a:off x="502920" y="1417320"/>
+            <a:ext cx="11155680" cy="768096"/>
+          </a:xfrm>
+          <a:prstGeom prst="rect">
+            <a:avLst/>
+          </a:prstGeom>
+          <a:noFill/>
+        </p:spPr>
+        <p:txBody>
+          <a:bodyPr wrap="square" lIns="0" rIns="0" tIns="0" bIns="0">
+            <a:noAutofit/>
+          </a:bodyPr>
+          <a:lstStyle/>
+          <a:p>
+            <a:pPr>
+              <a:lnSpc>
+                <a:spcPts val="2000"/>
+              </a:lnSpc>
+              <a:spcAft>
+                <a:spcPts val="0"/>
+              </a:spcAft>
+              <a:defRPr sz="1550" b="0">
+                <a:solidFill>
+                  <a:srgbClr val="334155"/>
+                </a:solidFill>
+                <a:latin typeface="DejaVu Sans"/>
+              </a:defRPr>
+            </a:pPr>
+            <a:r>
+              <a:t>Deployment conditions determine whether security controls work as intended. Staging should verify identity, database roles, telemetry, permissions, enforcement and recovery together, including how containment behaves during service interruptions and host restarts.</a:t>
+            </a:r>
+          </a:p>
+        </p:txBody>
+      </p:sp>
+      <p:sp>
+        <p:nvSpPr>
+          <p:cNvPr id="6" name="Rectangle 5"/>
+          <p:cNvSpPr/>
+          <p:nvPr/>
+        </p:nvSpPr>
+        <p:spPr>
+          <a:xfrm>
+            <a:off x="502920" y="2331720"/>
+            <a:ext cx="5404104" cy="3657600"/>
+          </a:xfrm>
+          <a:prstGeom prst="rect">
+            <a:avLst/>
+          </a:prstGeom>
+          <a:solidFill>
+            <a:srgbClr val="F3F6FA"/>
+          </a:solidFill>
+          <a:ln>
+            <a:noFill/>
+          </a:ln>
+        </p:spPr>
+        <p:style>
+          <a:lnRef idx="1">
+            <a:schemeClr val="accent1"/>
+          </a:lnRef>
+          <a:fillRef idx="3">
+            <a:schemeClr val="accent1"/>
+          </a:fillRef>
+          <a:effectRef idx="2">
+            <a:schemeClr val="accent1"/>
+          </a:effectRef>
+          <a:fontRef idx="minor">
+            <a:schemeClr val="lt1"/>
+          </a:fontRef>
+        </p:style>
+        <p:txBody>
+          <a:bodyPr rtlCol="0" anchor="ctr"/>
+          <a:lstStyle/>
+          <a:p>
+            <a:pPr algn="ctr"/>
+          </a:p>
+        </p:txBody>
+      </p:sp>
+      <p:sp>
+        <p:nvSpPr>
+          <p:cNvPr id="7" name="Rectangle 6"/>
+          <p:cNvSpPr/>
+          <p:nvPr/>
+        </p:nvSpPr>
+        <p:spPr>
+          <a:xfrm>
+            <a:off x="502920" y="2331720"/>
+            <a:ext cx="45720" cy="3657600"/>
+          </a:xfrm>
+          <a:prstGeom prst="rect">
+            <a:avLst/>
+          </a:prstGeom>
+          <a:solidFill>
+            <a:srgbClr val="F38020"/>
+          </a:solidFill>
+          <a:ln>
+            <a:noFill/>
+          </a:ln>
+        </p:spPr>
+        <p:style>
+          <a:lnRef idx="1">
+            <a:schemeClr val="accent1"/>
+          </a:lnRef>
+          <a:fillRef idx="3">
+            <a:schemeClr val="accent1"/>
+          </a:fillRef>
+          <a:effectRef idx="2">
+            <a:schemeClr val="accent1"/>
+          </a:effectRef>
+          <a:fontRef idx="minor">
+            <a:schemeClr val="lt1"/>
+          </a:fontRef>
+        </p:style>
+        <p:txBody>
+          <a:bodyPr rtlCol="0" anchor="ctr"/>
+          <a:lstStyle/>
+          <a:p>
+            <a:pPr algn="ctr"/>
+          </a:p>
+        </p:txBody>
+      </p:sp>
+      <p:sp>
+        <p:nvSpPr>
+          <p:cNvPr id="8" name="TextBox 7"/>
+          <p:cNvSpPr txBox="1"/>
+          <p:nvPr/>
+        </p:nvSpPr>
+        <p:spPr>
+          <a:xfrm>
+            <a:off x="749808" y="2542032"/>
+            <a:ext cx="4901184" cy="594360"/>
+          </a:xfrm>
+          <a:prstGeom prst="rect">
+            <a:avLst/>
+          </a:prstGeom>
+          <a:noFill/>
+        </p:spPr>
+        <p:txBody>
+          <a:bodyPr wrap="square" lIns="0" rIns="0" tIns="0" bIns="0">
+            <a:noAutofit/>
+          </a:bodyPr>
+          <a:lstStyle/>
+          <a:p>
+            <a:pPr>
+              <a:spcAft>
+                <a:spcPts val="0"/>
+              </a:spcAft>
+              <a:defRPr sz="2000" b="1">
+                <a:solidFill>
+                  <a:srgbClr val="0A2540"/>
+                </a:solidFill>
+                <a:latin typeface="DejaVu Sans"/>
+              </a:defRPr>
+            </a:pPr>
+            <a:r>
+              <a:t>Identity and data</a:t>
+            </a:r>
+          </a:p>
+        </p:txBody>
+      </p:sp>
+      <p:sp>
+        <p:nvSpPr>
+          <p:cNvPr id="9" name="TextBox 8"/>
+          <p:cNvSpPr txBox="1"/>
+          <p:nvPr/>
+        </p:nvSpPr>
+        <p:spPr>
+          <a:xfrm>
+            <a:off x="749808" y="3236976"/>
+            <a:ext cx="4846320" cy="2615184"/>
+          </a:xfrm>
+          <a:prstGeom prst="rect">
+            <a:avLst/>
+          </a:prstGeom>
+          <a:noFill/>
+        </p:spPr>
+        <p:txBody>
+          <a:bodyPr wrap="square" lIns="0" rIns="0" tIns="0" bIns="0">
+            <a:noAutofit/>
+          </a:bodyPr>
+          <a:lstStyle/>
+          <a:p>
+            <a:pPr marL="182880" indent="-164592">
+              <a:lnSpc>
+                <a:spcPts val="2200"/>
+              </a:lnSpc>
+              <a:spcAft>
+                <a:spcPts val="800"/>
+              </a:spcAft>
+              <a:buChar char="•"/>
+              <a:defRPr sz="1700" b="0">
+                <a:solidFill>
+                  <a:srgbClr val="334155"/>
+                </a:solidFill>
+                <a:latin typeface="DejaVu Sans"/>
+              </a:defRPr>
+            </a:pPr>
+            <a:r>
+              <a:t>IdP issuance, token lifetime and revocation behavior</a:t>
+            </a:r>
+          </a:p>
+          <a:p>
+            <a:pPr marL="182880" indent="-164592">
+              <a:lnSpc>
+                <a:spcPts val="2200"/>
+              </a:lnSpc>
+              <a:spcAft>
+                <a:spcPts val="800"/>
+              </a:spcAft>
+              <a:buChar char="•"/>
+              <a:defRPr sz="1700">
+                <a:solidFill>
+                  <a:srgbClr val="334155"/>
+                </a:solidFill>
+                <a:latin typeface="DejaVu Sans"/>
+              </a:defRPr>
+            </a:pPr>
+            <a:r>
+              <a:t>PostgreSQL policies with both deployed database roles</a:t>
+            </a:r>
+          </a:p>
+          <a:p>
+            <a:pPr marL="182880" indent="-164592">
+              <a:lnSpc>
+                <a:spcPts val="2200"/>
+              </a:lnSpc>
+              <a:spcAft>
+                <a:spcPts val="800"/>
+              </a:spcAft>
+              <a:buChar char="•"/>
+              <a:defRPr sz="1700">
+                <a:solidFill>
+                  <a:srgbClr val="334155"/>
+                </a:solidFill>
+                <a:latin typeface="DejaVu Sans"/>
+              </a:defRPr>
+            </a:pPr>
+            <a:r>
+              <a:t>Container image build and scanner compatibility</a:t>
+            </a:r>
+          </a:p>
+          <a:p>
+            <a:pPr marL="182880" indent="-164592">
+              <a:lnSpc>
+                <a:spcPts val="2200"/>
+              </a:lnSpc>
+              <a:spcAft>
+                <a:spcPts val="800"/>
+              </a:spcAft>
+              <a:buChar char="•"/>
+              <a:defRPr sz="1700">
+                <a:solidFill>
+                  <a:srgbClr val="334155"/>
+                </a:solidFill>
+                <a:latin typeface="DejaVu Sans"/>
+              </a:defRPr>
+            </a:pPr>
+            <a:r>
+              <a:t>Existing-database migration rehearsal</a:t>
+            </a:r>
+          </a:p>
+        </p:txBody>
+      </p:sp>
+      <p:sp>
+        <p:nvSpPr>
+          <p:cNvPr id="10" name="Rectangle 9"/>
+          <p:cNvSpPr/>
+          <p:nvPr/>
+        </p:nvSpPr>
+        <p:spPr>
+          <a:xfrm>
+            <a:off x="6281928" y="2331720"/>
+            <a:ext cx="5404104" cy="3657600"/>
+          </a:xfrm>
+          <a:prstGeom prst="rect">
+            <a:avLst/>
+          </a:prstGeom>
+          <a:solidFill>
+            <a:srgbClr val="F3F6FA"/>
+          </a:solidFill>
+          <a:ln>
+            <a:noFill/>
+          </a:ln>
+        </p:spPr>
+        <p:style>
+          <a:lnRef idx="1">
+            <a:schemeClr val="accent1"/>
+          </a:lnRef>
+          <a:fillRef idx="3">
+            <a:schemeClr val="accent1"/>
+          </a:fillRef>
+          <a:effectRef idx="2">
+            <a:schemeClr val="accent1"/>
+          </a:effectRef>
+          <a:fontRef idx="minor">
+            <a:schemeClr val="lt1"/>
+          </a:fontRef>
+        </p:style>
+        <p:txBody>
+          <a:bodyPr rtlCol="0" anchor="ctr"/>
+          <a:lstStyle/>
+          <a:p>
+            <a:pPr algn="ctr"/>
+          </a:p>
+        </p:txBody>
+      </p:sp>
+      <p:sp>
+        <p:nvSpPr>
+          <p:cNvPr id="11" name="Rectangle 10"/>
+          <p:cNvSpPr/>
+          <p:nvPr/>
+        </p:nvSpPr>
+        <p:spPr>
+          <a:xfrm>
+            <a:off x="6281928" y="2331720"/>
+            <a:ext cx="45720" cy="3657600"/>
+          </a:xfrm>
+          <a:prstGeom prst="rect">
+            <a:avLst/>
+          </a:prstGeom>
+          <a:solidFill>
+            <a:srgbClr val="F38020"/>
+          </a:solidFill>
+          <a:ln>
+            <a:noFill/>
+          </a:ln>
+        </p:spPr>
+        <p:style>
+          <a:lnRef idx="1">
+            <a:schemeClr val="accent1"/>
+          </a:lnRef>
+          <a:fillRef idx="3">
+            <a:schemeClr val="accent1"/>
+          </a:fillRef>
+          <a:effectRef idx="2">
+            <a:schemeClr val="accent1"/>
+          </a:effectRef>
+          <a:fontRef idx="minor">
+            <a:schemeClr val="lt1"/>
+          </a:fontRef>
+        </p:style>
+        <p:txBody>
+          <a:bodyPr rtlCol="0" anchor="ctr"/>
+          <a:lstStyle/>
+          <a:p>
+            <a:pPr algn="ctr"/>
+          </a:p>
+        </p:txBody>
+      </p:sp>
+      <p:sp>
+        <p:nvSpPr>
+          <p:cNvPr id="12" name="TextBox 11"/>
+          <p:cNvSpPr txBox="1"/>
+          <p:nvPr/>
+        </p:nvSpPr>
+        <p:spPr>
+          <a:xfrm>
+            <a:off x="6528816" y="2542032"/>
+            <a:ext cx="4901184" cy="594360"/>
+          </a:xfrm>
+          <a:prstGeom prst="rect">
+            <a:avLst/>
+          </a:prstGeom>
+          <a:noFill/>
+        </p:spPr>
+        <p:txBody>
+          <a:bodyPr wrap="square" lIns="0" rIns="0" tIns="0" bIns="0">
+            <a:noAutofit/>
+          </a:bodyPr>
+          <a:lstStyle/>
+          <a:p>
+            <a:pPr>
+              <a:spcAft>
+                <a:spcPts val="0"/>
+              </a:spcAft>
+              <a:defRPr sz="2000" b="1">
+                <a:solidFill>
+                  <a:srgbClr val="0A2540"/>
+                </a:solidFill>
+                <a:latin typeface="DejaVu Sans"/>
+              </a:defRPr>
+            </a:pPr>
+            <a:r>
+              <a:t>Hosts and enforcement</a:t>
+            </a:r>
+          </a:p>
+        </p:txBody>
+      </p:sp>
+      <p:sp>
+        <p:nvSpPr>
+          <p:cNvPr id="13" name="TextBox 12"/>
+          <p:cNvSpPr txBox="1"/>
+          <p:nvPr/>
+        </p:nvSpPr>
+        <p:spPr>
+          <a:xfrm>
+            <a:off x="6528816" y="3236976"/>
+            <a:ext cx="4846320" cy="2615184"/>
+          </a:xfrm>
+          <a:prstGeom prst="rect">
+            <a:avLst/>
+          </a:prstGeom>
+          <a:noFill/>
+        </p:spPr>
+        <p:txBody>
+          <a:bodyPr wrap="square" lIns="0" rIns="0" tIns="0" bIns="0">
+            <a:noAutofit/>
+          </a:bodyPr>
+          <a:lstStyle/>
+          <a:p>
+            <a:pPr marL="182880" indent="-164592">
+              <a:lnSpc>
+                <a:spcPts val="2200"/>
+              </a:lnSpc>
+              <a:spcAft>
+                <a:spcPts val="800"/>
+              </a:spcAft>
+              <a:buChar char="•"/>
+              <a:defRPr sz="1700" b="0">
+                <a:solidFill>
+                  <a:srgbClr val="334155"/>
+                </a:solidFill>
+                <a:latin typeface="DejaVu Sans"/>
+              </a:defRPr>
+            </a:pPr>
+            <a:r>
+              <a:t>Windows Security/Sysmon and Linux audit collection</a:t>
+            </a:r>
+          </a:p>
+          <a:p>
+            <a:pPr marL="182880" indent="-164592">
+              <a:lnSpc>
+                <a:spcPts val="2200"/>
+              </a:lnSpc>
+              <a:spcAft>
+                <a:spcPts val="800"/>
+              </a:spcAft>
+              <a:buChar char="•"/>
+              <a:defRPr sz="1700">
+                <a:solidFill>
+                  <a:srgbClr val="334155"/>
+                </a:solidFill>
+                <a:latin typeface="DejaVu Sans"/>
+              </a:defRPr>
+            </a:pPr>
+            <a:r>
+              <a:t>Cloudflare permissions, expiry and rule ordering</a:t>
+            </a:r>
+          </a:p>
+          <a:p>
+            <a:pPr marL="182880" indent="-164592">
+              <a:lnSpc>
+                <a:spcPts val="2200"/>
+              </a:lnSpc>
+              <a:spcAft>
+                <a:spcPts val="800"/>
+              </a:spcAft>
+              <a:buChar char="•"/>
+              <a:defRPr sz="1700">
+                <a:solidFill>
+                  <a:srgbClr val="334155"/>
+                </a:solidFill>
+                <a:latin typeface="DejaVu Sans"/>
+              </a:defRPr>
+            </a:pPr>
+            <a:r>
+              <a:t>Linux/Windows isolation, expiry and rollback</a:t>
+            </a:r>
+          </a:p>
+          <a:p>
+            <a:pPr marL="182880" indent="-164592">
+              <a:lnSpc>
+                <a:spcPts val="2200"/>
+              </a:lnSpc>
+              <a:spcAft>
+                <a:spcPts val="800"/>
+              </a:spcAft>
+              <a:buChar char="•"/>
+              <a:defRPr sz="1700">
+                <a:solidFill>
+                  <a:srgbClr val="334155"/>
+                </a:solidFill>
+                <a:latin typeface="DejaVu Sans"/>
+              </a:defRPr>
+            </a:pPr>
+            <a:r>
+              <a:t>False positives, overhead, backlog and recovery</a:t>
+            </a:r>
+          </a:p>
+        </p:txBody>
+      </p:sp>
+      <p:sp>
+        <p:nvSpPr>
+          <p:cNvPr id="14" name="TextBox 13"/>
+          <p:cNvSpPr txBox="1"/>
+          <p:nvPr/>
+        </p:nvSpPr>
+        <p:spPr>
+          <a:xfrm>
+            <a:off x="502920" y="6080760"/>
+            <a:ext cx="11155680" cy="384048"/>
+          </a:xfrm>
+          <a:prstGeom prst="rect">
+            <a:avLst/>
+          </a:prstGeom>
+          <a:noFill/>
+        </p:spPr>
+        <p:txBody>
+          <a:bodyPr wrap="square" lIns="0" rIns="0" tIns="0" bIns="0">
+            <a:noAutofit/>
+          </a:bodyPr>
+          <a:lstStyle/>
+          <a:p>
+            <a:pPr>
+              <a:spcAft>
+                <a:spcPts val="0"/>
+              </a:spcAft>
+              <a:defRPr sz="1100" b="0">
+                <a:solidFill>
+                  <a:srgbClr val="64748B"/>
+                </a:solidFill>
+                <a:latin typeface="DejaVu Sans"/>
+              </a:defRPr>
+            </a:pPr>
+            <a:r>
+              <a:t>Validate native Windows ACLs, firewall enforcement, scheduled-task expiry and reboot recovery before enabling containment.</a:t>
+            </a:r>
+          </a:p>
+        </p:txBody>
+      </p:sp>
+      <p:sp>
+        <p:nvSpPr>
+          <p:cNvPr id="15" name="TextBox 14"/>
+          <p:cNvSpPr txBox="1"/>
+          <p:nvPr/>
+        </p:nvSpPr>
+        <p:spPr>
+          <a:xfrm>
+            <a:off x="502920" y="6519672"/>
+            <a:ext cx="10058400" cy="182880"/>
+          </a:xfrm>
+          <a:prstGeom prst="rect">
+            <a:avLst/>
+          </a:prstGeom>
+          <a:noFill/>
+        </p:spPr>
+        <p:txBody>
+          <a:bodyPr wrap="square" lIns="0" rIns="0" tIns="0" bIns="0">
+            <a:noAutofit/>
+          </a:bodyPr>
+          <a:lstStyle/>
+          <a:p>
+            <a:pPr>
+              <a:spcAft>
+                <a:spcPts val="0"/>
+              </a:spcAft>
+              <a:defRPr sz="900" b="0">
+                <a:solidFill>
+                  <a:srgbClr val="64748B"/>
+                </a:solidFill>
+                <a:latin typeface="DejaVu Sans"/>
+              </a:defRPr>
+            </a:pPr>
+            <a:r>
+              <a:t>CONFIDENTIAL • INTERNAL REVIEW  |  19 October 2026</a:t>
+            </a:r>
+          </a:p>
+        </p:txBody>
+      </p:sp>
+      <p:sp>
+        <p:nvSpPr>
+          <p:cNvPr id="16" name="TextBox 15"/>
+          <p:cNvSpPr txBox="1"/>
+          <p:nvPr/>
+        </p:nvSpPr>
+        <p:spPr>
+          <a:xfrm>
+            <a:off x="11045952" y="6519672"/>
+            <a:ext cx="685800" cy="182880"/>
+          </a:xfrm>
+          <a:prstGeom prst="rect">
+            <a:avLst/>
+          </a:prstGeom>
+          <a:noFill/>
+        </p:spPr>
+        <p:txBody>
+          <a:bodyPr wrap="square" lIns="0" rIns="0" tIns="0" bIns="0">
+            <a:noAutofit/>
+          </a:bodyPr>
+          <a:lstStyle/>
+          <a:p>
+            <a:pPr>
+              <a:spcAft>
+                <a:spcPts val="0"/>
+              </a:spcAft>
+              <a:defRPr sz="900" b="0">
+                <a:solidFill>
+                  <a:srgbClr val="64748B"/>
+                </a:solidFill>
+                <a:latin typeface="DejaVu Sans"/>
+              </a:defRPr>
+            </a:pPr>
+            <a:r>
+              <a:t>23 / 24</a:t>
+            </a:r>
+          </a:p>
+        </p:txBody>
+      </p:sp>
+    </p:spTree>
+  </p:cSld>
+  <p:clrMapOvr>
+    <a:masterClrMapping/>
+  </p:clrMapOvr>
+</p:sld>
+</file>
+
+<file path=ppt/slides/slide24.xml><?xml version="1.0" encoding="utf-8"?>
+<p:sld xmlns:a="http://schemas.openxmlformats.org/drawingml/2006/main" xmlns:p="http://schemas.openxmlformats.org/presentationml/2006/main" xmlns:r="http://schemas.openxmlformats.org/officeDocument/2006/relationships">
+  <p:cSld>
+    <p:spTree>
+      <p:nvGrpSpPr>
+        <p:cNvPr id="1" name=""/>
+        <p:cNvGrpSpPr/>
+        <p:nvPr/>
+      </p:nvGrpSpPr>
+      <p:grpSpPr/>
+      <p:sp>
+        <p:nvSpPr>
+          <p:cNvPr id="2" name="Rectangle 1"/>
+          <p:cNvSpPr/>
+          <p:nvPr/>
+        </p:nvSpPr>
+        <p:spPr>
+          <a:xfrm>
+            <a:off x="0" y="0"/>
+            <a:ext cx="12191695" cy="91440"/>
+          </a:xfrm>
+          <a:prstGeom prst="rect">
+            <a:avLst/>
+          </a:prstGeom>
+          <a:solidFill>
+            <a:srgbClr val="F38020"/>
+          </a:solidFill>
+          <a:ln>
+            <a:noFill/>
+          </a:ln>
+        </p:spPr>
+        <p:style>
+          <a:lnRef idx="1">
+            <a:schemeClr val="accent1"/>
+          </a:lnRef>
+          <a:fillRef idx="3">
+            <a:schemeClr val="accent1"/>
+          </a:fillRef>
+          <a:effectRef idx="2">
+            <a:schemeClr val="accent1"/>
+          </a:effectRef>
+          <a:fontRef idx="minor">
+            <a:schemeClr val="lt1"/>
+          </a:fontRef>
+        </p:style>
+        <p:txBody>
+          <a:bodyPr rtlCol="0" anchor="ctr"/>
+          <a:lstStyle/>
+          <a:p>
+            <a:pPr algn="ctr"/>
+          </a:p>
+        </p:txBody>
+      </p:sp>
+      <p:sp>
+        <p:nvSpPr>
+          <p:cNvPr id="3" name="TextBox 2"/>
+          <p:cNvSpPr txBox="1"/>
+          <p:nvPr/>
+        </p:nvSpPr>
+        <p:spPr>
+          <a:xfrm>
+            <a:off x="502920" y="320040"/>
+            <a:ext cx="10972800" cy="274320"/>
+          </a:xfrm>
+          <a:prstGeom prst="rect">
+            <a:avLst/>
+          </a:prstGeom>
+          <a:noFill/>
+        </p:spPr>
+        <p:txBody>
+          <a:bodyPr wrap="square" lIns="0" rIns="0" tIns="0" bIns="0">
+            <a:noAutofit/>
+          </a:bodyPr>
+          <a:lstStyle/>
+          <a:p>
+            <a:pPr>
+              <a:spcAft>
+                <a:spcPts val="0"/>
+              </a:spcAft>
+              <a:defRPr sz="1100" b="1">
+                <a:solidFill>
+                  <a:srgbClr val="F38020"/>
+                </a:solidFill>
+                <a:latin typeface="DejaVu Sans"/>
+              </a:defRPr>
+            </a:pPr>
+            <a:r>
+              <a:t>DEPLOYMENT PLANNING</a:t>
+            </a:r>
+          </a:p>
+        </p:txBody>
+      </p:sp>
+      <p:sp>
+        <p:nvSpPr>
+          <p:cNvPr id="4" name="TextBox 3"/>
+          <p:cNvSpPr txBox="1"/>
+          <p:nvPr/>
+        </p:nvSpPr>
+        <p:spPr>
+          <a:xfrm>
+            <a:off x="502920" y="795528"/>
+            <a:ext cx="11155680" cy="594360"/>
+          </a:xfrm>
+          <a:prstGeom prst="rect">
+            <a:avLst/>
+          </a:prstGeom>
+          <a:noFill/>
+        </p:spPr>
+        <p:txBody>
+          <a:bodyPr wrap="square" lIns="0" rIns="0" tIns="0" bIns="0">
+            <a:noAutofit/>
+          </a:bodyPr>
+          <a:lstStyle/>
+          <a:p>
+            <a:pPr>
+              <a:spcAft>
+                <a:spcPts val="0"/>
+              </a:spcAft>
+              <a:defRPr sz="3400" b="1">
+                <a:solidFill>
+                  <a:srgbClr val="0A2540"/>
+                </a:solidFill>
+                <a:latin typeface="DejaVu Sans"/>
+              </a:defRPr>
+            </a:pPr>
+            <a:r>
+              <a:t>Evaluating fit for your organisation</a:t>
+            </a:r>
+          </a:p>
+        </p:txBody>
+      </p:sp>
+      <p:sp>
+        <p:nvSpPr>
+          <p:cNvPr id="5" name="TextBox 4"/>
+          <p:cNvSpPr txBox="1"/>
+          <p:nvPr/>
+        </p:nvSpPr>
+        <p:spPr>
+          <a:xfrm>
+            <a:off x="502920" y="1417320"/>
+            <a:ext cx="11155680" cy="768096"/>
+          </a:xfrm>
+          <a:prstGeom prst="rect">
+            <a:avLst/>
+          </a:prstGeom>
+          <a:noFill/>
+        </p:spPr>
+        <p:txBody>
+          <a:bodyPr wrap="square" lIns="0" rIns="0" tIns="0" bIns="0">
+            <a:noAutofit/>
+          </a:bodyPr>
+          <a:lstStyle/>
+          <a:p>
+            <a:pPr>
+              <a:lnSpc>
+                <a:spcPts val="2000"/>
+              </a:lnSpc>
+              <a:spcAft>
+                <a:spcPts val="0"/>
+              </a:spcAft>
+              <a:defRPr sz="1550" b="0">
+                <a:solidFill>
+                  <a:srgbClr val="334155"/>
+                </a:solidFill>
+                <a:latin typeface="DejaVu Sans"/>
+              </a:defRPr>
+            </a:pPr>
+            <a:r>
+              <a:t>A suitable deployment starts with clear asset scope, accountable owners and measurable acceptance criteria. These decisions help teams assess coverage, operational impact, recovery expectations and the conditions under which approved response should be enabled.</a:t>
+            </a:r>
+          </a:p>
+        </p:txBody>
+      </p:sp>
+      <p:sp>
+        <p:nvSpPr>
+          <p:cNvPr id="6" name="Rectangle 5"/>
+          <p:cNvSpPr/>
+          <p:nvPr/>
+        </p:nvSpPr>
+        <p:spPr>
+          <a:xfrm>
+            <a:off x="502920" y="2331720"/>
+            <a:ext cx="5404104" cy="3657600"/>
+          </a:xfrm>
+          <a:prstGeom prst="rect">
+            <a:avLst/>
+          </a:prstGeom>
+          <a:solidFill>
+            <a:srgbClr val="F3F6FA"/>
+          </a:solidFill>
+          <a:ln>
+            <a:noFill/>
+          </a:ln>
+        </p:spPr>
+        <p:style>
+          <a:lnRef idx="1">
+            <a:schemeClr val="accent1"/>
+          </a:lnRef>
+          <a:fillRef idx="3">
+            <a:schemeClr val="accent1"/>
+          </a:fillRef>
+          <a:effectRef idx="2">
+            <a:schemeClr val="accent1"/>
+          </a:effectRef>
+          <a:fontRef idx="minor">
+            <a:schemeClr val="lt1"/>
+          </a:fontRef>
+        </p:style>
+        <p:txBody>
+          <a:bodyPr rtlCol="0" anchor="ctr"/>
+          <a:lstStyle/>
+          <a:p>
+            <a:pPr algn="ctr"/>
+          </a:p>
+        </p:txBody>
+      </p:sp>
+      <p:sp>
+        <p:nvSpPr>
+          <p:cNvPr id="7" name="Rectangle 6"/>
+          <p:cNvSpPr/>
+          <p:nvPr/>
+        </p:nvSpPr>
+        <p:spPr>
+          <a:xfrm>
+            <a:off x="502920" y="2331720"/>
+            <a:ext cx="45720" cy="3657600"/>
+          </a:xfrm>
+          <a:prstGeom prst="rect">
+            <a:avLst/>
+          </a:prstGeom>
+          <a:solidFill>
+            <a:srgbClr val="F38020"/>
+          </a:solidFill>
+          <a:ln>
+            <a:noFill/>
+          </a:ln>
+        </p:spPr>
+        <p:style>
+          <a:lnRef idx="1">
+            <a:schemeClr val="accent1"/>
+          </a:lnRef>
+          <a:fillRef idx="3">
+            <a:schemeClr val="accent1"/>
+          </a:fillRef>
+          <a:effectRef idx="2">
+            <a:schemeClr val="accent1"/>
+          </a:effectRef>
+          <a:fontRef idx="minor">
+            <a:schemeClr val="lt1"/>
+          </a:fontRef>
+        </p:style>
+        <p:txBody>
+          <a:bodyPr rtlCol="0" anchor="ctr"/>
+          <a:lstStyle/>
+          <a:p>
+            <a:pPr algn="ctr"/>
+          </a:p>
+        </p:txBody>
+      </p:sp>
+      <p:sp>
+        <p:nvSpPr>
+          <p:cNvPr id="8" name="TextBox 7"/>
+          <p:cNvSpPr txBox="1"/>
+          <p:nvPr/>
+        </p:nvSpPr>
+        <p:spPr>
+          <a:xfrm>
+            <a:off x="749808" y="2542032"/>
+            <a:ext cx="4901184" cy="594360"/>
+          </a:xfrm>
+          <a:prstGeom prst="rect">
+            <a:avLst/>
+          </a:prstGeom>
+          <a:noFill/>
+        </p:spPr>
+        <p:txBody>
+          <a:bodyPr wrap="square" lIns="0" rIns="0" tIns="0" bIns="0">
+            <a:noAutofit/>
+          </a:bodyPr>
+          <a:lstStyle/>
+          <a:p>
+            <a:pPr>
+              <a:spcAft>
+                <a:spcPts val="0"/>
+              </a:spcAft>
+              <a:defRPr sz="2000" b="1">
+                <a:solidFill>
+                  <a:srgbClr val="0A2540"/>
+                </a:solidFill>
+                <a:latin typeface="DejaVu Sans"/>
+              </a:defRPr>
+            </a:pPr>
+            <a:r>
+              <a:t>Scope and ownership</a:t>
+            </a:r>
+          </a:p>
+        </p:txBody>
+      </p:sp>
+      <p:sp>
+        <p:nvSpPr>
+          <p:cNvPr id="9" name="TextBox 8"/>
+          <p:cNvSpPr txBox="1"/>
+          <p:nvPr/>
+        </p:nvSpPr>
+        <p:spPr>
+          <a:xfrm>
+            <a:off x="749808" y="3236976"/>
+            <a:ext cx="4846320" cy="2615184"/>
+          </a:xfrm>
+          <a:prstGeom prst="rect">
+            <a:avLst/>
+          </a:prstGeom>
+          <a:noFill/>
+        </p:spPr>
+        <p:txBody>
+          <a:bodyPr wrap="square" lIns="0" rIns="0" tIns="0" bIns="0">
+            <a:noAutofit/>
+          </a:bodyPr>
+          <a:lstStyle/>
+          <a:p>
+            <a:pPr marL="182880" indent="-164592">
+              <a:lnSpc>
+                <a:spcPts val="2200"/>
+              </a:lnSpc>
+              <a:spcAft>
+                <a:spcPts val="800"/>
+              </a:spcAft>
+              <a:buChar char="•"/>
+              <a:defRPr sz="1700" b="0">
+                <a:solidFill>
+                  <a:srgbClr val="334155"/>
+                </a:solidFill>
+                <a:latin typeface="DejaVu Sans"/>
+              </a:defRPr>
+            </a:pPr>
+            <a:r>
+              <a:t>Select applications, APIs, cloud accounts and servers</a:t>
+            </a:r>
+          </a:p>
+          <a:p>
+            <a:pPr marL="182880" indent="-164592">
+              <a:lnSpc>
+                <a:spcPts val="2200"/>
+              </a:lnSpc>
+              <a:spcAft>
+                <a:spcPts val="800"/>
+              </a:spcAft>
+              <a:buChar char="•"/>
+              <a:defRPr sz="1700">
+                <a:solidFill>
+                  <a:srgbClr val="334155"/>
+                </a:solidFill>
+                <a:latin typeface="DejaVu Sans"/>
+              </a:defRPr>
+            </a:pPr>
+            <a:r>
+              <a:t>Identify incident owners and response approvers</a:t>
+            </a:r>
+          </a:p>
+          <a:p>
+            <a:pPr marL="182880" indent="-164592">
+              <a:lnSpc>
+                <a:spcPts val="2200"/>
+              </a:lnSpc>
+              <a:spcAft>
+                <a:spcPts val="800"/>
+              </a:spcAft>
+              <a:buChar char="•"/>
+              <a:defRPr sz="1700">
+                <a:solidFill>
+                  <a:srgbClr val="334155"/>
+                </a:solidFill>
+                <a:latin typeface="DejaVu Sans"/>
+              </a:defRPr>
+            </a:pPr>
+            <a:r>
+              <a:t>Approve the domains and networks in scope</a:t>
+            </a:r>
+          </a:p>
+          <a:p>
+            <a:pPr marL="182880" indent="-164592">
+              <a:lnSpc>
+                <a:spcPts val="2200"/>
+              </a:lnSpc>
+              <a:spcAft>
+                <a:spcPts val="800"/>
+              </a:spcAft>
+              <a:buChar char="•"/>
+              <a:defRPr sz="1700">
+                <a:solidFill>
+                  <a:srgbClr val="334155"/>
+                </a:solidFill>
+                <a:latin typeface="DejaVu Sans"/>
+              </a:defRPr>
+            </a:pPr>
+            <a:r>
+              <a:t>Agree retention and recovery requirements</a:t>
+            </a:r>
+          </a:p>
+        </p:txBody>
+      </p:sp>
+      <p:sp>
+        <p:nvSpPr>
+          <p:cNvPr id="10" name="Rectangle 9"/>
+          <p:cNvSpPr/>
+          <p:nvPr/>
+        </p:nvSpPr>
+        <p:spPr>
+          <a:xfrm>
+            <a:off x="6281928" y="2331720"/>
+            <a:ext cx="5404104" cy="3657600"/>
+          </a:xfrm>
+          <a:prstGeom prst="rect">
+            <a:avLst/>
+          </a:prstGeom>
+          <a:solidFill>
+            <a:srgbClr val="F3F6FA"/>
+          </a:solidFill>
+          <a:ln>
+            <a:noFill/>
+          </a:ln>
+        </p:spPr>
+        <p:style>
+          <a:lnRef idx="1">
+            <a:schemeClr val="accent1"/>
+          </a:lnRef>
+          <a:fillRef idx="3">
+            <a:schemeClr val="accent1"/>
+          </a:fillRef>
+          <a:effectRef idx="2">
+            <a:schemeClr val="accent1"/>
+          </a:effectRef>
+          <a:fontRef idx="minor">
+            <a:schemeClr val="lt1"/>
+          </a:fontRef>
+        </p:style>
+        <p:txBody>
+          <a:bodyPr rtlCol="0" anchor="ctr"/>
+          <a:lstStyle/>
+          <a:p>
+            <a:pPr algn="ctr"/>
+          </a:p>
+        </p:txBody>
+      </p:sp>
+      <p:sp>
+        <p:nvSpPr>
+          <p:cNvPr id="11" name="Rectangle 10"/>
+          <p:cNvSpPr/>
+          <p:nvPr/>
+        </p:nvSpPr>
+        <p:spPr>
+          <a:xfrm>
+            <a:off x="6281928" y="2331720"/>
+            <a:ext cx="45720" cy="3657600"/>
+          </a:xfrm>
+          <a:prstGeom prst="rect">
+            <a:avLst/>
+          </a:prstGeom>
+          <a:solidFill>
+            <a:srgbClr val="F38020"/>
+          </a:solidFill>
+          <a:ln>
+            <a:noFill/>
+          </a:ln>
+        </p:spPr>
+        <p:style>
+          <a:lnRef idx="1">
+            <a:schemeClr val="accent1"/>
+          </a:lnRef>
+          <a:fillRef idx="3">
+            <a:schemeClr val="accent1"/>
+          </a:fillRef>
+          <a:effectRef idx="2">
+            <a:schemeClr val="accent1"/>
+          </a:effectRef>
+          <a:fontRef idx="minor">
+            <a:schemeClr val="lt1"/>
+          </a:fontRef>
+        </p:style>
+        <p:txBody>
+          <a:bodyPr rtlCol="0" anchor="ctr"/>
+          <a:lstStyle/>
+          <a:p>
+            <a:pPr algn="ctr"/>
+          </a:p>
+        </p:txBody>
+      </p:sp>
+      <p:sp>
+        <p:nvSpPr>
+          <p:cNvPr id="12" name="TextBox 11"/>
+          <p:cNvSpPr txBox="1"/>
+          <p:nvPr/>
+        </p:nvSpPr>
+        <p:spPr>
+          <a:xfrm>
+            <a:off x="6528816" y="2542032"/>
+            <a:ext cx="4901184" cy="594360"/>
+          </a:xfrm>
+          <a:prstGeom prst="rect">
+            <a:avLst/>
+          </a:prstGeom>
+          <a:noFill/>
+        </p:spPr>
+        <p:txBody>
+          <a:bodyPr wrap="square" lIns="0" rIns="0" tIns="0" bIns="0">
+            <a:noAutofit/>
+          </a:bodyPr>
+          <a:lstStyle/>
+          <a:p>
+            <a:pPr>
+              <a:spcAft>
+                <a:spcPts val="0"/>
+              </a:spcAft>
+              <a:defRPr sz="2000" b="1">
+                <a:solidFill>
+                  <a:srgbClr val="0A2540"/>
+                </a:solidFill>
+                <a:latin typeface="DejaVu Sans"/>
+              </a:defRPr>
+            </a:pPr>
+            <a:r>
+              <a:t>Acceptance criteria</a:t>
+            </a:r>
+          </a:p>
+        </p:txBody>
+      </p:sp>
+      <p:sp>
+        <p:nvSpPr>
+          <p:cNvPr id="13" name="TextBox 12"/>
+          <p:cNvSpPr txBox="1"/>
+          <p:nvPr/>
+        </p:nvSpPr>
+        <p:spPr>
+          <a:xfrm>
+            <a:off x="6528816" y="3236976"/>
+            <a:ext cx="4846320" cy="2615184"/>
+          </a:xfrm>
+          <a:prstGeom prst="rect">
+            <a:avLst/>
+          </a:prstGeom>
+          <a:noFill/>
+        </p:spPr>
+        <p:txBody>
+          <a:bodyPr wrap="square" lIns="0" rIns="0" tIns="0" bIns="0">
+            <a:noAutofit/>
+          </a:bodyPr>
+          <a:lstStyle/>
+          <a:p>
+            <a:pPr marL="182880" indent="-164592">
+              <a:lnSpc>
+                <a:spcPts val="2200"/>
+              </a:lnSpc>
+              <a:spcAft>
+                <a:spcPts val="800"/>
+              </a:spcAft>
+              <a:buChar char="•"/>
+              <a:defRPr sz="1700" b="0">
+                <a:solidFill>
+                  <a:srgbClr val="334155"/>
+                </a:solidFill>
+                <a:latin typeface="DejaVu Sans"/>
+              </a:defRPr>
+            </a:pPr>
+            <a:r>
+              <a:t>Measure detection coverage and false positives</a:t>
+            </a:r>
+          </a:p>
+          <a:p>
+            <a:pPr marL="182880" indent="-164592">
+              <a:lnSpc>
+                <a:spcPts val="2200"/>
+              </a:lnSpc>
+              <a:spcAft>
+                <a:spcPts val="800"/>
+              </a:spcAft>
+              <a:buChar char="•"/>
+              <a:defRPr sz="1700">
+                <a:solidFill>
+                  <a:srgbClr val="334155"/>
+                </a:solidFill>
+                <a:latin typeface="DejaVu Sans"/>
+              </a:defRPr>
+            </a:pPr>
+            <a:r>
+              <a:t>Verify roles and separate-actor approval</a:t>
+            </a:r>
+          </a:p>
+          <a:p>
+            <a:pPr marL="182880" indent="-164592">
+              <a:lnSpc>
+                <a:spcPts val="2200"/>
+              </a:lnSpc>
+              <a:spcAft>
+                <a:spcPts val="800"/>
+              </a:spcAft>
+              <a:buChar char="•"/>
+              <a:defRPr sz="1700">
+                <a:solidFill>
+                  <a:srgbClr val="334155"/>
+                </a:solidFill>
+                <a:latin typeface="DejaVu Sans"/>
+              </a:defRPr>
+            </a:pPr>
+            <a:r>
+              <a:t>Exercise containment, expiry and restoration</a:t>
+            </a:r>
+          </a:p>
+          <a:p>
+            <a:pPr marL="182880" indent="-164592">
+              <a:lnSpc>
+                <a:spcPts val="2200"/>
+              </a:lnSpc>
+              <a:spcAft>
+                <a:spcPts val="800"/>
+              </a:spcAft>
+              <a:buChar char="•"/>
+              <a:defRPr sz="1700">
+                <a:solidFill>
+                  <a:srgbClr val="334155"/>
+                </a:solidFill>
+                <a:latin typeface="DejaVu Sans"/>
+              </a:defRPr>
+            </a:pPr>
+            <a:r>
+              <a:t>Measure host overhead and service recovery</a:t>
+            </a:r>
+          </a:p>
+        </p:txBody>
+      </p:sp>
+      <p:sp>
+        <p:nvSpPr>
+          <p:cNvPr id="14" name="TextBox 13"/>
+          <p:cNvSpPr txBox="1"/>
+          <p:nvPr/>
+        </p:nvSpPr>
+        <p:spPr>
+          <a:xfrm>
+            <a:off x="502920" y="6080760"/>
+            <a:ext cx="11155680" cy="384048"/>
+          </a:xfrm>
+          <a:prstGeom prst="rect">
+            <a:avLst/>
+          </a:prstGeom>
+          <a:noFill/>
+        </p:spPr>
+        <p:txBody>
+          <a:bodyPr wrap="square" lIns="0" rIns="0" tIns="0" bIns="0">
+            <a:noAutofit/>
+          </a:bodyPr>
+          <a:lstStyle/>
+          <a:p>
+            <a:pPr>
+              <a:spcAft>
+                <a:spcPts val="0"/>
+              </a:spcAft>
+              <a:defRPr sz="1100" b="0">
+                <a:solidFill>
+                  <a:srgbClr val="64748B"/>
+                </a:solidFill>
+                <a:latin typeface="DejaVu Sans"/>
+              </a:defRPr>
+            </a:pPr>
+            <a:r>
+              <a:t>Production deployment requires environment-specific validation and an approved operating procedure.</a:t>
+            </a:r>
+          </a:p>
+        </p:txBody>
+      </p:sp>
+      <p:sp>
+        <p:nvSpPr>
+          <p:cNvPr id="15" name="TextBox 14"/>
+          <p:cNvSpPr txBox="1"/>
+          <p:nvPr/>
+        </p:nvSpPr>
+        <p:spPr>
+          <a:xfrm>
+            <a:off x="502920" y="6519672"/>
+            <a:ext cx="10058400" cy="182880"/>
+          </a:xfrm>
+          <a:prstGeom prst="rect">
+            <a:avLst/>
+          </a:prstGeom>
+          <a:noFill/>
+        </p:spPr>
+        <p:txBody>
+          <a:bodyPr wrap="square" lIns="0" rIns="0" tIns="0" bIns="0">
+            <a:noAutofit/>
+          </a:bodyPr>
+          <a:lstStyle/>
+          <a:p>
+            <a:pPr>
+              <a:spcAft>
+                <a:spcPts val="0"/>
+              </a:spcAft>
+              <a:defRPr sz="900" b="0">
+                <a:solidFill>
+                  <a:srgbClr val="64748B"/>
+                </a:solidFill>
+                <a:latin typeface="DejaVu Sans"/>
+              </a:defRPr>
+            </a:pPr>
+            <a:r>
+              <a:t>CONFIDENTIAL • INTERNAL REVIEW  |  19 October 2026</a:t>
+            </a:r>
+          </a:p>
+        </p:txBody>
+      </p:sp>
+      <p:sp>
+        <p:nvSpPr>
+          <p:cNvPr id="16" name="TextBox 15"/>
+          <p:cNvSpPr txBox="1"/>
+          <p:nvPr/>
+        </p:nvSpPr>
+        <p:spPr>
+          <a:xfrm>
+            <a:off x="11045952" y="6519672"/>
+            <a:ext cx="685800" cy="182880"/>
+          </a:xfrm>
+          <a:prstGeom prst="rect">
+            <a:avLst/>
+          </a:prstGeom>
+          <a:noFill/>
+        </p:spPr>
+        <p:txBody>
+          <a:bodyPr wrap="square" lIns="0" rIns="0" tIns="0" bIns="0">
+            <a:noAutofit/>
+          </a:bodyPr>
+          <a:lstStyle/>
+          <a:p>
+            <a:pPr>
+              <a:spcAft>
+                <a:spcPts val="0"/>
+              </a:spcAft>
+              <a:defRPr sz="900" b="0">
+                <a:solidFill>
+                  <a:srgbClr val="64748B"/>
+                </a:solidFill>
+                <a:latin typeface="DejaVu Sans"/>
+              </a:defRPr>
+            </a:pPr>
+            <a:r>
+              <a:t>24 / 24</a:t>
             </a:r>
           </a:p>
         </p:txBody>
@@ -14211,7 +18636,7 @@
               </a:defRPr>
             </a:pPr>
             <a:r>
-              <a:t>ASSESSMENT + OPERATIONS</a:t>
+              <a:t>12 ASSESSMENT MODULES, 22 TOOLS, 2 HOST PLATFORMS</a:t>
             </a:r>
           </a:p>
         </p:txBody>
@@ -14292,7 +18717,7 @@
               </a:defRPr>
             </a:pPr>
             <a:r>
-              <a:t>Different assets expose different kinds of risk, from vulnerable libraries to unsafe infrastructure settings and suspicious host activity. VulnSuite brings assessment and monitoring into a common operational context, with coverage determined by configured tools and telemetry sources.</a:t>
+              <a:t>Different assets expose different kinds of risk, from vulnerable libraries to unsafe cloud settings and suspicious host activity. VulnSuite brings assessment and monitoring into a common operational context, with coverage determined by configured tools and telemetry sources.</a:t>
             </a:r>
           </a:p>
         </p:txBody>
@@ -14865,7 +19290,7 @@
               </a:defRPr>
             </a:pPr>
             <a:r>
-              <a:t>03 / 19</a:t>
+              <a:t>03 / 24</a:t>
             </a:r>
           </a:p>
         </p:txBody>
@@ -14965,7 +19390,7 @@
               </a:defRPr>
             </a:pPr>
             <a:r>
-              <a:t>APPLICATION SECURITY</a:t>
+              <a:t>CVSS × EPSS × CRITICALITY × EXPOSURE</a:t>
             </a:r>
           </a:p>
         </p:txBody>
@@ -15004,7 +19429,7 @@
               </a:defRPr>
             </a:pPr>
             <a:r>
-              <a:t>Software and supply-chain risk</a:t>
+              <a:t>Risk prioritisation and compliance</a:t>
             </a:r>
           </a:p>
         </p:txBody>
@@ -15046,7 +19471,7 @@
               </a:defRPr>
             </a:pPr>
             <a:r>
-              <a:t>Applications inherit risk from their own code, third-party dependencies and build artifacts. These checks help teams understand what software contains, identify known weaknesses and retain supporting evidence so remediation and software release decisions can be reviewed.</a:t>
+              <a:t>A single risk engine scores every finding, whichever tool produced it, so one queue replaces twenty tool-specific reports. Regulatory context travels with the finding: the RBI clause it maps to, and for critical items the CERT-In incident record needed within six hours.</a:t>
             </a:r>
           </a:p>
         </p:txBody>
@@ -15171,7 +19596,7 @@
               </a:defRPr>
             </a:pPr>
             <a:r>
-              <a:t>Code and dependencies</a:t>
+              <a:t>One score, five buckets</a:t>
             </a:r>
           </a:p>
         </p:txBody>
@@ -15214,7 +19639,7 @@
               </a:defRPr>
             </a:pPr>
             <a:r>
-              <a:t>Trivy, pip-audit and OSV-Scanner collectors</a:t>
+              <a:t>Every finding scored on exploit likelihood and asset context</a:t>
             </a:r>
           </a:p>
           <a:p>
@@ -15234,7 +19659,7 @@
               </a:defRPr>
             </a:pPr>
             <a:r>
-              <a:t>Semgrep and Bandit static analysis</a:t>
+              <a:t>P0 ≥ 7.0 starts the CERT-In six-hour clock automatically</a:t>
             </a:r>
           </a:p>
           <a:p>
@@ -15254,7 +19679,27 @@
               </a:defRPr>
             </a:pPr>
             <a:r>
-              <a:t>Gitleaks and TruffleHog secret detection</a:t>
+              <a:t>Cross-tool corroboration recorded for auditors</a:t>
+            </a:r>
+          </a:p>
+          <a:p>
+            <a:pPr marL="182880" indent="-164592">
+              <a:lnSpc>
+                <a:spcPts val="2200"/>
+              </a:lnSpc>
+              <a:spcAft>
+                <a:spcPts val="800"/>
+              </a:spcAft>
+              <a:buChar char="•"/>
+              <a:defRPr sz="1700">
+                <a:solidFill>
+                  <a:srgbClr val="334155"/>
+                </a:solidFill>
+                <a:latin typeface="DejaVu Sans"/>
+              </a:defRPr>
+            </a:pPr>
+            <a:r>
+              <a:t>AI advisory signals never alter the deterministic score</a:t>
             </a:r>
           </a:p>
         </p:txBody>
@@ -15379,7 +19824,7 @@
               </a:defRPr>
             </a:pPr>
             <a:r>
-              <a:t>Build and artifact evidence</a:t>
+              <a:t>Regulatory mapping</a:t>
             </a:r>
           </a:p>
         </p:txBody>
@@ -15422,7 +19867,7 @@
               </a:defRPr>
             </a:pPr>
             <a:r>
-              <a:t>Syft software bill of materials</a:t>
+              <a:t>RBI CSF Annex-I clause cited on each finding</a:t>
             </a:r>
           </a:p>
           <a:p>
@@ -15442,7 +19887,7 @@
               </a:defRPr>
             </a:pPr>
             <a:r>
-              <a:t>Cosign signature and attestation checks</a:t>
+              <a:t>CERT-In incident JSON generated for every P0</a:t>
             </a:r>
           </a:p>
           <a:p>
@@ -15462,7 +19907,7 @@
               </a:defRPr>
             </a:pPr>
             <a:r>
-              <a:t>VEX statements captured in finding evidence</a:t>
+              <a:t>CIS, ISO 27001, NIST 800-53 and OWASP via scanner packs</a:t>
             </a:r>
           </a:p>
           <a:p>
@@ -15482,7 +19927,7 @@
               </a:defRPr>
             </a:pPr>
             <a:r>
-              <a:t>Risk scoring and remediation lifecycle tracking</a:t>
+              <a:t>Tamper-evident PDF reports with SHA-256 footer</a:t>
             </a:r>
           </a:p>
         </p:txBody>
@@ -15521,7 +19966,7 @@
               </a:defRPr>
             </a:pPr>
             <a:r>
-              <a:t>Coverage depends on configured targets, installed tools and available advisory data.</a:t>
+              <a:t>Missing CVSS falls back to severity; missing EPSS uses a configured floor so nothing is silently dropped.</a:t>
             </a:r>
           </a:p>
         </p:txBody>
@@ -15599,7 +20044,7 @@
               </a:defRPr>
             </a:pPr>
             <a:r>
-              <a:t>04 / 19</a:t>
+              <a:t>04 / 24</a:t>
             </a:r>
           </a:p>
         </p:txBody>
@@ -15699,7 +20144,7 @@
               </a:defRPr>
             </a:pPr>
             <a:r>
-              <a:t>EXPOSURE MANAGEMENT</a:t>
+              <a:t>APPLICATION SECURITY</a:t>
             </a:r>
           </a:p>
         </p:txBody>
@@ -15738,7 +20183,7 @@
               </a:defRPr>
             </a:pPr>
             <a:r>
-              <a:t>Infrastructure and API assessment</a:t>
+              <a:t>Software and supply-chain risk</a:t>
             </a:r>
           </a:p>
         </p:txBody>
@@ -15780,7 +20225,7 @@
               </a:defRPr>
             </a:pPr>
             <a:r>
-              <a:t>Exposed services, weak configurations and application interfaces can create paths into an organisation. Assessment collectors help identify these conditions across selected targets, giving teams evidence to prioritise fixes and confirm which systems need closer investigation.</a:t>
+              <a:t>Applications inherit risk from their own code, third-party dependencies and build artifacts. These checks help teams understand what software contains, identify known weaknesses and retain supporting evidence so remediation and software release decisions can be reviewed.</a:t>
             </a:r>
           </a:p>
         </p:txBody>
@@ -15905,7 +20350,7 @@
               </a:defRPr>
             </a:pPr>
             <a:r>
-              <a:t>Infrastructure</a:t>
+              <a:t>Code and dependencies</a:t>
             </a:r>
           </a:p>
         </p:txBody>
@@ -15948,7 +20393,7 @@
               </a:defRPr>
             </a:pPr>
             <a:r>
-              <a:t>Nmap service discovery and testssl.sh TLS checks</a:t>
+              <a:t>Trivy, pip-audit and OSV-Scanner collectors</a:t>
             </a:r>
           </a:p>
           <a:p>
@@ -15968,7 +20413,7 @@
               </a:defRPr>
             </a:pPr>
             <a:r>
-              <a:t>Prowler cloud configuration collectors</a:t>
+              <a:t>Semgrep and Bandit static analysis</a:t>
             </a:r>
           </a:p>
           <a:p>
@@ -15988,7 +20433,27 @@
               </a:defRPr>
             </a:pPr>
             <a:r>
-              <a:t>Checkov / Trivy IaC and Kubernetes posture checks</a:t>
+              <a:t>Gitleaks and TruffleHog secret detection, values redacted</a:t>
+            </a:r>
+          </a:p>
+          <a:p>
+            <a:pPr marL="182880" indent="-164592">
+              <a:lnSpc>
+                <a:spcPts val="2200"/>
+              </a:lnSpc>
+              <a:spcAft>
+                <a:spcPts val="800"/>
+              </a:spcAft>
+              <a:buChar char="•"/>
+              <a:defRPr sz="1700">
+                <a:solidFill>
+                  <a:srgbClr val="334155"/>
+                </a:solidFill>
+                <a:latin typeface="DejaVu Sans"/>
+              </a:defRPr>
+            </a:pPr>
+            <a:r>
+              <a:t>Checkov and Trivy infrastructure-as-code checks</a:t>
             </a:r>
           </a:p>
         </p:txBody>
@@ -16113,7 +20578,7 @@
               </a:defRPr>
             </a:pPr>
             <a:r>
-              <a:t>Applications and APIs</a:t>
+              <a:t>Build and artifact evidence</a:t>
             </a:r>
           </a:p>
         </p:txBody>
@@ -16156,7 +20621,7 @@
               </a:defRPr>
             </a:pPr>
             <a:r>
-              <a:t>Nuclei and OWASP ZAP assessment collectors</a:t>
+              <a:t>Syft software bill of materials</a:t>
             </a:r>
           </a:p>
           <a:p>
@@ -16176,7 +20641,7 @@
               </a:defRPr>
             </a:pPr>
             <a:r>
-              <a:t>Target allowlists and active-scan configuration gates</a:t>
+              <a:t>Cosign signature and SLSA attestation checks</a:t>
             </a:r>
           </a:p>
           <a:p>
@@ -16196,7 +20661,27 @@
               </a:defRPr>
             </a:pPr>
             <a:r>
-              <a:t>External discovery with Subfinder and httpx</a:t>
+              <a:t>VEX statements applied as documented downgrades</a:t>
+            </a:r>
+          </a:p>
+          <a:p>
+            <a:pPr marL="182880" indent="-164592">
+              <a:lnSpc>
+                <a:spcPts val="2200"/>
+              </a:lnSpc>
+              <a:spcAft>
+                <a:spcPts val="800"/>
+              </a:spcAft>
+              <a:buChar char="•"/>
+              <a:defRPr sz="1700">
+                <a:solidFill>
+                  <a:srgbClr val="334155"/>
+                </a:solidFill>
+                <a:latin typeface="DejaVu Sans"/>
+              </a:defRPr>
+            </a:pPr>
+            <a:r>
+              <a:t>Air-gap verification with a pinned public key</a:t>
             </a:r>
           </a:p>
         </p:txBody>
@@ -16235,7 +20720,7 @@
               </a:defRPr>
             </a:pPr>
             <a:r>
-              <a:t>Assessment scans complement host monitoring and inline WAF enforcement.</a:t>
+              <a:t>Coverage depends on configured targets, installed tools and available advisory data.</a:t>
             </a:r>
           </a:p>
         </p:txBody>
@@ -16313,7 +20798,7 @@
               </a:defRPr>
             </a:pPr>
             <a:r>
-              <a:t>05 / 19</a:t>
+              <a:t>05 / 24</a:t>
             </a:r>
           </a:p>
         </p:txBody>
@@ -16413,7 +20898,7 @@
               </a:defRPr>
             </a:pPr>
             <a:r>
-              <a:t>SSO TOKEN VERIFICATION + RBAC</a:t>
+              <a:t>EXPOSURE MANAGEMENT</a:t>
             </a:r>
           </a:p>
         </p:txBody>
@@ -16452,7 +20937,7 @@
               </a:defRPr>
             </a:pPr>
             <a:r>
-              <a:t>Verified identity and access</a:t>
+              <a:t>Infrastructure and API assessment</a:t>
             </a:r>
           </a:p>
         </p:txBody>
@@ -16494,7 +20979,7 @@
               </a:defRPr>
             </a:pPr>
             <a:r>
-              <a:t>Security operations involve sensitive evidence and actions that can interrupt services. Verified identity and explicit permissions establish who may view information or approve changes, while tenant boundaries limit assessment access to the organisation identified by trusted tokens.</a:t>
+              <a:t>Exposed services, weak configurations and application interfaces can create paths into an organisation. Assessment collectors identify these conditions across selected targets, giving teams evidence to prioritise fixes and confirm which systems need closer investigation.</a:t>
             </a:r>
           </a:p>
         </p:txBody>
@@ -16619,7 +21104,7 @@
               </a:defRPr>
             </a:pPr>
             <a:r>
-              <a:t>Authentication and roles</a:t>
+              <a:t>Infrastructure</a:t>
             </a:r>
           </a:p>
         </p:txBody>
@@ -16662,7 +21147,7 @@
               </a:defRPr>
             </a:pPr>
             <a:r>
-              <a:t>Verify token signature, issuer, audience and expiry</a:t>
+              <a:t>Passive nmap service discovery, aggressive modes refused</a:t>
             </a:r>
           </a:p>
           <a:p>
@@ -16682,7 +21167,7 @@
               </a:defRPr>
             </a:pPr>
             <a:r>
-              <a:t>Require signed tenant and explicit role claims</a:t>
+              <a:t>testssl.sh TLS hygiene checks</a:t>
             </a:r>
           </a:p>
           <a:p>
@@ -16702,7 +21187,7 @@
               </a:defRPr>
             </a:pPr>
             <a:r>
-              <a:t>Separate viewer, auditor, analyst and admin rights</a:t>
+              <a:t>Kubescape cluster posture and runtime image scans</a:t>
             </a:r>
           </a:p>
           <a:p>
@@ -16722,7 +21207,7 @@
               </a:defRPr>
             </a:pPr>
             <a:r>
-              <a:t>Sign-in and MFA follow identity-provider policy</a:t>
+              <a:t>Dockle container hardening checks</a:t>
             </a:r>
           </a:p>
         </p:txBody>
@@ -16847,7 +21332,7 @@
               </a:defRPr>
             </a:pPr>
             <a:r>
-              <a:t>Tenant and approval boundaries</a:t>
+              <a:t>Applications and APIs</a:t>
             </a:r>
           </a:p>
         </p:txBody>
@@ -16890,7 +21375,7 @@
               </a:defRPr>
             </a:pPr>
             <a:r>
-              <a:t>Bind assessment transactions to signed tenant ID</a:t>
+              <a:t>Nuclei and OWASP ZAP assessment collectors</a:t>
             </a:r>
           </a:p>
           <a:p>
@@ -16910,7 +21395,7 @@
               </a:defRPr>
             </a:pPr>
             <a:r>
-              <a:t>Enforce PostgreSQL row-level security policies</a:t>
+              <a:t>Dynamic testing off by default, three independent gates</a:t>
             </a:r>
           </a:p>
           <a:p>
@@ -16930,7 +21415,7 @@
               </a:defRPr>
             </a:pPr>
             <a:r>
-              <a:t>Bind protection access to one organisation</a:t>
+              <a:t>External discovery with Subfinder and httpx</a:t>
             </a:r>
           </a:p>
           <a:p>
@@ -16950,7 +21435,7 @@
               </a:defRPr>
             </a:pPr>
             <a:r>
-              <a:t>Require a different admin to approve playbooks</a:t>
+              <a:t>Enumerated hosts filtered to authorised domains</a:t>
             </a:r>
           </a:p>
         </p:txBody>
@@ -16989,7 +21474,7 @@
               </a:defRPr>
             </a:pPr>
             <a:r>
-              <a:t>JWT verification and RLS controls are implemented; live IdP integration and database-role enforcement need staging.</a:t>
+              <a:t>Assessment scans complement host monitoring and inline WAF enforcement.</a:t>
             </a:r>
           </a:p>
         </p:txBody>
@@ -17067,7 +21552,7 @@
               </a:defRPr>
             </a:pPr>
             <a:r>
-              <a:t>06 / 19</a:t>
+              <a:t>06 / 24</a:t>
             </a:r>
           </a:p>
         </p:txBody>
@@ -17167,7 +21652,7 @@
               </a:defRPr>
             </a:pPr>
             <a:r>
-              <a:t>ALERTS + FINDINGS + AGENTS</a:t>
+              <a:t>AZURE + AWS + GCP</a:t>
             </a:r>
           </a:p>
         </p:txBody>
@@ -17206,7 +21691,7 @@
               </a:defRPr>
             </a:pPr>
             <a:r>
-              <a:t>Unified operations console</a:t>
+              <a:t>Cloud posture and discovery</a:t>
             </a:r>
           </a:p>
         </p:txBody>
@@ -17248,7 +21733,7 @@
               </a:defRPr>
             </a:pPr>
             <a:r>
-              <a:t>An analyst investigating an alert needs to understand the affected host, its known weaknesses and any response already underway. The console brings that context together, helping teams coordinate investigation while making unavailable information visible.</a:t>
+              <a:t>Cloud estates change daily. Discovery keeps the asset inventory current across Azure, AWS and GCP, and posture benchmarks run under credentials that an administrator has explicitly bound to the tenant, so a scan can never reach further than the account it was approved for.</a:t>
             </a:r>
           </a:p>
         </p:txBody>
@@ -17373,7 +21858,7 @@
               </a:defRPr>
             </a:pPr>
             <a:r>
-              <a:t>Shared investigation view</a:t>
+              <a:t>Posture and inventory</a:t>
             </a:r>
           </a:p>
         </p:txBody>
@@ -17416,7 +21901,7 @@
               </a:defRPr>
             </a:pPr>
             <a:r>
-              <a:t>View intrusion alerts and vulnerability findings</a:t>
+              <a:t>Prowler Azure, AWS and GCP configuration benchmarks</a:t>
             </a:r>
           </a:p>
           <a:p>
@@ -17436,7 +21921,7 @@
               </a:defRPr>
             </a:pPr>
             <a:r>
-              <a:t>Inspect agent health, sensor status and version drift</a:t>
+              <a:t>Azure Resource Graph, AWS and gcloud asset discovery</a:t>
             </a:r>
           </a:p>
           <a:p>
@@ -17456,7 +21941,7 @@
               </a:defRPr>
             </a:pPr>
             <a:r>
-              <a:t>Create and assign incidents from selected alerts</a:t>
+              <a:t>Kubernetes context enumeration and domain discovery</a:t>
             </a:r>
           </a:p>
           <a:p>
@@ -17476,7 +21961,7 @@
               </a:defRPr>
             </a:pPr>
             <a:r>
-              <a:t>Review response plans before approval</a:t>
+              <a:t>Nightly scheduled discovery per tenant</a:t>
             </a:r>
           </a:p>
         </p:txBody>
@@ -17601,7 +22086,7 @@
               </a:defRPr>
             </a:pPr>
             <a:r>
-              <a:t>Operational safeguards</a:t>
+              <a:t>Credential discipline</a:t>
             </a:r>
           </a:p>
         </p:txBody>
@@ -17644,7 +22129,7 @@
               </a:defRPr>
             </a:pPr>
             <a:r>
-              <a:t>Apply the same API role checks to console actions</a:t>
+              <a:t>Each cloud account bound to one tenant by an admin</a:t>
             </a:r>
           </a:p>
           <a:p>
@@ -17664,7 +22149,7 @@
               </a:defRPr>
             </a:pPr>
             <a:r>
-              <a:t>Keep access tokens in browser-tab memory</a:t>
+              <a:t>Bindings hold references only; secrets are rejected</a:t>
             </a:r>
           </a:p>
           <a:p>
@@ -17684,7 +22169,7 @@
               </a:defRPr>
             </a:pPr>
             <a:r>
-              <a:t>Report unavailable upstream sources explicitly</a:t>
+              <a:t>Collectors run under the bound account, ambient keys stripped</a:t>
             </a:r>
           </a:p>
           <a:p>
@@ -17704,7 +22189,7 @@
               </a:defRPr>
             </a:pPr>
             <a:r>
-              <a:t>Retrieve findings through a fixed HTTPS connector</a:t>
+              <a:t>Unbound accounts fail closed, never widen scope</a:t>
             </a:r>
           </a:p>
         </p:txBody>
@@ -17743,7 +22228,7 @@
               </a:defRPr>
             </a:pPr>
             <a:r>
-              <a:t>The console shows bounded recent lists; it is not an exhaustive cross-platform evidence search.</a:t>
+              <a:t>Read-only cloud roles are expected; VulnSuite never requests write permissions in the target accounts.</a:t>
             </a:r>
           </a:p>
         </p:txBody>
@@ -17821,7 +22306,7 @@
               </a:defRPr>
             </a:pPr>
             <a:r>
-              <a:t>07 / 19</a:t>
+              <a:t>07 / 24</a:t>
             </a:r>
           </a:p>
         </p:txBody>
@@ -17921,7 +22406,7 @@
               </a:defRPr>
             </a:pPr>
             <a:r>
-              <a:t>WINDOWS EVENTS + LINUX AUDIT</a:t>
+              <a:t>OWN-ASSETS ONLY</a:t>
             </a:r>
           </a:p>
         </p:txBody>
@@ -17960,7 +22445,7 @@
               </a:defRPr>
             </a:pPr>
             <a:r>
-              <a:t>Windows and Linux monitoring</a:t>
+              <a:t>Scan authorisation and target safety</a:t>
             </a:r>
           </a:p>
         </p:txBody>
@@ -18002,7 +22487,7 @@
               </a:defRPr>
             </a:pPr>
             <a:r>
-              <a:t>Server monitoring depends on collecting useful activity from the operating system and making gaps visible. Windows event sources and Linux audit records provide investigation evidence, while sensor health indicators help teams distinguish quiet systems from missing telemetry.</a:t>
+              <a:t>A scanning platform is itself a risk if it can be pointed at systems the organisation does not own. VulnSuite scans private networks freely but requires an administrator to attest ownership of public domains and ranges, and validates every target before it reaches a scanner.</a:t>
             </a:r>
           </a:p>
         </p:txBody>
@@ -18127,7 +22612,7 @@
               </a:defRPr>
             </a:pPr>
             <a:r>
-              <a:t>Windows monitoring</a:t>
+              <a:t>Who may scan what</a:t>
             </a:r>
           </a:p>
         </p:txBody>
@@ -18170,7 +22655,7 @@
               </a:defRPr>
             </a:pPr>
             <a:r>
-              <a:t>Security log authentication and network logons</a:t>
+              <a:t>Private address space scannable by definition</a:t>
             </a:r>
           </a:p>
           <a:p>
@@ -18190,7 +22675,7 @@
               </a:defRPr>
             </a:pPr>
             <a:r>
-              <a:t>RDP and SMB evidence where source events support it</a:t>
+              <a:t>Public hosts need an admin-approved domain or network scope</a:t>
             </a:r>
           </a:p>
           <a:p>
@@ -18210,7 +22695,7 @@
               </a:defRPr>
             </a:pPr>
             <a:r>
-              <a:t>Sysmon process-creation records</a:t>
+              <a:t>Hostnames resolved before the check, no literal-only bypass</a:t>
             </a:r>
           </a:p>
           <a:p>
@@ -18230,7 +22715,7 @@
               </a:defRPr>
             </a:pPr>
             <a:r>
-              <a:t>Selected fields without raw command-line capture</a:t>
+              <a:t>Rules enforced in the API and again in the worker</a:t>
             </a:r>
           </a:p>
         </p:txBody>
@@ -18355,7 +22840,7 @@
               </a:defRPr>
             </a:pPr>
             <a:r>
-              <a:t>Linux monitoring</a:t>
+              <a:t>Safe inputs</a:t>
             </a:r>
           </a:p>
         </p:txBody>
@@ -18398,7 +22883,7 @@
               </a:defRPr>
             </a:pPr>
             <a:r>
-              <a:t>Event-driven audit execution records</a:t>
+              <a:t>Every target field validated for format and shell safety</a:t>
             </a:r>
           </a:p>
           <a:p>
@@ -18418,7 +22903,7 @@
               </a:defRPr>
             </a:pPr>
             <a:r>
-              <a:t>Linux /proc process polling</a:t>
+              <a:t>Repository paths confined to a workspace root</a:t>
             </a:r>
           </a:p>
           <a:p>
@@ -18438,7 +22923,7 @@
               </a:defRPr>
             </a:pPr>
             <a:r>
-              <a:t>SSH access, API denials and file-integrity signals</a:t>
+              <a:t>Scanner binaries receive targets after an explicit separator</a:t>
             </a:r>
           </a:p>
           <a:p>
@@ -18458,7 +22943,7 @@
               </a:defRPr>
             </a:pPr>
             <a:r>
-              <a:t>Sensor health and missing-telemetry indicators</a:t>
+              <a:t>Rejected requests recorded as denied in the audit trail</a:t>
             </a:r>
           </a:p>
         </p:txBody>
@@ -18497,7 +22982,7 @@
               </a:defRPr>
             </a:pPr>
             <a:r>
-              <a:t>Windows and Linux support monitoring and approved containment. Native enforcement and recovery require staging validation.</a:t>
+              <a:t>A bypassed API check is still caught at worker time; defence in depth is deliberate.</a:t>
             </a:r>
           </a:p>
         </p:txBody>
@@ -18575,7 +23060,7 @@
               </a:defRPr>
             </a:pPr>
             <a:r>
-              <a:t>08 / 19</a:t>
+              <a:t>08 / 24</a:t>
             </a:r>
           </a:p>
         </p:txBody>
@@ -18675,7 +23160,7 @@
               </a:defRPr>
             </a:pPr>
             <a:r>
-              <a:t>SELECTED HOST SIGNALS</a:t>
+              <a:t>SSO TOKEN VERIFICATION + ROW-LEVEL SECURITY</a:t>
             </a:r>
           </a:p>
         </p:txBody>
@@ -18714,7 +23199,7 @@
               </a:defRPr>
             </a:pPr>
             <a:r>
-              <a:t>Process and malware detection</a:t>
+              <a:t>Verified identity and tenant isolation</a:t>
             </a:r>
           </a:p>
         </p:txBody>
@@ -18756,7 +23241,7 @@
               </a:defRPr>
             </a:pPr>
             <a:r>
-              <a:t>Selected process patterns and reviewed malware indicators provide clues that warrant investigation. A known-bad hash match supplies specific file evidence; analysts can review its context before approving action, while missing scanners or telemetry remain visible as coverage limitations.</a:t>
+              <a:t>Security operations involve sensitive evidence and actions that can interrupt services. Verified identity and explicit permissions establish who may act, while PostgreSQL enforces tenant boundaries itself, so an application bug cannot expose another organisation’s data.</a:t>
             </a:r>
           </a:p>
         </p:txBody>
@@ -18881,7 +23366,7 @@
               </a:defRPr>
             </a:pPr>
             <a:r>
-              <a:t>Suspicious activity</a:t>
+              <a:t>Authentication and roles</a:t>
             </a:r>
           </a:p>
         </p:txBody>
@@ -18924,7 +23409,7 @@
               </a:defRPr>
             </a:pPr>
             <a:r>
-              <a:t>Recognised web-server parent spawning a shell</a:t>
+              <a:t>Verify token signature, issuer, audience and expiry</a:t>
             </a:r>
           </a:p>
           <a:p>
@@ -18944,7 +23429,7 @@
               </a:defRPr>
             </a:pPr>
             <a:r>
-              <a:t>Execution from writable temporary locations</a:t>
+              <a:t>Require signed tenant and explicit role claims</a:t>
             </a:r>
           </a:p>
           <a:p>
@@ -18964,7 +23449,7 @@
               </a:defRPr>
             </a:pPr>
             <a:r>
-              <a:t>Deleted executable signals on Linux</a:t>
+              <a:t>Admin, analyst, auditor and viewer rights</a:t>
             </a:r>
           </a:p>
           <a:p>
@@ -18984,7 +23469,7 @@
               </a:defRPr>
             </a:pPr>
             <a:r>
-              <a:t>Event records for short-lived processes</a:t>
+              <a:t>Sign-in and MFA follow identity-provider policy</a:t>
             </a:r>
           </a:p>
         </p:txBody>
@@ -19109,7 +23594,7 @@
               </a:defRPr>
             </a:pPr>
             <a:r>
-              <a:t>Malware evidence</a:t>
+              <a:t>Database boundaries</a:t>
             </a:r>
           </a:p>
         </p:txBody>
@@ -19152,7 +23637,7 @@
               </a:defRPr>
             </a:pPr>
             <a:r>
-              <a:t>Known-bad SHA256 matches on selected targets</a:t>
+              <a:t>Forced row-level security on all five tenant tables</a:t>
             </a:r>
           </a:p>
           <a:p>
@@ -19172,7 +23657,7 @@
               </a:defRPr>
             </a:pPr>
             <a:r>
-              <a:t>Optional Linux selected-file ClamAV scans</a:t>
+              <a:t>Tenant bound to every transaction from the token</a:t>
             </a:r>
           </a:p>
           <a:p>
@@ -19192,7 +23677,7 @@
               </a:defRPr>
             </a:pPr>
             <a:r>
-              <a:t>Path, signature and hash retained for review</a:t>
+              <a:t>Schema owner separated from the runtime database role</a:t>
             </a:r>
           </a:p>
           <a:p>
@@ -19212,7 +23697,7 @@
               </a:defRPr>
             </a:pPr>
             <a:r>
-              <a:t>Unavailable scanners surface degraded coverage</a:t>
+              <a:t>Runtime role cannot alter policies or audit rows</a:t>
             </a:r>
           </a:p>
         </p:txBody>
@@ -19251,7 +23736,7 @@
               </a:defRPr>
             </a:pPr>
             <a:r>
-              <a:t>Coverage excludes complete memory scanning and full-disk protection. File quarantine does not terminate a running process.</a:t>
+              <a:t>JWT verification and RLS controls are implemented; live IdP integration and database-role enforcement need staging.</a:t>
             </a:r>
           </a:p>
         </p:txBody>
@@ -19329,7 +23814,7 @@
               </a:defRPr>
             </a:pPr>
             <a:r>
-              <a:t>09 / 19</a:t>
+              <a:t>09 / 24</a:t>
             </a:r>
           </a:p>
         </p:txBody>

--- a/VulnSuite_Executive_Deck_FINAL.pptx
+++ b/VulnSuite_Executive_Deck_FINAL.pptx
@@ -29,6 +29,7 @@
     <p:sldId id="277" r:id="rId29"/>
     <p:sldId id="278" r:id="rId30"/>
     <p:sldId id="279" r:id="rId31"/>
+    <p:sldId id="280" r:id="rId32"/>
   </p:sldIdLst>
   <p:sldSz cx="12191695" cy="6858000" type="screen4x3"/>
   <p:notesSz cx="6858000" cy="9144000"/>
@@ -1190,12 +1191,12 @@
           <a:lstStyle/>
           <a:p>
             <a:r>
-              <a:t>Containment can interrupt business services, so response decisions need clear evidence and accountability. VulnSuite places supported file quarantine and host isolation behind separate approval and local policy checks, with recorded outcomes and reviewed recovery paths.</a:t>
-            </a:r>
-          </a:p>
-          <a:p>
-            <a:r>
-              <a:t>Scope: Containment is disabled by default. Windows expiry uses local recovery tasks; Linux uses kernel timeouts.</a:t>
+              <a:t>Containment can interrupt business services, so response decisions need clear evidence and accountability. VulnSuite places file quarantine, process termination, host isolation, identity and WAF response behind separate approval and local policy checks, with recorded outcomes and reviewed recovery paths.</a:t>
+            </a:r>
+          </a:p>
+          <a:p>
+            <a:r>
+              <a:t>Scope: Containment is disabled by default. Every action needs a second administrator; pre-approved isolation exists only for ransomware with dual opt-in.</a:t>
             </a:r>
           </a:p>
           <a:p>
@@ -1285,12 +1286,12 @@
           <a:lstStyle/>
           <a:p>
             <a:r>
-              <a:t>The assessment service evaluates exposure; the protection service handles telemetry, investigations and response. Their separate responsibilities help teams plan access, storage, maintenance and integration around the requirements of each service.</a:t>
-            </a:r>
-          </a:p>
-          <a:p>
-            <a:r>
-              <a:t>Scope: SQLite protection persistence is not a horizontally scalable or highly available PostgreSQL backend.</a:t>
+              <a:t>Attackers encrypt data and erase their tracks. Decoy files, change-rate and entropy signals give the SOC minutes of warning on a share, while tamper signals, sequence numbers and a hash chain show when logs or stored evidence were altered, by which process and when.</a:t>
+            </a:r>
+          </a:p>
+          <a:p>
+            <a:r>
+              <a:t>Scope: Encryption is detected at the next poll, not prevented; backups decide the outcome. The chain proves alteration, the off-host copy is the protection.</a:t>
             </a:r>
           </a:p>
           <a:p>
@@ -1380,12 +1381,12 @@
           <a:lstStyle/>
           <a:p>
             <a:r>
-              <a:t>Host monitoring depends on knowing which agents are enrolled, authorised and reporting correctly. Central lifecycle controls help maintain that inventory, replace credentials, withdraw access and identify policy or version differences that require administrator attention.</a:t>
-            </a:r>
-          </a:p>
-          <a:p>
-            <a:r>
-              <a:t>Scope: Agent software installation and upgrades use an administrator-controlled rollout.</a:t>
+              <a:t>The assessment service evaluates exposure; the protection service handles telemetry, investigations and response. Their separate responsibilities help teams plan access, storage, maintenance and integration around the requirements of each service.</a:t>
+            </a:r>
+          </a:p>
+          <a:p>
+            <a:r>
+              <a:t>Scope: SQLite protection persistence is not a horizontally scalable or highly available PostgreSQL backend.</a:t>
             </a:r>
           </a:p>
           <a:p>
@@ -1475,12 +1476,12 @@
           <a:lstStyle/>
           <a:p>
             <a:r>
-              <a:t>Investigations often involve several people and external operational systems. Incident records preserve ownership and decisions, while signed notifications carry relevant information to organisation-operated integrations, helping teams coordinate work and recover delivery after temporary service failures.</a:t>
-            </a:r>
-          </a:p>
-          <a:p>
-            <a:r>
-              <a:t>Scope: Webhooks support organisation-operated adapters; native Jira, ServiceNow or Splunk connectors are not implied.</a:t>
+              <a:t>Host monitoring depends on knowing which agents are enrolled, authorised and reporting correctly. Central lifecycle controls help maintain that inventory, replace credentials, withdraw access and identify policy or version differences that require administrator attention.</a:t>
+            </a:r>
+          </a:p>
+          <a:p>
+            <a:r>
+              <a:t>Scope: Agent software installation and upgrades use an administrator-controlled rollout.</a:t>
             </a:r>
           </a:p>
           <a:p>
@@ -1665,12 +1666,12 @@
           <a:lstStyle/>
           <a:p>
             <a:r>
-              <a:t>Network interruptions and growing evidence volumes can affect security operations. Persistent queues and acknowledgement checks support recovery after outages, while backup and retention controls help teams manage stored evidence according to investigation needs and operational requirements.</a:t>
-            </a:r>
-          </a:p>
-          <a:p>
-            <a:r>
-              <a:t>Scope: Schedule maintenance explicitly and measure capacity, recovery objectives and backup security in the target environment.</a:t>
+              <a:t>Investigations often involve several people and external operational systems. Incident records preserve ownership and decisions, while signed notifications carry relevant information to organisation-operated integrations, helping teams coordinate work and recover delivery after temporary service failures.</a:t>
+            </a:r>
+          </a:p>
+          <a:p>
+            <a:r>
+              <a:t>Scope: Webhooks support organisation-operated adapters; native Jira, ServiceNow or Splunk connectors are not implied.</a:t>
             </a:r>
           </a:p>
           <a:p>
@@ -1760,12 +1761,12 @@
           <a:lstStyle/>
           <a:p>
             <a:r>
-              <a:t>A security tool that downloads twenty scanners is a supply-chain target. Every binary in the image is pinned to a known checksum and verified at build time, the containers run unprivileged, and the whole stack can operate without internet access using locally mirrored vulnerability data.</a:t>
-            </a:r>
-          </a:p>
-          <a:p>
-            <a:r>
-              <a:t>Scope: Tests fail the build if any download lacks a pin or the runtime user is removed.</a:t>
+              <a:t>Network interruptions and growing evidence volumes can affect security operations. Persistent queues and acknowledgement checks support recovery after outages, while backup and retention controls help teams manage stored evidence according to investigation needs and operational requirements.</a:t>
+            </a:r>
+          </a:p>
+          <a:p>
+            <a:r>
+              <a:t>Scope: Schedule maintenance explicitly and measure capacity, recovery objectives and backup security in the target environment.</a:t>
             </a:r>
           </a:p>
           <a:p>
@@ -1855,12 +1856,12 @@
           <a:lstStyle/>
           <a:p>
             <a:r>
-              <a:t>The validation results demonstrate exercised code paths and selected native file behaviours. They provide evidence for technical review, while full containment effectiveness, host compatibility and operational performance require testing in the intended environment.</a:t>
-            </a:r>
-          </a:p>
-          <a:p>
-            <a:r>
-              <a:t>Scope: Automated tests and narrow native file checks do not establish live containment efficacy or production readiness.</a:t>
+              <a:t>A security tool that downloads twenty scanners is a supply-chain target. Every binary in the image is pinned to a known checksum and verified at build time, the containers run unprivileged, and the whole stack can operate without internet access using locally mirrored vulnerability data.</a:t>
+            </a:r>
+          </a:p>
+          <a:p>
+            <a:r>
+              <a:t>Scope: Tests fail the build if any download lacks a pin or the runtime user is removed.</a:t>
             </a:r>
           </a:p>
           <a:p>
@@ -1950,12 +1951,12 @@
           <a:lstStyle/>
           <a:p>
             <a:r>
-              <a:t>Deployment conditions determine whether security controls work as intended. Staging should verify identity, database roles, telemetry, permissions, enforcement and recovery together, including how containment behaves during service interruptions and host restarts.</a:t>
-            </a:r>
-          </a:p>
-          <a:p>
-            <a:r>
-              <a:t>Scope: Validate native Windows ACLs, firewall enforcement, scheduled-task expiry and reboot recovery before enabling containment.</a:t>
+              <a:t>The validation results demonstrate exercised code paths and selected native file behaviours. They provide evidence for technical review, while full containment effectiveness, host compatibility and operational performance require testing in the intended environment.</a:t>
+            </a:r>
+          </a:p>
+          <a:p>
+            <a:r>
+              <a:t>Scope: Automated tests and narrow native file checks do not establish live containment efficacy or production readiness.</a:t>
             </a:r>
           </a:p>
           <a:p>
@@ -2001,6 +2002,101 @@
 </file>
 
 <file path=ppt/notesSlides/notesSlide24.xml><?xml version="1.0" encoding="utf-8"?>
+<p:notes xmlns:a="http://schemas.openxmlformats.org/drawingml/2006/main" xmlns:p="http://schemas.openxmlformats.org/presentationml/2006/main" xmlns:r="http://schemas.openxmlformats.org/officeDocument/2006/relationships">
+  <p:cSld>
+    <p:spTree>
+      <p:nvGrpSpPr>
+        <p:cNvPr id="1" name=""/>
+        <p:cNvGrpSpPr/>
+        <p:nvPr/>
+      </p:nvGrpSpPr>
+      <p:grpSpPr>
+        <a:xfrm>
+          <a:off x="0" y="0"/>
+          <a:ext cx="0" cy="0"/>
+          <a:chOff x="0" y="0"/>
+          <a:chExt cx="0" cy="0"/>
+        </a:xfrm>
+      </p:grpSpPr>
+      <p:sp>
+        <p:nvSpPr>
+          <p:cNvPr id="2" name="Slide Image Placeholder 1"/>
+          <p:cNvSpPr>
+            <a:spLocks noGrp="1"/>
+          </p:cNvSpPr>
+          <p:nvPr>
+            <p:ph type="sldImg" idx="2"/>
+          </p:nvPr>
+        </p:nvSpPr>
+        <p:spPr/>
+      </p:sp>
+      <p:sp>
+        <p:nvSpPr>
+          <p:cNvPr id="3" name="Notes Placeholder 2"/>
+          <p:cNvSpPr>
+            <a:spLocks noGrp="1"/>
+          </p:cNvSpPr>
+          <p:nvPr>
+            <p:ph type="body" idx="3" sz="quarter"/>
+          </p:nvPr>
+        </p:nvSpPr>
+        <p:spPr/>
+        <p:txBody>
+          <a:bodyPr/>
+          <a:lstStyle/>
+          <a:p>
+            <a:r>
+              <a:t>Deployment conditions determine whether security controls work as intended. Staging should verify identity, database roles, telemetry, permissions, enforcement and recovery together, including how containment behaves during service interruptions and host restarts.</a:t>
+            </a:r>
+          </a:p>
+          <a:p>
+            <a:r>
+              <a:t>Scope: Validate native Windows ACLs, firewall enforcement, scheduled-task expiry and reboot recovery before enabling containment.</a:t>
+            </a:r>
+          </a:p>
+          <a:p>
+            <a:r>
+              <a:t>How to use: docs/HOW_TO_USE.md</a:t>
+            </a:r>
+          </a:p>
+          <a:p>
+            <a:r>
+              <a:t>Engineering reference: vulnsuite/CLAUDE.md</a:t>
+            </a:r>
+          </a:p>
+          <a:p>
+            <a:r>
+              <a:t>Protection operations: vulnsuite/protection/OPERATIONS.md and deploy/protection/OPERATIONS.md</a:t>
+            </a:r>
+          </a:p>
+          <a:p>
+            <a:r>
+              <a:t>Automated validation does not establish live enforcement or full EDR coverage.</a:t>
+            </a:r>
+          </a:p>
+        </p:txBody>
+      </p:sp>
+      <p:sp>
+        <p:nvSpPr>
+          <p:cNvPr id="4" name="Slide Number Placeholder 3"/>
+          <p:cNvSpPr>
+            <a:spLocks noGrp="1"/>
+          </p:cNvSpPr>
+          <p:nvPr>
+            <p:ph type="sldNum" idx="5" sz="quarter"/>
+          </p:nvPr>
+        </p:nvSpPr>
+        <p:spPr/>
+      </p:sp>
+    </p:spTree>
+  </p:cSld>
+  <p:clrMapOvr>
+    <a:masterClrMapping/>
+  </p:clrMapOvr>
+</p:notes>
+</file>
+
+<file path=ppt/notesSlides/notesSlide25.xml><?xml version="1.0" encoding="utf-8"?>
 <p:notes xmlns:a="http://schemas.openxmlformats.org/drawingml/2006/main" xmlns:p="http://schemas.openxmlformats.org/presentationml/2006/main" xmlns:r="http://schemas.openxmlformats.org/officeDocument/2006/relationships">
   <p:cSld>
     <p:spTree>
@@ -6472,7 +6568,7 @@
               </a:defRPr>
             </a:pPr>
             <a:r>
-              <a:t>01 / 24</a:t>
+              <a:t>01 / 25</a:t>
             </a:r>
           </a:p>
         </p:txBody>
@@ -7226,7 +7322,7 @@
               </a:defRPr>
             </a:pPr>
             <a:r>
-              <a:t>10 / 24</a:t>
+              <a:t>10 / 25</a:t>
             </a:r>
           </a:p>
         </p:txBody>
@@ -7980,7 +8076,7 @@
               </a:defRPr>
             </a:pPr>
             <a:r>
-              <a:t>11 / 24</a:t>
+              <a:t>11 / 25</a:t>
             </a:r>
           </a:p>
         </p:txBody>
@@ -8734,7 +8830,7 @@
               </a:defRPr>
             </a:pPr>
             <a:r>
-              <a:t>12 / 24</a:t>
+              <a:t>12 / 25</a:t>
             </a:r>
           </a:p>
         </p:txBody>
@@ -9488,7 +9584,7 @@
               </a:defRPr>
             </a:pPr>
             <a:r>
-              <a:t>13 / 24</a:t>
+              <a:t>13 / 25</a:t>
             </a:r>
           </a:p>
         </p:txBody>
@@ -10242,7 +10338,7 @@
               </a:defRPr>
             </a:pPr>
             <a:r>
-              <a:t>14 / 24</a:t>
+              <a:t>14 / 25</a:t>
             </a:r>
           </a:p>
         </p:txBody>
@@ -10996,7 +11092,7 @@
               </a:defRPr>
             </a:pPr>
             <a:r>
-              <a:t>15 / 24</a:t>
+              <a:t>15 / 25</a:t>
             </a:r>
           </a:p>
         </p:txBody>
@@ -11135,7 +11231,7 @@
               </a:defRPr>
             </a:pPr>
             <a:r>
-              <a:t>Reviewed local containment</a:t>
+              <a:t>Reviewed containment and response</a:t>
             </a:r>
           </a:p>
         </p:txBody>
@@ -11177,7 +11273,7 @@
               </a:defRPr>
             </a:pPr>
             <a:r>
-              <a:t>Containment can interrupt business services, so response decisions need clear evidence and accountability. VulnSuite places supported file quarantine and host isolation behind separate approval and local policy checks, with recorded outcomes and reviewed recovery paths.</a:t>
+              <a:t>Containment can interrupt business services, so response decisions need clear evidence and accountability. VulnSuite places file quarantine, process termination, host isolation, identity and WAF response behind separate approval and local policy checks, with recorded outcomes and reviewed recovery paths.</a:t>
             </a:r>
           </a:p>
         </p:txBody>
@@ -11302,7 +11398,7 @@
               </a:defRPr>
             </a:pPr>
             <a:r>
-              <a:t>Quarantine and restoration</a:t>
+              <a:t>On the host</a:t>
             </a:r>
           </a:p>
         </p:txBody>
@@ -11345,7 +11441,7 @@
               </a:defRPr>
             </a:pPr>
             <a:r>
-              <a:t>Use approved malware path and SHA256 evidence</a:t>
+              <a:t>Quarantine with approved path and SHA256 evidence</a:t>
             </a:r>
           </a:p>
           <a:p>
@@ -11365,7 +11461,7 @@
               </a:defRPr>
             </a:pPr>
             <a:r>
-              <a:t>Linux: private same-filesystem quarantine vault</a:t>
+              <a:t>Process termination after an identity re-check</a:t>
             </a:r>
           </a:p>
           <a:p>
@@ -11385,7 +11481,7 @@
               </a:defRPr>
             </a:pPr>
             <a:r>
-              <a:t>Windows: file-handle checks and protected ACLs</a:t>
+              <a:t>Isolation with kernel or scheduled-task expiry</a:t>
             </a:r>
           </a:p>
           <a:p>
@@ -11405,7 +11501,7 @@
               </a:defRPr>
             </a:pPr>
             <a:r>
-              <a:t>Restore without overwriting existing files</a:t>
+              <a:t>Restore and release as separately approved rollbacks</a:t>
             </a:r>
           </a:p>
         </p:txBody>
@@ -11530,7 +11626,7 @@
               </a:defRPr>
             </a:pPr>
             <a:r>
-              <a:t>Isolation and release</a:t>
+              <a:t>In the identity provider and WAF</a:t>
             </a:r>
           </a:p>
         </p:txBody>
@@ -11573,7 +11669,7 @@
               </a:defRPr>
             </a:pPr>
             <a:r>
-              <a:t>Require separate approval and local policy</a:t>
+              <a:t>Entra ID session revocation, one shot</a:t>
             </a:r>
           </a:p>
           <a:p>
@@ -11593,7 +11689,7 @@
               </a:defRPr>
             </a:pPr>
             <a:r>
-              <a:t>Linux: kernel-expiring nftables isolation</a:t>
+              <a:t>Entra ID account disable for a fixed window</a:t>
             </a:r>
           </a:p>
           <a:p>
@@ -11613,7 +11709,7 @@
               </a:defRPr>
             </a:pPr>
             <a:r>
-              <a:t>Windows: firewall rules with local recovery tasks</a:t>
+              <a:t>Cloudflare block with provider-evaluated expiry</a:t>
             </a:r>
           </a:p>
           <a:p>
@@ -11633,7 +11729,7 @@
               </a:defRPr>
             </a:pPr>
             <a:r>
-              <a:t>Keep configured management exceptions</a:t>
+              <a:t>Protected users, domains and executables enforced twice</a:t>
             </a:r>
           </a:p>
         </p:txBody>
@@ -11672,7 +11768,7 @@
               </a:defRPr>
             </a:pPr>
             <a:r>
-              <a:t>Containment is disabled by default. Windows expiry uses local recovery tasks; Linux uses kernel timeouts.</a:t>
+              <a:t>Containment is disabled by default. Every action needs a second administrator; pre-approved isolation exists only for ransomware with dual opt-in.</a:t>
             </a:r>
           </a:p>
         </p:txBody>
@@ -11750,7 +11846,7 @@
               </a:defRPr>
             </a:pPr>
             <a:r>
-              <a:t>16 / 24</a:t>
+              <a:t>16 / 25</a:t>
             </a:r>
           </a:p>
         </p:txBody>
@@ -11850,7 +11946,7 @@
               </a:defRPr>
             </a:pPr>
             <a:r>
-              <a:t>PLATFORM ARCHITECTURE</a:t>
+              <a:t>EARLY WARNING + EVIDENCE INTEGRITY</a:t>
             </a:r>
           </a:p>
         </p:txBody>
@@ -11889,7 +11985,7 @@
               </a:defRPr>
             </a:pPr>
             <a:r>
-              <a:t>How the components fit</a:t>
+              <a:t>Ransomware and log-tamper signals</a:t>
             </a:r>
           </a:p>
         </p:txBody>
@@ -11931,7 +12027,7 @@
               </a:defRPr>
             </a:pPr>
             <a:r>
-              <a:t>The assessment service evaluates exposure; the protection service handles telemetry, investigations and response. Their separate responsibilities help teams plan access, storage, maintenance and integration around the requirements of each service.</a:t>
+              <a:t>Attackers encrypt data and erase their tracks. Decoy files, change-rate and entropy signals give the SOC minutes of warning on a share, while tamper signals, sequence numbers and a hash chain show when logs or stored evidence were altered, by which process and when.</a:t>
             </a:r>
           </a:p>
         </p:txBody>
@@ -12056,7 +12152,7 @@
               </a:defRPr>
             </a:pPr>
             <a:r>
-              <a:t>Assessment service</a:t>
+              <a:t>Ransomware early warning</a:t>
             </a:r>
           </a:p>
         </p:txBody>
@@ -12099,7 +12195,7 @@
               </a:defRPr>
             </a:pPr>
             <a:r>
-              <a:t>FastAPI service, Celery workers and nightly scheduler</a:t>
+              <a:t>Canary documents nothing legitimate touches</a:t>
             </a:r>
           </a:p>
           <a:p>
@@ -12119,7 +12215,7 @@
               </a:defRPr>
             </a:pPr>
             <a:r>
-              <a:t>PostgreSQL with tenant policies, Redis broker and cache</a:t>
+              <a:t>Mass rename, rewrite and deletion thresholds</a:t>
             </a:r>
           </a:p>
           <a:p>
@@ -12139,7 +12235,7 @@
               </a:defRPr>
             </a:pPr>
             <a:r>
-              <a:t>Canonical findings, dedup and deterministic risk scoring</a:t>
+              <a:t>High-entropy rewrites sampled from changed files</a:t>
             </a:r>
           </a:p>
           <a:p>
@@ -12159,7 +12255,7 @@
               </a:defRPr>
             </a:pPr>
             <a:r>
-              <a:t>Read-only findings feed into the operations console</a:t>
+              <a:t>Critical alert; optional pre-approved isolation</a:t>
             </a:r>
           </a:p>
         </p:txBody>
@@ -12284,7 +12380,7 @@
               </a:defRPr>
             </a:pPr>
             <a:r>
-              <a:t>Protection service</a:t>
+              <a:t>Log and record integrity</a:t>
             </a:r>
           </a:p>
         </p:txBody>
@@ -12327,7 +12423,7 @@
               </a:defRPr>
             </a:pPr>
             <a:r>
-              <a:t>Authenticated Linux and Windows agents</a:t>
+              <a:t>Truncated, deleted or replaced log files reported</a:t>
             </a:r>
           </a:p>
           <a:p>
@@ -12347,7 +12443,7 @@
               </a:defRPr>
             </a:pPr>
             <a:r>
-              <a:t>One organisation per SQLite operational store</a:t>
+              <a:t>auditd watch records with executable, PID and uid</a:t>
             </a:r>
           </a:p>
           <a:p>
@@ -12367,7 +12463,7 @@
               </a:defRPr>
             </a:pPr>
             <a:r>
-              <a:t>Detection, incidents, policies and response history</a:t>
+              <a:t>Windows log cleared and audit policy changes</a:t>
             </a:r>
           </a:p>
           <a:p>
@@ -12387,7 +12483,7 @@
               </a:defRPr>
             </a:pPr>
             <a:r>
-              <a:t>Independent delivery and cloud-response worker</a:t>
+              <a:t>Sequence numbers and a hash chain with SIEM checkpoints</a:t>
             </a:r>
           </a:p>
         </p:txBody>
@@ -12426,7 +12522,7 @@
               </a:defRPr>
             </a:pPr>
             <a:r>
-              <a:t>SQLite protection persistence is not a horizontally scalable or highly available PostgreSQL backend.</a:t>
+              <a:t>Encryption is detected at the next poll, not prevented; backups decide the outcome. The chain proves alteration, the off-host copy is the protection.</a:t>
             </a:r>
           </a:p>
         </p:txBody>
@@ -12504,7 +12600,7 @@
               </a:defRPr>
             </a:pPr>
             <a:r>
-              <a:t>17 / 24</a:t>
+              <a:t>17 / 25</a:t>
             </a:r>
           </a:p>
         </p:txBody>
@@ -12604,7 +12700,7 @@
               </a:defRPr>
             </a:pPr>
             <a:r>
-              <a:t>ENROLLMENT + POLICY + HEALTH</a:t>
+              <a:t>PLATFORM ARCHITECTURE</a:t>
             </a:r>
           </a:p>
         </p:txBody>
@@ -12643,7 +12739,7 @@
               </a:defRPr>
             </a:pPr>
             <a:r>
-              <a:t>Central agent lifecycle</a:t>
+              <a:t>How the components fit</a:t>
             </a:r>
           </a:p>
         </p:txBody>
@@ -12685,7 +12781,7 @@
               </a:defRPr>
             </a:pPr>
             <a:r>
-              <a:t>Host monitoring depends on knowing which agents are enrolled, authorised and reporting correctly. Central lifecycle controls help maintain that inventory, replace credentials, withdraw access and identify policy or version differences that require administrator attention.</a:t>
+              <a:t>The assessment service evaluates exposure; the protection service handles telemetry, investigations and response. Their separate responsibilities help teams plan access, storage, maintenance and integration around the requirements of each service.</a:t>
             </a:r>
           </a:p>
         </p:txBody>
@@ -12810,7 +12906,7 @@
               </a:defRPr>
             </a:pPr>
             <a:r>
-              <a:t>Credential management</a:t>
+              <a:t>Assessment service</a:t>
             </a:r>
           </a:p>
         </p:txBody>
@@ -12853,7 +12949,7 @@
               </a:defRPr>
             </a:pPr>
             <a:r>
-              <a:t>Issue expiring, one-time enrollment credentials</a:t>
+              <a:t>FastAPI service, Celery workers and nightly scheduler</a:t>
             </a:r>
           </a:p>
           <a:p>
@@ -12873,7 +12969,7 @@
               </a:defRPr>
             </a:pPr>
             <a:r>
-              <a:t>Store hashes of enrolled host credentials</a:t>
+              <a:t>PostgreSQL with tenant policies, Redis broker and cache</a:t>
             </a:r>
           </a:p>
           <a:p>
@@ -12893,7 +12989,7 @@
               </a:defRPr>
             </a:pPr>
             <a:r>
-              <a:t>Rotate keys and revoke agent access centrally</a:t>
+              <a:t>Canonical findings, dedup and deterministic risk scoring</a:t>
             </a:r>
           </a:p>
           <a:p>
@@ -12913,7 +13009,7 @@
               </a:defRPr>
             </a:pPr>
             <a:r>
-              <a:t>Cancel unexecuted responses after revocation</a:t>
+              <a:t>Read-only findings feed into the operations console</a:t>
             </a:r>
           </a:p>
         </p:txBody>
@@ -13038,7 +13134,7 @@
               </a:defRPr>
             </a:pPr>
             <a:r>
-              <a:t>Inventory and policy</a:t>
+              <a:t>Protection service</a:t>
             </a:r>
           </a:p>
         </p:txBody>
@@ -13081,7 +13177,7 @@
               </a:defRPr>
             </a:pPr>
             <a:r>
-              <a:t>Track platform, agent version and queue health</a:t>
+              <a:t>Authenticated Linux and Windows agents</a:t>
             </a:r>
           </a:p>
           <a:p>
@@ -13101,7 +13197,7 @@
               </a:defRPr>
             </a:pPr>
             <a:r>
-              <a:t>Record administrator policy-version history</a:t>
+              <a:t>One organisation per SQLite operational store</a:t>
             </a:r>
           </a:p>
           <a:p>
@@ -13121,7 +13217,7 @@
               </a:defRPr>
             </a:pPr>
             <a:r>
-              <a:t>Flag drift from the desired software version</a:t>
+              <a:t>Detection, incidents, policies and response history</a:t>
             </a:r>
           </a:p>
           <a:p>
@@ -13141,7 +13237,7 @@
               </a:defRPr>
             </a:pPr>
             <a:r>
-              <a:t>Keep privileged response enablement local to hosts</a:t>
+              <a:t>Independent delivery and cloud-response worker</a:t>
             </a:r>
           </a:p>
         </p:txBody>
@@ -13180,7 +13276,7 @@
               </a:defRPr>
             </a:pPr>
             <a:r>
-              <a:t>Agent software installation and upgrades use an administrator-controlled rollout.</a:t>
+              <a:t>SQLite protection persistence is not a horizontally scalable or highly available PostgreSQL backend.</a:t>
             </a:r>
           </a:p>
         </p:txBody>
@@ -13258,7 +13354,7 @@
               </a:defRPr>
             </a:pPr>
             <a:r>
-              <a:t>18 / 24</a:t>
+              <a:t>18 / 25</a:t>
             </a:r>
           </a:p>
         </p:txBody>
@@ -13358,7 +13454,7 @@
               </a:defRPr>
             </a:pPr>
             <a:r>
-              <a:t>OWNERSHIP + EVIDENCE + DELIVERY</a:t>
+              <a:t>ENROLLMENT + POLICY + HEALTH</a:t>
             </a:r>
           </a:p>
         </p:txBody>
@@ -13397,7 +13493,7 @@
               </a:defRPr>
             </a:pPr>
             <a:r>
-              <a:t>Incident and notification workflows</a:t>
+              <a:t>Central agent lifecycle</a:t>
             </a:r>
           </a:p>
         </p:txBody>
@@ -13439,7 +13535,7 @@
               </a:defRPr>
             </a:pPr>
             <a:r>
-              <a:t>Investigations often involve several people and external operational systems. Incident records preserve ownership and decisions, while signed notifications carry relevant information to organisation-operated integrations, helping teams coordinate work and recover delivery after temporary service failures.</a:t>
+              <a:t>Host monitoring depends on knowing which agents are enrolled, authorised and reporting correctly. Central lifecycle controls help maintain that inventory, replace credentials, withdraw access and identify policy or version differences that require administrator attention.</a:t>
             </a:r>
           </a:p>
         </p:txBody>
@@ -13564,7 +13660,7 @@
               </a:defRPr>
             </a:pPr>
             <a:r>
-              <a:t>Investigation workflow</a:t>
+              <a:t>Credential management</a:t>
             </a:r>
           </a:p>
         </p:txBody>
@@ -13607,7 +13703,7 @@
               </a:defRPr>
             </a:pPr>
             <a:r>
-              <a:t>Link alerts to owned incident cases</a:t>
+              <a:t>Issue expiring, one-time enrollment credentials</a:t>
             </a:r>
           </a:p>
           <a:p>
@@ -13627,7 +13723,7 @@
               </a:defRPr>
             </a:pPr>
             <a:r>
-              <a:t>Track status, notes and evidence timelines</a:t>
+              <a:t>Store hashes of enrolled host credentials</a:t>
             </a:r>
           </a:p>
           <a:p>
@@ -13647,7 +13743,7 @@
               </a:defRPr>
             </a:pPr>
             <a:r>
-              <a:t>Protect concurrent edits with case versions</a:t>
+              <a:t>Rotate keys and revoke agent access centrally</a:t>
             </a:r>
           </a:p>
           <a:p>
@@ -13667,7 +13763,7 @@
               </a:defRPr>
             </a:pPr>
             <a:r>
-              <a:t>Review alerts and add scoped, expiring exceptions</a:t>
+              <a:t>Cancel unexecuted responses after revocation</a:t>
             </a:r>
           </a:p>
         </p:txBody>
@@ -13792,7 +13888,7 @@
               </a:defRPr>
             </a:pPr>
             <a:r>
-              <a:t>SIEM and ticketing bridges</a:t>
+              <a:t>Inventory and policy</a:t>
             </a:r>
           </a:p>
         </p:txBody>
@@ -13835,7 +13931,7 @@
               </a:defRPr>
             </a:pPr>
             <a:r>
-              <a:t>Send signed JSON to fixed HTTPS endpoints</a:t>
+              <a:t>Track platform, agent version and queue health</a:t>
             </a:r>
           </a:p>
           <a:p>
@@ -13855,7 +13951,7 @@
               </a:defRPr>
             </a:pPr>
             <a:r>
-              <a:t>Persist delivery state, leases and retry attempts</a:t>
+              <a:t>Record administrator policy-version history</a:t>
             </a:r>
           </a:p>
           <a:p>
@@ -13875,7 +13971,7 @@
               </a:defRPr>
             </a:pPr>
             <a:r>
-              <a:t>Attach stable keys for receiver deduplication</a:t>
+              <a:t>Flag drift from the desired software version</a:t>
             </a:r>
           </a:p>
           <a:p>
@@ -13895,7 +13991,7 @@
               </a:defRPr>
             </a:pPr>
             <a:r>
-              <a:t>Audit outcomes without storing upstream secrets</a:t>
+              <a:t>Keep privileged response enablement local to hosts</a:t>
             </a:r>
           </a:p>
         </p:txBody>
@@ -13934,7 +14030,7 @@
               </a:defRPr>
             </a:pPr>
             <a:r>
-              <a:t>Webhooks support organisation-operated adapters; native Jira, ServiceNow or Splunk connectors are not implied.</a:t>
+              <a:t>Agent software installation and upgrades use an administrator-controlled rollout.</a:t>
             </a:r>
           </a:p>
         </p:txBody>
@@ -14012,7 +14108,7 @@
               </a:defRPr>
             </a:pPr>
             <a:r>
-              <a:t>19 / 24</a:t>
+              <a:t>19 / 25</a:t>
             </a:r>
           </a:p>
         </p:txBody>
@@ -14766,7 +14862,7 @@
               </a:defRPr>
             </a:pPr>
             <a:r>
-              <a:t>02 / 24</a:t>
+              <a:t>02 / 25</a:t>
             </a:r>
           </a:p>
         </p:txBody>
@@ -14866,7 +14962,7 @@
               </a:defRPr>
             </a:pPr>
             <a:r>
-              <a:t>RECOVERY + MAINTENANCE</a:t>
+              <a:t>OWNERSHIP + EVIDENCE + DELIVERY</a:t>
             </a:r>
           </a:p>
         </p:txBody>
@@ -14905,7 +15001,7 @@
               </a:defRPr>
             </a:pPr>
             <a:r>
-              <a:t>Reliable delivery and retention</a:t>
+              <a:t>Incident and notification workflows</a:t>
             </a:r>
           </a:p>
         </p:txBody>
@@ -14947,7 +15043,7 @@
               </a:defRPr>
             </a:pPr>
             <a:r>
-              <a:t>Network interruptions and growing evidence volumes can affect security operations. Persistent queues and acknowledgement checks support recovery after outages, while backup and retention controls help teams manage stored evidence according to investigation needs and operational requirements.</a:t>
+              <a:t>Investigations often involve several people and external operational systems. Incident records preserve ownership and decisions, while signed notifications carry relevant information to organisation-operated integrations, helping teams coordinate work and recover delivery after temporary service failures.</a:t>
             </a:r>
           </a:p>
         </p:txBody>
@@ -15072,7 +15168,7 @@
               </a:defRPr>
             </a:pPr>
             <a:r>
-              <a:t>Telemetry continuity</a:t>
+              <a:t>Investigation workflow</a:t>
             </a:r>
           </a:p>
         </p:txBody>
@@ -15115,7 +15211,7 @@
               </a:defRPr>
             </a:pPr>
             <a:r>
-              <a:t>Keep events until exact acknowledgement</a:t>
+              <a:t>Link alerts to owned incident cases</a:t>
             </a:r>
           </a:p>
           <a:p>
@@ -15135,7 +15231,7 @@
               </a:defRPr>
             </a:pPr>
             <a:r>
-              <a:t>Replay retained events after service outages</a:t>
+              <a:t>Track status, notes and evidence timelines</a:t>
             </a:r>
           </a:p>
           <a:p>
@@ -15155,7 +15251,7 @@
               </a:defRPr>
             </a:pPr>
             <a:r>
-              <a:t>Pause collection visibly when the queue is full</a:t>
+              <a:t>Protect concurrent edits with case versions</a:t>
             </a:r>
           </a:p>
           <a:p>
@@ -15175,7 +15271,7 @@
               </a:defRPr>
             </a:pPr>
             <a:r>
-              <a:t>Archive older events without fresh containment</a:t>
+              <a:t>Review alerts and add scoped, expiring exceptions</a:t>
             </a:r>
           </a:p>
         </p:txBody>
@@ -15300,7 +15396,7 @@
               </a:defRPr>
             </a:pPr>
             <a:r>
-              <a:t>Evidence maintenance</a:t>
+              <a:t>SIEM and ticketing bridges</a:t>
             </a:r>
           </a:p>
         </p:txBody>
@@ -15343,7 +15439,7 @@
               </a:defRPr>
             </a:pPr>
             <a:r>
-              <a:t>Create consistent SQLite backups and verify restore</a:t>
+              <a:t>Send signed JSON to fixed HTTPS endpoints</a:t>
             </a:r>
           </a:p>
           <a:p>
@@ -15363,7 +15459,7 @@
               </a:defRPr>
             </a:pPr>
             <a:r>
-              <a:t>Preview retention cleanup before applying it</a:t>
+              <a:t>Persist delivery state, leases and retry attempts</a:t>
             </a:r>
           </a:p>
           <a:p>
@@ -15383,7 +15479,7 @@
               </a:defRPr>
             </a:pPr>
             <a:r>
-              <a:t>Preserve incident and response-linked evidence</a:t>
+              <a:t>Attach stable keys for receiver deduplication</a:t>
             </a:r>
           </a:p>
           <a:p>
@@ -15403,7 +15499,7 @@
               </a:defRPr>
             </a:pPr>
             <a:r>
-              <a:t>Create offline-agent and stale-sensor alerts</a:t>
+              <a:t>Audit outcomes without storing upstream secrets</a:t>
             </a:r>
           </a:p>
         </p:txBody>
@@ -15442,7 +15538,7 @@
               </a:defRPr>
             </a:pPr>
             <a:r>
-              <a:t>Schedule maintenance explicitly and measure capacity, recovery objectives and backup security in the target environment.</a:t>
+              <a:t>Webhooks support organisation-operated adapters; native Jira, ServiceNow or Splunk connectors are not implied.</a:t>
             </a:r>
           </a:p>
         </p:txBody>
@@ -15520,7 +15616,7 @@
               </a:defRPr>
             </a:pPr>
             <a:r>
-              <a:t>20 / 24</a:t>
+              <a:t>20 / 25</a:t>
             </a:r>
           </a:p>
         </p:txBody>
@@ -15620,7 +15716,7 @@
               </a:defRPr>
             </a:pPr>
             <a:r>
-              <a:t>IMAGE SUPPLY CHAIN + AIR-GAP</a:t>
+              <a:t>RECOVERY + MAINTENANCE</a:t>
             </a:r>
           </a:p>
         </p:txBody>
@@ -15659,7 +15755,7 @@
               </a:defRPr>
             </a:pPr>
             <a:r>
-              <a:t>Hardened deployment</a:t>
+              <a:t>Reliable delivery and retention</a:t>
             </a:r>
           </a:p>
         </p:txBody>
@@ -15701,7 +15797,7 @@
               </a:defRPr>
             </a:pPr>
             <a:r>
-              <a:t>A security tool that downloads twenty scanners is a supply-chain target. Every binary in the image is pinned to a known checksum and verified at build time, the containers run unprivileged, and the whole stack can operate without internet access using locally mirrored vulnerability data.</a:t>
+              <a:t>Network interruptions and growing evidence volumes can affect security operations. Persistent queues and acknowledgement checks support recovery after outages, while backup and retention controls help teams manage stored evidence according to investigation needs and operational requirements.</a:t>
             </a:r>
           </a:p>
         </p:txBody>
@@ -15826,7 +15922,7 @@
               </a:defRPr>
             </a:pPr>
             <a:r>
-              <a:t>Build integrity</a:t>
+              <a:t>Telemetry continuity</a:t>
             </a:r>
           </a:p>
         </p:txBody>
@@ -15869,7 +15965,7 @@
               </a:defRPr>
             </a:pPr>
             <a:r>
-              <a:t>Every scanner download SHA-256 pinned and verified</a:t>
+              <a:t>Keep events until exact acknowledgement</a:t>
             </a:r>
           </a:p>
           <a:p>
@@ -15889,7 +15985,7 @@
               </a:defRPr>
             </a:pPr>
             <a:r>
-              <a:t>No pipe-to-shell, no floating "latest" versions</a:t>
+              <a:t>Replay retained events after service outages</a:t>
             </a:r>
           </a:p>
           <a:p>
@@ -15909,7 +16005,7 @@
               </a:defRPr>
             </a:pPr>
             <a:r>
-              <a:t>Containers run as an unprivileged user</a:t>
+              <a:t>Pause collection visibly when the queue is full</a:t>
             </a:r>
           </a:p>
           <a:p>
@@ -15929,7 +16025,7 @@
               </a:defRPr>
             </a:pPr>
             <a:r>
-              <a:t>Hash-locked Python dependencies</a:t>
+              <a:t>Archive older events without fresh containment</a:t>
             </a:r>
           </a:p>
         </p:txBody>
@@ -16054,7 +16150,7 @@
               </a:defRPr>
             </a:pPr>
             <a:r>
-              <a:t>Runtime posture</a:t>
+              <a:t>Evidence maintenance</a:t>
             </a:r>
           </a:p>
         </p:txBody>
@@ -16097,7 +16193,7 @@
               </a:defRPr>
             </a:pPr>
             <a:r>
-              <a:t>Redis authenticated; browser origins explicit, never wildcard</a:t>
+              <a:t>Create consistent SQLite backups and verify restore</a:t>
             </a:r>
           </a:p>
           <a:p>
@@ -16117,7 +16213,7 @@
               </a:defRPr>
             </a:pPr>
             <a:r>
-              <a:t>No scanner telemetry egress</a:t>
+              <a:t>Preview retention cleanup before applying it</a:t>
             </a:r>
           </a:p>
           <a:p>
@@ -16137,7 +16233,7 @@
               </a:defRPr>
             </a:pPr>
             <a:r>
-              <a:t>Full offline mode with local vulnerability databases</a:t>
+              <a:t>Preserve incident and response-linked evidence</a:t>
             </a:r>
           </a:p>
           <a:p>
@@ -16157,7 +16253,7 @@
               </a:defRPr>
             </a:pPr>
             <a:r>
-              <a:t>Secrets injected from a vault, never baked into images</a:t>
+              <a:t>Create offline-agent and stale-sensor alerts</a:t>
             </a:r>
           </a:p>
         </p:txBody>
@@ -16196,7 +16292,7 @@
               </a:defRPr>
             </a:pPr>
             <a:r>
-              <a:t>Tests fail the build if any download lacks a pin or the runtime user is removed.</a:t>
+              <a:t>Schedule maintenance explicitly and measure capacity, recovery objectives and backup security in the target environment.</a:t>
             </a:r>
           </a:p>
         </p:txBody>
@@ -16274,7 +16370,7 @@
               </a:defRPr>
             </a:pPr>
             <a:r>
-              <a:t>21 / 24</a:t>
+              <a:t>21 / 25</a:t>
             </a:r>
           </a:p>
         </p:txBody>
@@ -16374,7 +16470,7 @@
               </a:defRPr>
             </a:pPr>
             <a:r>
-              <a:t>AUTOMATED CHECKS + NATIVE FILE CHECKS</a:t>
+              <a:t>IMAGE SUPPLY CHAIN + AIR-GAP</a:t>
             </a:r>
           </a:p>
         </p:txBody>
@@ -16413,7 +16509,7 @@
               </a:defRPr>
             </a:pPr>
             <a:r>
-              <a:t>Validation evidence</a:t>
+              <a:t>Hardened deployment</a:t>
             </a:r>
           </a:p>
         </p:txBody>
@@ -16455,7 +16551,7 @@
               </a:defRPr>
             </a:pPr>
             <a:r>
-              <a:t>The validation results demonstrate exercised code paths and selected native file behaviours. They provide evidence for technical review, while full containment effectiveness, host compatibility and operational performance require testing in the intended environment.</a:t>
+              <a:t>A security tool that downloads twenty scanners is a supply-chain target. Every binary in the image is pinned to a known checksum and verified at build time, the containers run unprivileged, and the whole stack can operate without internet access using locally mirrored vulnerability data.</a:t>
             </a:r>
           </a:p>
         </p:txBody>
@@ -16580,7 +16676,7 @@
               </a:defRPr>
             </a:pPr>
             <a:r>
-              <a:t>442 automated tests passed</a:t>
+              <a:t>Build integrity</a:t>
             </a:r>
           </a:p>
         </p:txBody>
@@ -16623,7 +16719,7 @@
               </a:defRPr>
             </a:pPr>
             <a:r>
-              <a:t>Access, roles, tenant and database-role boundaries</a:t>
+              <a:t>Every scanner download SHA-256 pinned and verified</a:t>
             </a:r>
           </a:p>
           <a:p>
@@ -16643,7 +16739,7 @@
               </a:defRPr>
             </a:pPr>
             <a:r>
-              <a:t>Target safety, scopes, cloud bindings and audit trail</a:t>
+              <a:t>No pipe-to-shell, no floating "latest" versions</a:t>
             </a:r>
           </a:p>
           <a:p>
@@ -16663,7 +16759,7 @@
               </a:defRPr>
             </a:pPr>
             <a:r>
-              <a:t>Triage, scan lifecycle and deployment pinning</a:t>
+              <a:t>Containers run as an unprivileged user</a:t>
             </a:r>
           </a:p>
           <a:p>
@@ -16683,7 +16779,7 @@
               </a:defRPr>
             </a:pPr>
             <a:r>
-              <a:t>Detection, enrollment, incident and response workflows</a:t>
+              <a:t>Hash-locked Python dependencies</a:t>
             </a:r>
           </a:p>
         </p:txBody>
@@ -16808,7 +16904,7 @@
               </a:defRPr>
             </a:pPr>
             <a:r>
-              <a:t>7 native Windows file checks passed</a:t>
+              <a:t>Runtime posture</a:t>
             </a:r>
           </a:p>
         </p:txBody>
@@ -16851,7 +16947,7 @@
               </a:defRPr>
             </a:pPr>
             <a:r>
-              <a:t>Disposable file-operation contract fixtures</a:t>
+              <a:t>Redis authenticated; browser origins explicit, never wildcard</a:t>
             </a:r>
           </a:p>
           <a:p>
@@ -16871,7 +16967,7 @@
               </a:defRPr>
             </a:pPr>
             <a:r>
-              <a:t>Pinned-handle relative rename behavior</a:t>
+              <a:t>No scanner telemetry egress</a:t>
             </a:r>
           </a:p>
           <a:p>
@@ -16891,7 +16987,7 @@
               </a:defRPr>
             </a:pPr>
             <a:r>
-              <a:t>File-sharing and junction-race checks</a:t>
+              <a:t>Full offline mode with local vulnerability databases</a:t>
             </a:r>
           </a:p>
           <a:p>
@@ -16911,7 +17007,7 @@
               </a:defRPr>
             </a:pPr>
             <a:r>
-              <a:t>Full ACL and firewall workflows require staging</a:t>
+              <a:t>Secrets injected from a vault, never baked into images</a:t>
             </a:r>
           </a:p>
         </p:txBody>
@@ -16950,7 +17046,7 @@
               </a:defRPr>
             </a:pPr>
             <a:r>
-              <a:t>Automated tests and narrow native file checks do not establish live containment efficacy or production readiness.</a:t>
+              <a:t>Tests fail the build if any download lacks a pin or the runtime user is removed.</a:t>
             </a:r>
           </a:p>
         </p:txBody>
@@ -17028,7 +17124,7 @@
               </a:defRPr>
             </a:pPr>
             <a:r>
-              <a:t>22 / 24</a:t>
+              <a:t>22 / 25</a:t>
             </a:r>
           </a:p>
         </p:txBody>
@@ -17128,7 +17224,7 @@
               </a:defRPr>
             </a:pPr>
             <a:r>
-              <a:t>DEPLOYMENT GATES</a:t>
+              <a:t>AUTOMATED CHECKS + NATIVE FILE CHECKS</a:t>
             </a:r>
           </a:p>
         </p:txBody>
@@ -17167,7 +17263,7 @@
               </a:defRPr>
             </a:pPr>
             <a:r>
-              <a:t>Required staging validation</a:t>
+              <a:t>Validation evidence</a:t>
             </a:r>
           </a:p>
         </p:txBody>
@@ -17209,7 +17305,7 @@
               </a:defRPr>
             </a:pPr>
             <a:r>
-              <a:t>Deployment conditions determine whether security controls work as intended. Staging should verify identity, database roles, telemetry, permissions, enforcement and recovery together, including how containment behaves during service interruptions and host restarts.</a:t>
+              <a:t>The validation results demonstrate exercised code paths and selected native file behaviours. They provide evidence for technical review, while full containment effectiveness, host compatibility and operational performance require testing in the intended environment.</a:t>
             </a:r>
           </a:p>
         </p:txBody>
@@ -17334,7 +17430,7 @@
               </a:defRPr>
             </a:pPr>
             <a:r>
-              <a:t>Identity and data</a:t>
+              <a:t>486 automated tests passed</a:t>
             </a:r>
           </a:p>
         </p:txBody>
@@ -17377,7 +17473,7 @@
               </a:defRPr>
             </a:pPr>
             <a:r>
-              <a:t>IdP issuance, token lifetime and revocation behavior</a:t>
+              <a:t>Access, roles, tenant and database-role boundaries</a:t>
             </a:r>
           </a:p>
           <a:p>
@@ -17397,7 +17493,7 @@
               </a:defRPr>
             </a:pPr>
             <a:r>
-              <a:t>PostgreSQL policies with both deployed database roles</a:t>
+              <a:t>Target safety, scopes, cloud bindings and audit trail</a:t>
             </a:r>
           </a:p>
           <a:p>
@@ -17417,7 +17513,7 @@
               </a:defRPr>
             </a:pPr>
             <a:r>
-              <a:t>Container image build and scanner compatibility</a:t>
+              <a:t>Triage, scan lifecycle and deployment pinning</a:t>
             </a:r>
           </a:p>
           <a:p>
@@ -17437,7 +17533,7 @@
               </a:defRPr>
             </a:pPr>
             <a:r>
-              <a:t>Existing-database migration rehearsal</a:t>
+              <a:t>Detection, enrollment, incident and response workflows</a:t>
             </a:r>
           </a:p>
         </p:txBody>
@@ -17562,7 +17658,7 @@
               </a:defRPr>
             </a:pPr>
             <a:r>
-              <a:t>Hosts and enforcement</a:t>
+              <a:t>7 native Windows file checks passed</a:t>
             </a:r>
           </a:p>
         </p:txBody>
@@ -17605,7 +17701,7 @@
               </a:defRPr>
             </a:pPr>
             <a:r>
-              <a:t>Windows Security/Sysmon and Linux audit collection</a:t>
+              <a:t>Disposable file-operation contract fixtures</a:t>
             </a:r>
           </a:p>
           <a:p>
@@ -17625,7 +17721,7 @@
               </a:defRPr>
             </a:pPr>
             <a:r>
-              <a:t>Cloudflare permissions, expiry and rule ordering</a:t>
+              <a:t>Pinned-handle relative rename behavior</a:t>
             </a:r>
           </a:p>
           <a:p>
@@ -17645,7 +17741,7 @@
               </a:defRPr>
             </a:pPr>
             <a:r>
-              <a:t>Linux/Windows isolation, expiry and rollback</a:t>
+              <a:t>File-sharing and junction-race checks</a:t>
             </a:r>
           </a:p>
           <a:p>
@@ -17665,7 +17761,7 @@
               </a:defRPr>
             </a:pPr>
             <a:r>
-              <a:t>False positives, overhead, backlog and recovery</a:t>
+              <a:t>Full ACL and firewall workflows require staging</a:t>
             </a:r>
           </a:p>
         </p:txBody>
@@ -17704,7 +17800,7 @@
               </a:defRPr>
             </a:pPr>
             <a:r>
-              <a:t>Validate native Windows ACLs, firewall enforcement, scheduled-task expiry and reboot recovery before enabling containment.</a:t>
+              <a:t>Automated tests and narrow native file checks do not establish live containment efficacy or production readiness.</a:t>
             </a:r>
           </a:p>
         </p:txBody>
@@ -17782,7 +17878,7 @@
               </a:defRPr>
             </a:pPr>
             <a:r>
-              <a:t>23 / 24</a:t>
+              <a:t>23 / 25</a:t>
             </a:r>
           </a:p>
         </p:txBody>
@@ -17882,7 +17978,7 @@
               </a:defRPr>
             </a:pPr>
             <a:r>
-              <a:t>DEPLOYMENT PLANNING</a:t>
+              <a:t>DEPLOYMENT GATES</a:t>
             </a:r>
           </a:p>
         </p:txBody>
@@ -17921,7 +18017,7 @@
               </a:defRPr>
             </a:pPr>
             <a:r>
-              <a:t>Evaluating fit for your organisation</a:t>
+              <a:t>Required staging validation</a:t>
             </a:r>
           </a:p>
         </p:txBody>
@@ -17963,7 +18059,7 @@
               </a:defRPr>
             </a:pPr>
             <a:r>
-              <a:t>A suitable deployment starts with clear asset scope, accountable owners and measurable acceptance criteria. These decisions help teams assess coverage, operational impact, recovery expectations and the conditions under which approved response should be enabled.</a:t>
+              <a:t>Deployment conditions determine whether security controls work as intended. Staging should verify identity, database roles, telemetry, permissions, enforcement and recovery together, including how containment behaves during service interruptions and host restarts.</a:t>
             </a:r>
           </a:p>
         </p:txBody>
@@ -18088,7 +18184,7 @@
               </a:defRPr>
             </a:pPr>
             <a:r>
-              <a:t>Scope and ownership</a:t>
+              <a:t>Identity and data</a:t>
             </a:r>
           </a:p>
         </p:txBody>
@@ -18131,7 +18227,7 @@
               </a:defRPr>
             </a:pPr>
             <a:r>
-              <a:t>Select applications, APIs, cloud accounts and servers</a:t>
+              <a:t>IdP issuance, token lifetime and revocation behavior</a:t>
             </a:r>
           </a:p>
           <a:p>
@@ -18151,7 +18247,7 @@
               </a:defRPr>
             </a:pPr>
             <a:r>
-              <a:t>Identify incident owners and response approvers</a:t>
+              <a:t>PostgreSQL policies with both deployed database roles</a:t>
             </a:r>
           </a:p>
           <a:p>
@@ -18171,7 +18267,7 @@
               </a:defRPr>
             </a:pPr>
             <a:r>
-              <a:t>Approve the domains and networks in scope</a:t>
+              <a:t>Container image build and scanner compatibility</a:t>
             </a:r>
           </a:p>
           <a:p>
@@ -18191,7 +18287,7 @@
               </a:defRPr>
             </a:pPr>
             <a:r>
-              <a:t>Agree retention and recovery requirements</a:t>
+              <a:t>Existing-database migration rehearsal</a:t>
             </a:r>
           </a:p>
         </p:txBody>
@@ -18316,7 +18412,7 @@
               </a:defRPr>
             </a:pPr>
             <a:r>
-              <a:t>Acceptance criteria</a:t>
+              <a:t>Hosts and enforcement</a:t>
             </a:r>
           </a:p>
         </p:txBody>
@@ -18359,7 +18455,7 @@
               </a:defRPr>
             </a:pPr>
             <a:r>
-              <a:t>Measure detection coverage and false positives</a:t>
+              <a:t>Windows Security/Sysmon and Linux audit collection</a:t>
             </a:r>
           </a:p>
           <a:p>
@@ -18379,7 +18475,7 @@
               </a:defRPr>
             </a:pPr>
             <a:r>
-              <a:t>Verify roles and separate-actor approval</a:t>
+              <a:t>Cloudflare permissions, expiry and rule ordering</a:t>
             </a:r>
           </a:p>
           <a:p>
@@ -18399,7 +18495,7 @@
               </a:defRPr>
             </a:pPr>
             <a:r>
-              <a:t>Exercise containment, expiry and restoration</a:t>
+              <a:t>Linux/Windows isolation, expiry and rollback</a:t>
             </a:r>
           </a:p>
           <a:p>
@@ -18419,7 +18515,7 @@
               </a:defRPr>
             </a:pPr>
             <a:r>
-              <a:t>Measure host overhead and service recovery</a:t>
+              <a:t>False positives, overhead, backlog and recovery</a:t>
             </a:r>
           </a:p>
         </p:txBody>
@@ -18458,7 +18554,7 @@
               </a:defRPr>
             </a:pPr>
             <a:r>
-              <a:t>Production deployment requires environment-specific validation and an approved operating procedure.</a:t>
+              <a:t>Validate native Windows ACLs, firewall enforcement, scheduled-task expiry and reboot recovery before enabling containment.</a:t>
             </a:r>
           </a:p>
         </p:txBody>
@@ -18536,7 +18632,761 @@
               </a:defRPr>
             </a:pPr>
             <a:r>
-              <a:t>24 / 24</a:t>
+              <a:t>24 / 25</a:t>
+            </a:r>
+          </a:p>
+        </p:txBody>
+      </p:sp>
+    </p:spTree>
+  </p:cSld>
+  <p:clrMapOvr>
+    <a:masterClrMapping/>
+  </p:clrMapOvr>
+</p:sld>
+</file>
+
+<file path=ppt/slides/slide25.xml><?xml version="1.0" encoding="utf-8"?>
+<p:sld xmlns:a="http://schemas.openxmlformats.org/drawingml/2006/main" xmlns:p="http://schemas.openxmlformats.org/presentationml/2006/main" xmlns:r="http://schemas.openxmlformats.org/officeDocument/2006/relationships">
+  <p:cSld>
+    <p:spTree>
+      <p:nvGrpSpPr>
+        <p:cNvPr id="1" name=""/>
+        <p:cNvGrpSpPr/>
+        <p:nvPr/>
+      </p:nvGrpSpPr>
+      <p:grpSpPr/>
+      <p:sp>
+        <p:nvSpPr>
+          <p:cNvPr id="2" name="Rectangle 1"/>
+          <p:cNvSpPr/>
+          <p:nvPr/>
+        </p:nvSpPr>
+        <p:spPr>
+          <a:xfrm>
+            <a:off x="0" y="0"/>
+            <a:ext cx="12191695" cy="91440"/>
+          </a:xfrm>
+          <a:prstGeom prst="rect">
+            <a:avLst/>
+          </a:prstGeom>
+          <a:solidFill>
+            <a:srgbClr val="F38020"/>
+          </a:solidFill>
+          <a:ln>
+            <a:noFill/>
+          </a:ln>
+        </p:spPr>
+        <p:style>
+          <a:lnRef idx="1">
+            <a:schemeClr val="accent1"/>
+          </a:lnRef>
+          <a:fillRef idx="3">
+            <a:schemeClr val="accent1"/>
+          </a:fillRef>
+          <a:effectRef idx="2">
+            <a:schemeClr val="accent1"/>
+          </a:effectRef>
+          <a:fontRef idx="minor">
+            <a:schemeClr val="lt1"/>
+          </a:fontRef>
+        </p:style>
+        <p:txBody>
+          <a:bodyPr rtlCol="0" anchor="ctr"/>
+          <a:lstStyle/>
+          <a:p>
+            <a:pPr algn="ctr"/>
+          </a:p>
+        </p:txBody>
+      </p:sp>
+      <p:sp>
+        <p:nvSpPr>
+          <p:cNvPr id="3" name="TextBox 2"/>
+          <p:cNvSpPr txBox="1"/>
+          <p:nvPr/>
+        </p:nvSpPr>
+        <p:spPr>
+          <a:xfrm>
+            <a:off x="502920" y="320040"/>
+            <a:ext cx="10972800" cy="274320"/>
+          </a:xfrm>
+          <a:prstGeom prst="rect">
+            <a:avLst/>
+          </a:prstGeom>
+          <a:noFill/>
+        </p:spPr>
+        <p:txBody>
+          <a:bodyPr wrap="square" lIns="0" rIns="0" tIns="0" bIns="0">
+            <a:noAutofit/>
+          </a:bodyPr>
+          <a:lstStyle/>
+          <a:p>
+            <a:pPr>
+              <a:spcAft>
+                <a:spcPts val="0"/>
+              </a:spcAft>
+              <a:defRPr sz="1100" b="1">
+                <a:solidFill>
+                  <a:srgbClr val="F38020"/>
+                </a:solidFill>
+                <a:latin typeface="DejaVu Sans"/>
+              </a:defRPr>
+            </a:pPr>
+            <a:r>
+              <a:t>DEPLOYMENT PLANNING</a:t>
+            </a:r>
+          </a:p>
+        </p:txBody>
+      </p:sp>
+      <p:sp>
+        <p:nvSpPr>
+          <p:cNvPr id="4" name="TextBox 3"/>
+          <p:cNvSpPr txBox="1"/>
+          <p:nvPr/>
+        </p:nvSpPr>
+        <p:spPr>
+          <a:xfrm>
+            <a:off x="502920" y="795528"/>
+            <a:ext cx="11155680" cy="594360"/>
+          </a:xfrm>
+          <a:prstGeom prst="rect">
+            <a:avLst/>
+          </a:prstGeom>
+          <a:noFill/>
+        </p:spPr>
+        <p:txBody>
+          <a:bodyPr wrap="square" lIns="0" rIns="0" tIns="0" bIns="0">
+            <a:noAutofit/>
+          </a:bodyPr>
+          <a:lstStyle/>
+          <a:p>
+            <a:pPr>
+              <a:spcAft>
+                <a:spcPts val="0"/>
+              </a:spcAft>
+              <a:defRPr sz="3400" b="1">
+                <a:solidFill>
+                  <a:srgbClr val="0A2540"/>
+                </a:solidFill>
+                <a:latin typeface="DejaVu Sans"/>
+              </a:defRPr>
+            </a:pPr>
+            <a:r>
+              <a:t>Evaluating fit for your organisation</a:t>
+            </a:r>
+          </a:p>
+        </p:txBody>
+      </p:sp>
+      <p:sp>
+        <p:nvSpPr>
+          <p:cNvPr id="5" name="TextBox 4"/>
+          <p:cNvSpPr txBox="1"/>
+          <p:nvPr/>
+        </p:nvSpPr>
+        <p:spPr>
+          <a:xfrm>
+            <a:off x="502920" y="1417320"/>
+            <a:ext cx="11155680" cy="768096"/>
+          </a:xfrm>
+          <a:prstGeom prst="rect">
+            <a:avLst/>
+          </a:prstGeom>
+          <a:noFill/>
+        </p:spPr>
+        <p:txBody>
+          <a:bodyPr wrap="square" lIns="0" rIns="0" tIns="0" bIns="0">
+            <a:noAutofit/>
+          </a:bodyPr>
+          <a:lstStyle/>
+          <a:p>
+            <a:pPr>
+              <a:lnSpc>
+                <a:spcPts val="2000"/>
+              </a:lnSpc>
+              <a:spcAft>
+                <a:spcPts val="0"/>
+              </a:spcAft>
+              <a:defRPr sz="1550" b="0">
+                <a:solidFill>
+                  <a:srgbClr val="334155"/>
+                </a:solidFill>
+                <a:latin typeface="DejaVu Sans"/>
+              </a:defRPr>
+            </a:pPr>
+            <a:r>
+              <a:t>A suitable deployment starts with clear asset scope, accountable owners and measurable acceptance criteria. These decisions help teams assess coverage, operational impact, recovery expectations and the conditions under which approved response should be enabled.</a:t>
+            </a:r>
+          </a:p>
+        </p:txBody>
+      </p:sp>
+      <p:sp>
+        <p:nvSpPr>
+          <p:cNvPr id="6" name="Rectangle 5"/>
+          <p:cNvSpPr/>
+          <p:nvPr/>
+        </p:nvSpPr>
+        <p:spPr>
+          <a:xfrm>
+            <a:off x="502920" y="2331720"/>
+            <a:ext cx="5404104" cy="3657600"/>
+          </a:xfrm>
+          <a:prstGeom prst="rect">
+            <a:avLst/>
+          </a:prstGeom>
+          <a:solidFill>
+            <a:srgbClr val="F3F6FA"/>
+          </a:solidFill>
+          <a:ln>
+            <a:noFill/>
+          </a:ln>
+        </p:spPr>
+        <p:style>
+          <a:lnRef idx="1">
+            <a:schemeClr val="accent1"/>
+          </a:lnRef>
+          <a:fillRef idx="3">
+            <a:schemeClr val="accent1"/>
+          </a:fillRef>
+          <a:effectRef idx="2">
+            <a:schemeClr val="accent1"/>
+          </a:effectRef>
+          <a:fontRef idx="minor">
+            <a:schemeClr val="lt1"/>
+          </a:fontRef>
+        </p:style>
+        <p:txBody>
+          <a:bodyPr rtlCol="0" anchor="ctr"/>
+          <a:lstStyle/>
+          <a:p>
+            <a:pPr algn="ctr"/>
+          </a:p>
+        </p:txBody>
+      </p:sp>
+      <p:sp>
+        <p:nvSpPr>
+          <p:cNvPr id="7" name="Rectangle 6"/>
+          <p:cNvSpPr/>
+          <p:nvPr/>
+        </p:nvSpPr>
+        <p:spPr>
+          <a:xfrm>
+            <a:off x="502920" y="2331720"/>
+            <a:ext cx="45720" cy="3657600"/>
+          </a:xfrm>
+          <a:prstGeom prst="rect">
+            <a:avLst/>
+          </a:prstGeom>
+          <a:solidFill>
+            <a:srgbClr val="F38020"/>
+          </a:solidFill>
+          <a:ln>
+            <a:noFill/>
+          </a:ln>
+        </p:spPr>
+        <p:style>
+          <a:lnRef idx="1">
+            <a:schemeClr val="accent1"/>
+          </a:lnRef>
+          <a:fillRef idx="3">
+            <a:schemeClr val="accent1"/>
+          </a:fillRef>
+          <a:effectRef idx="2">
+            <a:schemeClr val="accent1"/>
+          </a:effectRef>
+          <a:fontRef idx="minor">
+            <a:schemeClr val="lt1"/>
+          </a:fontRef>
+        </p:style>
+        <p:txBody>
+          <a:bodyPr rtlCol="0" anchor="ctr"/>
+          <a:lstStyle/>
+          <a:p>
+            <a:pPr algn="ctr"/>
+          </a:p>
+        </p:txBody>
+      </p:sp>
+      <p:sp>
+        <p:nvSpPr>
+          <p:cNvPr id="8" name="TextBox 7"/>
+          <p:cNvSpPr txBox="1"/>
+          <p:nvPr/>
+        </p:nvSpPr>
+        <p:spPr>
+          <a:xfrm>
+            <a:off x="749808" y="2542032"/>
+            <a:ext cx="4901184" cy="594360"/>
+          </a:xfrm>
+          <a:prstGeom prst="rect">
+            <a:avLst/>
+          </a:prstGeom>
+          <a:noFill/>
+        </p:spPr>
+        <p:txBody>
+          <a:bodyPr wrap="square" lIns="0" rIns="0" tIns="0" bIns="0">
+            <a:noAutofit/>
+          </a:bodyPr>
+          <a:lstStyle/>
+          <a:p>
+            <a:pPr>
+              <a:spcAft>
+                <a:spcPts val="0"/>
+              </a:spcAft>
+              <a:defRPr sz="2000" b="1">
+                <a:solidFill>
+                  <a:srgbClr val="0A2540"/>
+                </a:solidFill>
+                <a:latin typeface="DejaVu Sans"/>
+              </a:defRPr>
+            </a:pPr>
+            <a:r>
+              <a:t>Scope and ownership</a:t>
+            </a:r>
+          </a:p>
+        </p:txBody>
+      </p:sp>
+      <p:sp>
+        <p:nvSpPr>
+          <p:cNvPr id="9" name="TextBox 8"/>
+          <p:cNvSpPr txBox="1"/>
+          <p:nvPr/>
+        </p:nvSpPr>
+        <p:spPr>
+          <a:xfrm>
+            <a:off x="749808" y="3236976"/>
+            <a:ext cx="4846320" cy="2615184"/>
+          </a:xfrm>
+          <a:prstGeom prst="rect">
+            <a:avLst/>
+          </a:prstGeom>
+          <a:noFill/>
+        </p:spPr>
+        <p:txBody>
+          <a:bodyPr wrap="square" lIns="0" rIns="0" tIns="0" bIns="0">
+            <a:noAutofit/>
+          </a:bodyPr>
+          <a:lstStyle/>
+          <a:p>
+            <a:pPr marL="182880" indent="-164592">
+              <a:lnSpc>
+                <a:spcPts val="2200"/>
+              </a:lnSpc>
+              <a:spcAft>
+                <a:spcPts val="800"/>
+              </a:spcAft>
+              <a:buChar char="•"/>
+              <a:defRPr sz="1700" b="0">
+                <a:solidFill>
+                  <a:srgbClr val="334155"/>
+                </a:solidFill>
+                <a:latin typeface="DejaVu Sans"/>
+              </a:defRPr>
+            </a:pPr>
+            <a:r>
+              <a:t>Select applications, APIs, cloud accounts and servers</a:t>
+            </a:r>
+          </a:p>
+          <a:p>
+            <a:pPr marL="182880" indent="-164592">
+              <a:lnSpc>
+                <a:spcPts val="2200"/>
+              </a:lnSpc>
+              <a:spcAft>
+                <a:spcPts val="800"/>
+              </a:spcAft>
+              <a:buChar char="•"/>
+              <a:defRPr sz="1700">
+                <a:solidFill>
+                  <a:srgbClr val="334155"/>
+                </a:solidFill>
+                <a:latin typeface="DejaVu Sans"/>
+              </a:defRPr>
+            </a:pPr>
+            <a:r>
+              <a:t>Identify incident owners and response approvers</a:t>
+            </a:r>
+          </a:p>
+          <a:p>
+            <a:pPr marL="182880" indent="-164592">
+              <a:lnSpc>
+                <a:spcPts val="2200"/>
+              </a:lnSpc>
+              <a:spcAft>
+                <a:spcPts val="800"/>
+              </a:spcAft>
+              <a:buChar char="•"/>
+              <a:defRPr sz="1700">
+                <a:solidFill>
+                  <a:srgbClr val="334155"/>
+                </a:solidFill>
+                <a:latin typeface="DejaVu Sans"/>
+              </a:defRPr>
+            </a:pPr>
+            <a:r>
+              <a:t>Approve the domains and networks in scope</a:t>
+            </a:r>
+          </a:p>
+          <a:p>
+            <a:pPr marL="182880" indent="-164592">
+              <a:lnSpc>
+                <a:spcPts val="2200"/>
+              </a:lnSpc>
+              <a:spcAft>
+                <a:spcPts val="800"/>
+              </a:spcAft>
+              <a:buChar char="•"/>
+              <a:defRPr sz="1700">
+                <a:solidFill>
+                  <a:srgbClr val="334155"/>
+                </a:solidFill>
+                <a:latin typeface="DejaVu Sans"/>
+              </a:defRPr>
+            </a:pPr>
+            <a:r>
+              <a:t>Agree retention and recovery requirements</a:t>
+            </a:r>
+          </a:p>
+        </p:txBody>
+      </p:sp>
+      <p:sp>
+        <p:nvSpPr>
+          <p:cNvPr id="10" name="Rectangle 9"/>
+          <p:cNvSpPr/>
+          <p:nvPr/>
+        </p:nvSpPr>
+        <p:spPr>
+          <a:xfrm>
+            <a:off x="6281928" y="2331720"/>
+            <a:ext cx="5404104" cy="3657600"/>
+          </a:xfrm>
+          <a:prstGeom prst="rect">
+            <a:avLst/>
+          </a:prstGeom>
+          <a:solidFill>
+            <a:srgbClr val="F3F6FA"/>
+          </a:solidFill>
+          <a:ln>
+            <a:noFill/>
+          </a:ln>
+        </p:spPr>
+        <p:style>
+          <a:lnRef idx="1">
+            <a:schemeClr val="accent1"/>
+          </a:lnRef>
+          <a:fillRef idx="3">
+            <a:schemeClr val="accent1"/>
+          </a:fillRef>
+          <a:effectRef idx="2">
+            <a:schemeClr val="accent1"/>
+          </a:effectRef>
+          <a:fontRef idx="minor">
+            <a:schemeClr val="lt1"/>
+          </a:fontRef>
+        </p:style>
+        <p:txBody>
+          <a:bodyPr rtlCol="0" anchor="ctr"/>
+          <a:lstStyle/>
+          <a:p>
+            <a:pPr algn="ctr"/>
+          </a:p>
+        </p:txBody>
+      </p:sp>
+      <p:sp>
+        <p:nvSpPr>
+          <p:cNvPr id="11" name="Rectangle 10"/>
+          <p:cNvSpPr/>
+          <p:nvPr/>
+        </p:nvSpPr>
+        <p:spPr>
+          <a:xfrm>
+            <a:off x="6281928" y="2331720"/>
+            <a:ext cx="45720" cy="3657600"/>
+          </a:xfrm>
+          <a:prstGeom prst="rect">
+            <a:avLst/>
+          </a:prstGeom>
+          <a:solidFill>
+            <a:srgbClr val="F38020"/>
+          </a:solidFill>
+          <a:ln>
+            <a:noFill/>
+          </a:ln>
+        </p:spPr>
+        <p:style>
+          <a:lnRef idx="1">
+            <a:schemeClr val="accent1"/>
+          </a:lnRef>
+          <a:fillRef idx="3">
+            <a:schemeClr val="accent1"/>
+          </a:fillRef>
+          <a:effectRef idx="2">
+            <a:schemeClr val="accent1"/>
+          </a:effectRef>
+          <a:fontRef idx="minor">
+            <a:schemeClr val="lt1"/>
+          </a:fontRef>
+        </p:style>
+        <p:txBody>
+          <a:bodyPr rtlCol="0" anchor="ctr"/>
+          <a:lstStyle/>
+          <a:p>
+            <a:pPr algn="ctr"/>
+          </a:p>
+        </p:txBody>
+      </p:sp>
+      <p:sp>
+        <p:nvSpPr>
+          <p:cNvPr id="12" name="TextBox 11"/>
+          <p:cNvSpPr txBox="1"/>
+          <p:nvPr/>
+        </p:nvSpPr>
+        <p:spPr>
+          <a:xfrm>
+            <a:off x="6528816" y="2542032"/>
+            <a:ext cx="4901184" cy="594360"/>
+          </a:xfrm>
+          <a:prstGeom prst="rect">
+            <a:avLst/>
+          </a:prstGeom>
+          <a:noFill/>
+        </p:spPr>
+        <p:txBody>
+          <a:bodyPr wrap="square" lIns="0" rIns="0" tIns="0" bIns="0">
+            <a:noAutofit/>
+          </a:bodyPr>
+          <a:lstStyle/>
+          <a:p>
+            <a:pPr>
+              <a:spcAft>
+                <a:spcPts val="0"/>
+              </a:spcAft>
+              <a:defRPr sz="2000" b="1">
+                <a:solidFill>
+                  <a:srgbClr val="0A2540"/>
+                </a:solidFill>
+                <a:latin typeface="DejaVu Sans"/>
+              </a:defRPr>
+            </a:pPr>
+            <a:r>
+              <a:t>Acceptance criteria</a:t>
+            </a:r>
+          </a:p>
+        </p:txBody>
+      </p:sp>
+      <p:sp>
+        <p:nvSpPr>
+          <p:cNvPr id="13" name="TextBox 12"/>
+          <p:cNvSpPr txBox="1"/>
+          <p:nvPr/>
+        </p:nvSpPr>
+        <p:spPr>
+          <a:xfrm>
+            <a:off x="6528816" y="3236976"/>
+            <a:ext cx="4846320" cy="2615184"/>
+          </a:xfrm>
+          <a:prstGeom prst="rect">
+            <a:avLst/>
+          </a:prstGeom>
+          <a:noFill/>
+        </p:spPr>
+        <p:txBody>
+          <a:bodyPr wrap="square" lIns="0" rIns="0" tIns="0" bIns="0">
+            <a:noAutofit/>
+          </a:bodyPr>
+          <a:lstStyle/>
+          <a:p>
+            <a:pPr marL="182880" indent="-164592">
+              <a:lnSpc>
+                <a:spcPts val="2200"/>
+              </a:lnSpc>
+              <a:spcAft>
+                <a:spcPts val="800"/>
+              </a:spcAft>
+              <a:buChar char="•"/>
+              <a:defRPr sz="1700" b="0">
+                <a:solidFill>
+                  <a:srgbClr val="334155"/>
+                </a:solidFill>
+                <a:latin typeface="DejaVu Sans"/>
+              </a:defRPr>
+            </a:pPr>
+            <a:r>
+              <a:t>Measure detection coverage and false positives</a:t>
+            </a:r>
+          </a:p>
+          <a:p>
+            <a:pPr marL="182880" indent="-164592">
+              <a:lnSpc>
+                <a:spcPts val="2200"/>
+              </a:lnSpc>
+              <a:spcAft>
+                <a:spcPts val="800"/>
+              </a:spcAft>
+              <a:buChar char="•"/>
+              <a:defRPr sz="1700">
+                <a:solidFill>
+                  <a:srgbClr val="334155"/>
+                </a:solidFill>
+                <a:latin typeface="DejaVu Sans"/>
+              </a:defRPr>
+            </a:pPr>
+            <a:r>
+              <a:t>Verify roles and separate-actor approval</a:t>
+            </a:r>
+          </a:p>
+          <a:p>
+            <a:pPr marL="182880" indent="-164592">
+              <a:lnSpc>
+                <a:spcPts val="2200"/>
+              </a:lnSpc>
+              <a:spcAft>
+                <a:spcPts val="800"/>
+              </a:spcAft>
+              <a:buChar char="•"/>
+              <a:defRPr sz="1700">
+                <a:solidFill>
+                  <a:srgbClr val="334155"/>
+                </a:solidFill>
+                <a:latin typeface="DejaVu Sans"/>
+              </a:defRPr>
+            </a:pPr>
+            <a:r>
+              <a:t>Exercise containment, expiry and restoration</a:t>
+            </a:r>
+          </a:p>
+          <a:p>
+            <a:pPr marL="182880" indent="-164592">
+              <a:lnSpc>
+                <a:spcPts val="2200"/>
+              </a:lnSpc>
+              <a:spcAft>
+                <a:spcPts val="800"/>
+              </a:spcAft>
+              <a:buChar char="•"/>
+              <a:defRPr sz="1700">
+                <a:solidFill>
+                  <a:srgbClr val="334155"/>
+                </a:solidFill>
+                <a:latin typeface="DejaVu Sans"/>
+              </a:defRPr>
+            </a:pPr>
+            <a:r>
+              <a:t>Measure host overhead and service recovery</a:t>
+            </a:r>
+          </a:p>
+        </p:txBody>
+      </p:sp>
+      <p:sp>
+        <p:nvSpPr>
+          <p:cNvPr id="14" name="TextBox 13"/>
+          <p:cNvSpPr txBox="1"/>
+          <p:nvPr/>
+        </p:nvSpPr>
+        <p:spPr>
+          <a:xfrm>
+            <a:off x="502920" y="6080760"/>
+            <a:ext cx="11155680" cy="384048"/>
+          </a:xfrm>
+          <a:prstGeom prst="rect">
+            <a:avLst/>
+          </a:prstGeom>
+          <a:noFill/>
+        </p:spPr>
+        <p:txBody>
+          <a:bodyPr wrap="square" lIns="0" rIns="0" tIns="0" bIns="0">
+            <a:noAutofit/>
+          </a:bodyPr>
+          <a:lstStyle/>
+          <a:p>
+            <a:pPr>
+              <a:spcAft>
+                <a:spcPts val="0"/>
+              </a:spcAft>
+              <a:defRPr sz="1100" b="0">
+                <a:solidFill>
+                  <a:srgbClr val="64748B"/>
+                </a:solidFill>
+                <a:latin typeface="DejaVu Sans"/>
+              </a:defRPr>
+            </a:pPr>
+            <a:r>
+              <a:t>Production deployment requires environment-specific validation and an approved operating procedure.</a:t>
+            </a:r>
+          </a:p>
+        </p:txBody>
+      </p:sp>
+      <p:sp>
+        <p:nvSpPr>
+          <p:cNvPr id="15" name="TextBox 14"/>
+          <p:cNvSpPr txBox="1"/>
+          <p:nvPr/>
+        </p:nvSpPr>
+        <p:spPr>
+          <a:xfrm>
+            <a:off x="502920" y="6519672"/>
+            <a:ext cx="10058400" cy="182880"/>
+          </a:xfrm>
+          <a:prstGeom prst="rect">
+            <a:avLst/>
+          </a:prstGeom>
+          <a:noFill/>
+        </p:spPr>
+        <p:txBody>
+          <a:bodyPr wrap="square" lIns="0" rIns="0" tIns="0" bIns="0">
+            <a:noAutofit/>
+          </a:bodyPr>
+          <a:lstStyle/>
+          <a:p>
+            <a:pPr>
+              <a:spcAft>
+                <a:spcPts val="0"/>
+              </a:spcAft>
+              <a:defRPr sz="900" b="0">
+                <a:solidFill>
+                  <a:srgbClr val="64748B"/>
+                </a:solidFill>
+                <a:latin typeface="DejaVu Sans"/>
+              </a:defRPr>
+            </a:pPr>
+            <a:r>
+              <a:t>CONFIDENTIAL • INTERNAL REVIEW  |  19 October 2026</a:t>
+            </a:r>
+          </a:p>
+        </p:txBody>
+      </p:sp>
+      <p:sp>
+        <p:nvSpPr>
+          <p:cNvPr id="16" name="TextBox 15"/>
+          <p:cNvSpPr txBox="1"/>
+          <p:nvPr/>
+        </p:nvSpPr>
+        <p:spPr>
+          <a:xfrm>
+            <a:off x="11045952" y="6519672"/>
+            <a:ext cx="685800" cy="182880"/>
+          </a:xfrm>
+          <a:prstGeom prst="rect">
+            <a:avLst/>
+          </a:prstGeom>
+          <a:noFill/>
+        </p:spPr>
+        <p:txBody>
+          <a:bodyPr wrap="square" lIns="0" rIns="0" tIns="0" bIns="0">
+            <a:noAutofit/>
+          </a:bodyPr>
+          <a:lstStyle/>
+          <a:p>
+            <a:pPr>
+              <a:spcAft>
+                <a:spcPts val="0"/>
+              </a:spcAft>
+              <a:defRPr sz="900" b="0">
+                <a:solidFill>
+                  <a:srgbClr val="64748B"/>
+                </a:solidFill>
+                <a:latin typeface="DejaVu Sans"/>
+              </a:defRPr>
+            </a:pPr>
+            <a:r>
+              <a:t>25 / 25</a:t>
             </a:r>
           </a:p>
         </p:txBody>
@@ -19290,7 +20140,7 @@
               </a:defRPr>
             </a:pPr>
             <a:r>
-              <a:t>03 / 24</a:t>
+              <a:t>03 / 25</a:t>
             </a:r>
           </a:p>
         </p:txBody>
@@ -20044,7 +20894,7 @@
               </a:defRPr>
             </a:pPr>
             <a:r>
-              <a:t>04 / 24</a:t>
+              <a:t>04 / 25</a:t>
             </a:r>
           </a:p>
         </p:txBody>
@@ -20798,7 +21648,7 @@
               </a:defRPr>
             </a:pPr>
             <a:r>
-              <a:t>05 / 24</a:t>
+              <a:t>05 / 25</a:t>
             </a:r>
           </a:p>
         </p:txBody>
@@ -21552,7 +22402,7 @@
               </a:defRPr>
             </a:pPr>
             <a:r>
-              <a:t>06 / 24</a:t>
+              <a:t>06 / 25</a:t>
             </a:r>
           </a:p>
         </p:txBody>
@@ -22306,7 +23156,7 @@
               </a:defRPr>
             </a:pPr>
             <a:r>
-              <a:t>07 / 24</a:t>
+              <a:t>07 / 25</a:t>
             </a:r>
           </a:p>
         </p:txBody>
@@ -23060,7 +23910,7 @@
               </a:defRPr>
             </a:pPr>
             <a:r>
-              <a:t>08 / 24</a:t>
+              <a:t>08 / 25</a:t>
             </a:r>
           </a:p>
         </p:txBody>
@@ -23814,7 +24664,7 @@
               </a:defRPr>
             </a:pPr>
             <a:r>
-              <a:t>09 / 24</a:t>
+              <a:t>09 / 25</a:t>
             </a:r>
           </a:p>
         </p:txBody>

--- a/VulnSuite_Executive_Deck_FINAL.pptx
+++ b/VulnSuite_Executive_Deck_FINAL.pptx
@@ -24,6 +24,7 @@
     <p:sldId id="272" r:id="rId24"/>
     <p:sldId id="273" r:id="rId25"/>
     <p:sldId id="274" r:id="rId26"/>
+    <p:sldId id="275" r:id="rId27"/>
   </p:sldIdLst>
   <p:sldSz cx="12191695" cy="6858000" type="screen4x3"/>
   <p:notesSz cx="6858000" cy="9144000"/>
@@ -1516,6 +1517,96 @@
           <a:p>
             <a:r>
               <a:t>Scope: Selected detection signals support investigation; coverage is not equivalent to a complete EDR platform.</a:t>
+            </a:r>
+          </a:p>
+          <a:p>
+            <a:r>
+              <a:t>Implementation and limitations: vulnsuite/protection/OPERATIONS.md</a:t>
+            </a:r>
+          </a:p>
+          <a:p>
+            <a:r>
+              <a:t>Staging and maintenance: deploy/protection/OPERATIONS.md</a:t>
+            </a:r>
+          </a:p>
+          <a:p>
+            <a:r>
+              <a:t>Automated validation does not establish live enforcement or full EDR coverage.</a:t>
+            </a:r>
+          </a:p>
+        </p:txBody>
+      </p:sp>
+      <p:sp>
+        <p:nvSpPr>
+          <p:cNvPr id="4" name="Slide Number Placeholder 3"/>
+          <p:cNvSpPr>
+            <a:spLocks noGrp="1"/>
+          </p:cNvSpPr>
+          <p:nvPr>
+            <p:ph type="sldNum" idx="5" sz="quarter"/>
+          </p:nvPr>
+        </p:nvSpPr>
+        <p:spPr/>
+      </p:sp>
+    </p:spTree>
+  </p:cSld>
+  <p:clrMapOvr>
+    <a:masterClrMapping/>
+  </p:clrMapOvr>
+</p:notes>
+</file>
+
+<file path=ppt/notesSlides/notesSlide20.xml><?xml version="1.0" encoding="utf-8"?>
+<p:notes xmlns:a="http://schemas.openxmlformats.org/drawingml/2006/main" xmlns:p="http://schemas.openxmlformats.org/presentationml/2006/main" xmlns:r="http://schemas.openxmlformats.org/officeDocument/2006/relationships">
+  <p:cSld>
+    <p:spTree>
+      <p:nvGrpSpPr>
+        <p:cNvPr id="1" name=""/>
+        <p:cNvGrpSpPr/>
+        <p:nvPr/>
+      </p:nvGrpSpPr>
+      <p:grpSpPr>
+        <a:xfrm>
+          <a:off x="0" y="0"/>
+          <a:ext cx="0" cy="0"/>
+          <a:chOff x="0" y="0"/>
+          <a:chExt cx="0" cy="0"/>
+        </a:xfrm>
+      </p:grpSpPr>
+      <p:sp>
+        <p:nvSpPr>
+          <p:cNvPr id="2" name="Slide Image Placeholder 1"/>
+          <p:cNvSpPr>
+            <a:spLocks noGrp="1"/>
+          </p:cNvSpPr>
+          <p:nvPr>
+            <p:ph type="sldImg" idx="2"/>
+          </p:nvPr>
+        </p:nvSpPr>
+        <p:spPr/>
+      </p:sp>
+      <p:sp>
+        <p:nvSpPr>
+          <p:cNvPr id="3" name="Notes Placeholder 2"/>
+          <p:cNvSpPr>
+            <a:spLocks noGrp="1"/>
+          </p:cNvSpPr>
+          <p:nvPr>
+            <p:ph type="body" idx="3" sz="quarter"/>
+          </p:nvPr>
+        </p:nvSpPr>
+        <p:spPr/>
+        <p:txBody>
+          <a:bodyPr/>
+          <a:lstStyle/>
+          <a:p>
+            <a:r>
+              <a:t>The deployment adds a continuous monitoring dashboard, bounded host collectors, local source scanning and service templates. Health checks expose stale snapshots, while tenant-scoped access connects findings to operations. Deployment details and limits are documented in vulnsuite/README.md.</a:t>
+            </a:r>
+          </a:p>
+          <a:p>
+            <a:r>
+              <a:t>Scope: Coverage depends on configured sources and targets; installed scanners do not imply active coverage.</a:t>
             </a:r>
           </a:p>
           <a:p>
@@ -5818,7 +5909,7 @@
               </a:defRPr>
             </a:pPr>
             <a:r>
-              <a:t>CONFIDENTIAL • INTERNAL REVIEW  |  19 October 2026</a:t>
+              <a:t>CONFIDENTIAL • INTERNAL REVIEW  |  21 October 2026</a:t>
             </a:r>
           </a:p>
         </p:txBody>
@@ -5857,7 +5948,7 @@
               </a:defRPr>
             </a:pPr>
             <a:r>
-              <a:t>01 / 19</a:t>
+              <a:t>01 / 20</a:t>
             </a:r>
           </a:p>
         </p:txBody>
@@ -6572,7 +6663,7 @@
               </a:defRPr>
             </a:pPr>
             <a:r>
-              <a:t>CONFIDENTIAL • INTERNAL REVIEW  |  19 October 2026</a:t>
+              <a:t>CONFIDENTIAL • INTERNAL REVIEW  |  21 October 2026</a:t>
             </a:r>
           </a:p>
         </p:txBody>
@@ -6611,7 +6702,7 @@
               </a:defRPr>
             </a:pPr>
             <a:r>
-              <a:t>10 / 19</a:t>
+              <a:t>10 / 20</a:t>
             </a:r>
           </a:p>
         </p:txBody>
@@ -7326,7 +7417,7 @@
               </a:defRPr>
             </a:pPr>
             <a:r>
-              <a:t>CONFIDENTIAL • INTERNAL REVIEW  |  19 October 2026</a:t>
+              <a:t>CONFIDENTIAL • INTERNAL REVIEW  |  21 October 2026</a:t>
             </a:r>
           </a:p>
         </p:txBody>
@@ -7365,7 +7456,7 @@
               </a:defRPr>
             </a:pPr>
             <a:r>
-              <a:t>11 / 19</a:t>
+              <a:t>11 / 20</a:t>
             </a:r>
           </a:p>
         </p:txBody>
@@ -8080,7 +8171,7 @@
               </a:defRPr>
             </a:pPr>
             <a:r>
-              <a:t>CONFIDENTIAL • INTERNAL REVIEW  |  19 October 2026</a:t>
+              <a:t>CONFIDENTIAL • INTERNAL REVIEW  |  21 October 2026</a:t>
             </a:r>
           </a:p>
         </p:txBody>
@@ -8119,7 +8210,7 @@
               </a:defRPr>
             </a:pPr>
             <a:r>
-              <a:t>12 / 19</a:t>
+              <a:t>12 / 20</a:t>
             </a:r>
           </a:p>
         </p:txBody>
@@ -8834,7 +8925,7 @@
               </a:defRPr>
             </a:pPr>
             <a:r>
-              <a:t>CONFIDENTIAL • INTERNAL REVIEW  |  19 October 2026</a:t>
+              <a:t>CONFIDENTIAL • INTERNAL REVIEW  |  21 October 2026</a:t>
             </a:r>
           </a:p>
         </p:txBody>
@@ -8873,7 +8964,7 @@
               </a:defRPr>
             </a:pPr>
             <a:r>
-              <a:t>13 / 19</a:t>
+              <a:t>13 / 20</a:t>
             </a:r>
           </a:p>
         </p:txBody>
@@ -9588,7 +9679,7 @@
               </a:defRPr>
             </a:pPr>
             <a:r>
-              <a:t>CONFIDENTIAL • INTERNAL REVIEW  |  19 October 2026</a:t>
+              <a:t>CONFIDENTIAL • INTERNAL REVIEW  |  21 October 2026</a:t>
             </a:r>
           </a:p>
         </p:txBody>
@@ -9627,7 +9718,7 @@
               </a:defRPr>
             </a:pPr>
             <a:r>
-              <a:t>14 / 19</a:t>
+              <a:t>14 / 20</a:t>
             </a:r>
           </a:p>
         </p:txBody>
@@ -10342,7 +10433,7 @@
               </a:defRPr>
             </a:pPr>
             <a:r>
-              <a:t>CONFIDENTIAL • INTERNAL REVIEW  |  19 October 2026</a:t>
+              <a:t>CONFIDENTIAL • INTERNAL REVIEW  |  21 October 2026</a:t>
             </a:r>
           </a:p>
         </p:txBody>
@@ -10381,7 +10472,7 @@
               </a:defRPr>
             </a:pPr>
             <a:r>
-              <a:t>15 / 19</a:t>
+              <a:t>15 / 20</a:t>
             </a:r>
           </a:p>
         </p:txBody>
@@ -11096,7 +11187,7 @@
               </a:defRPr>
             </a:pPr>
             <a:r>
-              <a:t>CONFIDENTIAL • INTERNAL REVIEW  |  19 October 2026</a:t>
+              <a:t>CONFIDENTIAL • INTERNAL REVIEW  |  21 October 2026</a:t>
             </a:r>
           </a:p>
         </p:txBody>
@@ -11135,7 +11226,7 @@
               </a:defRPr>
             </a:pPr>
             <a:r>
-              <a:t>16 / 19</a:t>
+              <a:t>16 / 20</a:t>
             </a:r>
           </a:p>
         </p:txBody>
@@ -11850,7 +11941,7 @@
               </a:defRPr>
             </a:pPr>
             <a:r>
-              <a:t>CONFIDENTIAL • INTERNAL REVIEW  |  19 October 2026</a:t>
+              <a:t>CONFIDENTIAL • INTERNAL REVIEW  |  21 October 2026</a:t>
             </a:r>
           </a:p>
         </p:txBody>
@@ -11889,7 +11980,7 @@
               </a:defRPr>
             </a:pPr>
             <a:r>
-              <a:t>17 / 19</a:t>
+              <a:t>17 / 20</a:t>
             </a:r>
           </a:p>
         </p:txBody>
@@ -12604,7 +12695,7 @@
               </a:defRPr>
             </a:pPr>
             <a:r>
-              <a:t>CONFIDENTIAL • INTERNAL REVIEW  |  19 October 2026</a:t>
+              <a:t>CONFIDENTIAL • INTERNAL REVIEW  |  21 October 2026</a:t>
             </a:r>
           </a:p>
         </p:txBody>
@@ -12643,7 +12734,7 @@
               </a:defRPr>
             </a:pPr>
             <a:r>
-              <a:t>18 / 19</a:t>
+              <a:t>18 / 20</a:t>
             </a:r>
           </a:p>
         </p:txBody>
@@ -13358,7 +13449,7 @@
               </a:defRPr>
             </a:pPr>
             <a:r>
-              <a:t>CONFIDENTIAL • INTERNAL REVIEW  |  19 October 2026</a:t>
+              <a:t>CONFIDENTIAL • INTERNAL REVIEW  |  21 October 2026</a:t>
             </a:r>
           </a:p>
         </p:txBody>
@@ -13397,7 +13488,7 @@
               </a:defRPr>
             </a:pPr>
             <a:r>
-              <a:t>19 / 19</a:t>
+              <a:t>19 / 20</a:t>
             </a:r>
           </a:p>
         </p:txBody>
@@ -14072,7 +14163,7 @@
               </a:defRPr>
             </a:pPr>
             <a:r>
-              <a:t>CONFIDENTIAL • INTERNAL REVIEW  |  19 October 2026</a:t>
+              <a:t>CONFIDENTIAL • INTERNAL REVIEW  |  21 October 2026</a:t>
             </a:r>
           </a:p>
         </p:txBody>
@@ -14111,7 +14202,761 @@
               </a:defRPr>
             </a:pPr>
             <a:r>
-              <a:t>02 / 19</a:t>
+              <a:t>02 / 20</a:t>
+            </a:r>
+          </a:p>
+        </p:txBody>
+      </p:sp>
+    </p:spTree>
+  </p:cSld>
+  <p:clrMapOvr>
+    <a:masterClrMapping/>
+  </p:clrMapOvr>
+</p:sld>
+</file>
+
+<file path=ppt/slides/slide20.xml><?xml version="1.0" encoding="utf-8"?>
+<p:sld xmlns:a="http://schemas.openxmlformats.org/drawingml/2006/main" xmlns:p="http://schemas.openxmlformats.org/presentationml/2006/main" xmlns:r="http://schemas.openxmlformats.org/officeDocument/2006/relationships">
+  <p:cSld>
+    <p:spTree>
+      <p:nvGrpSpPr>
+        <p:cNvPr id="1" name=""/>
+        <p:cNvGrpSpPr/>
+        <p:nvPr/>
+      </p:nvGrpSpPr>
+      <p:grpSpPr/>
+      <p:sp>
+        <p:nvSpPr>
+          <p:cNvPr id="2" name="Rectangle 1"/>
+          <p:cNvSpPr/>
+          <p:nvPr/>
+        </p:nvSpPr>
+        <p:spPr>
+          <a:xfrm>
+            <a:off x="0" y="0"/>
+            <a:ext cx="12191695" cy="91440"/>
+          </a:xfrm>
+          <a:prstGeom prst="rect">
+            <a:avLst/>
+          </a:prstGeom>
+          <a:solidFill>
+            <a:srgbClr val="F38020"/>
+          </a:solidFill>
+          <a:ln>
+            <a:noFill/>
+          </a:ln>
+        </p:spPr>
+        <p:style>
+          <a:lnRef idx="1">
+            <a:schemeClr val="accent1"/>
+          </a:lnRef>
+          <a:fillRef idx="3">
+            <a:schemeClr val="accent1"/>
+          </a:fillRef>
+          <a:effectRef idx="2">
+            <a:schemeClr val="accent1"/>
+          </a:effectRef>
+          <a:fontRef idx="minor">
+            <a:schemeClr val="lt1"/>
+          </a:fontRef>
+        </p:style>
+        <p:txBody>
+          <a:bodyPr rtlCol="0" anchor="ctr"/>
+          <a:lstStyle/>
+          <a:p>
+            <a:pPr algn="ctr"/>
+          </a:p>
+        </p:txBody>
+      </p:sp>
+      <p:sp>
+        <p:nvSpPr>
+          <p:cNvPr id="3" name="TextBox 2"/>
+          <p:cNvSpPr txBox="1"/>
+          <p:nvPr/>
+        </p:nvSpPr>
+        <p:spPr>
+          <a:xfrm>
+            <a:off x="502920" y="320040"/>
+            <a:ext cx="10972800" cy="274320"/>
+          </a:xfrm>
+          <a:prstGeom prst="rect">
+            <a:avLst/>
+          </a:prstGeom>
+          <a:noFill/>
+        </p:spPr>
+        <p:txBody>
+          <a:bodyPr wrap="square" lIns="0" rIns="0" tIns="0" bIns="0">
+            <a:noAutofit/>
+          </a:bodyPr>
+          <a:lstStyle/>
+          <a:p>
+            <a:pPr>
+              <a:spcAft>
+                <a:spcPts val="0"/>
+              </a:spcAft>
+              <a:defRPr sz="1100" b="1">
+                <a:solidFill>
+                  <a:srgbClr val="F38020"/>
+                </a:solidFill>
+                <a:latin typeface="DejaVu Sans"/>
+              </a:defRPr>
+            </a:pPr>
+            <a:r>
+              <a:t>OCTOBER 2026 UPDATE</a:t>
+            </a:r>
+          </a:p>
+        </p:txBody>
+      </p:sp>
+      <p:sp>
+        <p:nvSpPr>
+          <p:cNvPr id="4" name="TextBox 3"/>
+          <p:cNvSpPr txBox="1"/>
+          <p:nvPr/>
+        </p:nvSpPr>
+        <p:spPr>
+          <a:xfrm>
+            <a:off x="502920" y="795528"/>
+            <a:ext cx="11155680" cy="594360"/>
+          </a:xfrm>
+          <a:prstGeom prst="rect">
+            <a:avLst/>
+          </a:prstGeom>
+          <a:noFill/>
+        </p:spPr>
+        <p:txBody>
+          <a:bodyPr wrap="square" lIns="0" rIns="0" tIns="0" bIns="0">
+            <a:noAutofit/>
+          </a:bodyPr>
+          <a:lstStyle/>
+          <a:p>
+            <a:pPr>
+              <a:spcAft>
+                <a:spcPts val="0"/>
+              </a:spcAft>
+              <a:defRPr sz="3400" b="1">
+                <a:solidFill>
+                  <a:srgbClr val="0A2540"/>
+                </a:solidFill>
+                <a:latin typeface="DejaVu Sans"/>
+              </a:defRPr>
+            </a:pPr>
+            <a:r>
+              <a:t>Continuous monitoring deployment</a:t>
+            </a:r>
+          </a:p>
+        </p:txBody>
+      </p:sp>
+      <p:sp>
+        <p:nvSpPr>
+          <p:cNvPr id="5" name="TextBox 4"/>
+          <p:cNvSpPr txBox="1"/>
+          <p:nvPr/>
+        </p:nvSpPr>
+        <p:spPr>
+          <a:xfrm>
+            <a:off x="502920" y="1417320"/>
+            <a:ext cx="11155680" cy="768096"/>
+          </a:xfrm>
+          <a:prstGeom prst="rect">
+            <a:avLst/>
+          </a:prstGeom>
+          <a:noFill/>
+        </p:spPr>
+        <p:txBody>
+          <a:bodyPr wrap="square" lIns="0" rIns="0" tIns="0" bIns="0">
+            <a:noAutofit/>
+          </a:bodyPr>
+          <a:lstStyle/>
+          <a:p>
+            <a:pPr>
+              <a:lnSpc>
+                <a:spcPts val="2000"/>
+              </a:lnSpc>
+              <a:spcAft>
+                <a:spcPts val="0"/>
+              </a:spcAft>
+              <a:defRPr sz="1550" b="0">
+                <a:solidFill>
+                  <a:srgbClr val="334155"/>
+                </a:solidFill>
+                <a:latin typeface="DejaVu Sans"/>
+              </a:defRPr>
+            </a:pPr>
+            <a:r>
+              <a:t>The deployment adds a continuous monitoring dashboard, bounded host collectors, local source scanning and service templates. Health checks expose stale snapshots, while tenant-scoped access connects findings to operations. Deployment details and limits are documented in vulnsuite/README.md.</a:t>
+            </a:r>
+          </a:p>
+        </p:txBody>
+      </p:sp>
+      <p:sp>
+        <p:nvSpPr>
+          <p:cNvPr id="6" name="Rectangle 5"/>
+          <p:cNvSpPr/>
+          <p:nvPr/>
+        </p:nvSpPr>
+        <p:spPr>
+          <a:xfrm>
+            <a:off x="502920" y="2331720"/>
+            <a:ext cx="5404104" cy="3657600"/>
+          </a:xfrm>
+          <a:prstGeom prst="rect">
+            <a:avLst/>
+          </a:prstGeom>
+          <a:solidFill>
+            <a:srgbClr val="F3F6FA"/>
+          </a:solidFill>
+          <a:ln>
+            <a:noFill/>
+          </a:ln>
+        </p:spPr>
+        <p:style>
+          <a:lnRef idx="1">
+            <a:schemeClr val="accent1"/>
+          </a:lnRef>
+          <a:fillRef idx="3">
+            <a:schemeClr val="accent1"/>
+          </a:fillRef>
+          <a:effectRef idx="2">
+            <a:schemeClr val="accent1"/>
+          </a:effectRef>
+          <a:fontRef idx="minor">
+            <a:schemeClr val="lt1"/>
+          </a:fontRef>
+        </p:style>
+        <p:txBody>
+          <a:bodyPr rtlCol="0" anchor="ctr"/>
+          <a:lstStyle/>
+          <a:p>
+            <a:pPr algn="ctr"/>
+          </a:p>
+        </p:txBody>
+      </p:sp>
+      <p:sp>
+        <p:nvSpPr>
+          <p:cNvPr id="7" name="Rectangle 6"/>
+          <p:cNvSpPr/>
+          <p:nvPr/>
+        </p:nvSpPr>
+        <p:spPr>
+          <a:xfrm>
+            <a:off x="502920" y="2331720"/>
+            <a:ext cx="45720" cy="3657600"/>
+          </a:xfrm>
+          <a:prstGeom prst="rect">
+            <a:avLst/>
+          </a:prstGeom>
+          <a:solidFill>
+            <a:srgbClr val="F38020"/>
+          </a:solidFill>
+          <a:ln>
+            <a:noFill/>
+          </a:ln>
+        </p:spPr>
+        <p:style>
+          <a:lnRef idx="1">
+            <a:schemeClr val="accent1"/>
+          </a:lnRef>
+          <a:fillRef idx="3">
+            <a:schemeClr val="accent1"/>
+          </a:fillRef>
+          <a:effectRef idx="2">
+            <a:schemeClr val="accent1"/>
+          </a:effectRef>
+          <a:fontRef idx="minor">
+            <a:schemeClr val="lt1"/>
+          </a:fontRef>
+        </p:style>
+        <p:txBody>
+          <a:bodyPr rtlCol="0" anchor="ctr"/>
+          <a:lstStyle/>
+          <a:p>
+            <a:pPr algn="ctr"/>
+          </a:p>
+        </p:txBody>
+      </p:sp>
+      <p:sp>
+        <p:nvSpPr>
+          <p:cNvPr id="8" name="TextBox 7"/>
+          <p:cNvSpPr txBox="1"/>
+          <p:nvPr/>
+        </p:nvSpPr>
+        <p:spPr>
+          <a:xfrm>
+            <a:off x="749808" y="2542032"/>
+            <a:ext cx="4901184" cy="594360"/>
+          </a:xfrm>
+          <a:prstGeom prst="rect">
+            <a:avLst/>
+          </a:prstGeom>
+          <a:noFill/>
+        </p:spPr>
+        <p:txBody>
+          <a:bodyPr wrap="square" lIns="0" rIns="0" tIns="0" bIns="0">
+            <a:noAutofit/>
+          </a:bodyPr>
+          <a:lstStyle/>
+          <a:p>
+            <a:pPr>
+              <a:spcAft>
+                <a:spcPts val="0"/>
+              </a:spcAft>
+              <a:defRPr sz="2000" b="1">
+                <a:solidFill>
+                  <a:srgbClr val="0A2540"/>
+                </a:solidFill>
+                <a:latin typeface="DejaVu Sans"/>
+              </a:defRPr>
+            </a:pPr>
+            <a:r>
+              <a:t>Monitoring and findings</a:t>
+            </a:r>
+          </a:p>
+        </p:txBody>
+      </p:sp>
+      <p:sp>
+        <p:nvSpPr>
+          <p:cNvPr id="9" name="TextBox 8"/>
+          <p:cNvSpPr txBox="1"/>
+          <p:nvPr/>
+        </p:nvSpPr>
+        <p:spPr>
+          <a:xfrm>
+            <a:off x="749808" y="3236976"/>
+            <a:ext cx="4846320" cy="2615184"/>
+          </a:xfrm>
+          <a:prstGeom prst="rect">
+            <a:avLst/>
+          </a:prstGeom>
+          <a:noFill/>
+        </p:spPr>
+        <p:txBody>
+          <a:bodyPr wrap="square" lIns="0" rIns="0" tIns="0" bIns="0">
+            <a:noAutofit/>
+          </a:bodyPr>
+          <a:lstStyle/>
+          <a:p>
+            <a:pPr marL="182880" indent="-164592">
+              <a:lnSpc>
+                <a:spcPts val="2200"/>
+              </a:lnSpc>
+              <a:spcAft>
+                <a:spcPts val="800"/>
+              </a:spcAft>
+              <a:buChar char="•"/>
+              <a:defRPr sz="1700" b="0">
+                <a:solidFill>
+                  <a:srgbClr val="334155"/>
+                </a:solidFill>
+                <a:latin typeface="DejaVu Sans"/>
+              </a:defRPr>
+            </a:pPr>
+            <a:r>
+              <a:t>Minute-by-minute host snapshots</a:t>
+            </a:r>
+          </a:p>
+          <a:p>
+            <a:pPr marL="182880" indent="-164592">
+              <a:lnSpc>
+                <a:spcPts val="2200"/>
+              </a:lnSpc>
+              <a:spcAft>
+                <a:spcPts val="800"/>
+              </a:spcAft>
+              <a:buChar char="•"/>
+              <a:defRPr sz="1700">
+                <a:solidFill>
+                  <a:srgbClr val="334155"/>
+                </a:solidFill>
+                <a:latin typeface="DejaVu Sans"/>
+              </a:defRPr>
+            </a:pPr>
+            <a:r>
+              <a:t>Stale snapshot health checks</a:t>
+            </a:r>
+          </a:p>
+          <a:p>
+            <a:pPr marL="182880" indent="-164592">
+              <a:lnSpc>
+                <a:spcPts val="2200"/>
+              </a:lnSpc>
+              <a:spcAft>
+                <a:spcPts val="800"/>
+              </a:spcAft>
+              <a:buChar char="•"/>
+              <a:defRPr sz="1700">
+                <a:solidFill>
+                  <a:srgbClr val="334155"/>
+                </a:solidFill>
+                <a:latin typeface="DejaVu Sans"/>
+              </a:defRPr>
+            </a:pPr>
+            <a:r>
+              <a:t>Hourly scans of VulnSuite source</a:t>
+            </a:r>
+          </a:p>
+          <a:p>
+            <a:pPr marL="182880" indent="-164592">
+              <a:lnSpc>
+                <a:spcPts val="2200"/>
+              </a:lnSpc>
+              <a:spcAft>
+                <a:spcPts val="800"/>
+              </a:spcAft>
+              <a:buChar char="•"/>
+              <a:defRPr sz="1700">
+                <a:solidFill>
+                  <a:srgbClr val="334155"/>
+                </a:solidFill>
+                <a:latin typeface="DejaVu Sans"/>
+              </a:defRPr>
+            </a:pPr>
+            <a:r>
+              <a:t>Agent delivery health refresh</a:t>
+            </a:r>
+          </a:p>
+        </p:txBody>
+      </p:sp>
+      <p:sp>
+        <p:nvSpPr>
+          <p:cNvPr id="10" name="Rectangle 9"/>
+          <p:cNvSpPr/>
+          <p:nvPr/>
+        </p:nvSpPr>
+        <p:spPr>
+          <a:xfrm>
+            <a:off x="6281928" y="2331720"/>
+            <a:ext cx="5404104" cy="3657600"/>
+          </a:xfrm>
+          <a:prstGeom prst="rect">
+            <a:avLst/>
+          </a:prstGeom>
+          <a:solidFill>
+            <a:srgbClr val="F3F6FA"/>
+          </a:solidFill>
+          <a:ln>
+            <a:noFill/>
+          </a:ln>
+        </p:spPr>
+        <p:style>
+          <a:lnRef idx="1">
+            <a:schemeClr val="accent1"/>
+          </a:lnRef>
+          <a:fillRef idx="3">
+            <a:schemeClr val="accent1"/>
+          </a:fillRef>
+          <a:effectRef idx="2">
+            <a:schemeClr val="accent1"/>
+          </a:effectRef>
+          <a:fontRef idx="minor">
+            <a:schemeClr val="lt1"/>
+          </a:fontRef>
+        </p:style>
+        <p:txBody>
+          <a:bodyPr rtlCol="0" anchor="ctr"/>
+          <a:lstStyle/>
+          <a:p>
+            <a:pPr algn="ctr"/>
+          </a:p>
+        </p:txBody>
+      </p:sp>
+      <p:sp>
+        <p:nvSpPr>
+          <p:cNvPr id="11" name="Rectangle 10"/>
+          <p:cNvSpPr/>
+          <p:nvPr/>
+        </p:nvSpPr>
+        <p:spPr>
+          <a:xfrm>
+            <a:off x="6281928" y="2331720"/>
+            <a:ext cx="45720" cy="3657600"/>
+          </a:xfrm>
+          <a:prstGeom prst="rect">
+            <a:avLst/>
+          </a:prstGeom>
+          <a:solidFill>
+            <a:srgbClr val="F38020"/>
+          </a:solidFill>
+          <a:ln>
+            <a:noFill/>
+          </a:ln>
+        </p:spPr>
+        <p:style>
+          <a:lnRef idx="1">
+            <a:schemeClr val="accent1"/>
+          </a:lnRef>
+          <a:fillRef idx="3">
+            <a:schemeClr val="accent1"/>
+          </a:fillRef>
+          <a:effectRef idx="2">
+            <a:schemeClr val="accent1"/>
+          </a:effectRef>
+          <a:fontRef idx="minor">
+            <a:schemeClr val="lt1"/>
+          </a:fontRef>
+        </p:style>
+        <p:txBody>
+          <a:bodyPr rtlCol="0" anchor="ctr"/>
+          <a:lstStyle/>
+          <a:p>
+            <a:pPr algn="ctr"/>
+          </a:p>
+        </p:txBody>
+      </p:sp>
+      <p:sp>
+        <p:nvSpPr>
+          <p:cNvPr id="12" name="TextBox 11"/>
+          <p:cNvSpPr txBox="1"/>
+          <p:nvPr/>
+        </p:nvSpPr>
+        <p:spPr>
+          <a:xfrm>
+            <a:off x="6528816" y="2542032"/>
+            <a:ext cx="4901184" cy="594360"/>
+          </a:xfrm>
+          <a:prstGeom prst="rect">
+            <a:avLst/>
+          </a:prstGeom>
+          <a:noFill/>
+        </p:spPr>
+        <p:txBody>
+          <a:bodyPr wrap="square" lIns="0" rIns="0" tIns="0" bIns="0">
+            <a:noAutofit/>
+          </a:bodyPr>
+          <a:lstStyle/>
+          <a:p>
+            <a:pPr>
+              <a:spcAft>
+                <a:spcPts val="0"/>
+              </a:spcAft>
+              <a:defRPr sz="2000" b="1">
+                <a:solidFill>
+                  <a:srgbClr val="0A2540"/>
+                </a:solidFill>
+                <a:latin typeface="DejaVu Sans"/>
+              </a:defRPr>
+            </a:pPr>
+            <a:r>
+              <a:t>Deployment controls</a:t>
+            </a:r>
+          </a:p>
+        </p:txBody>
+      </p:sp>
+      <p:sp>
+        <p:nvSpPr>
+          <p:cNvPr id="13" name="TextBox 12"/>
+          <p:cNvSpPr txBox="1"/>
+          <p:nvPr/>
+        </p:nvSpPr>
+        <p:spPr>
+          <a:xfrm>
+            <a:off x="6528816" y="3236976"/>
+            <a:ext cx="4846320" cy="2615184"/>
+          </a:xfrm>
+          <a:prstGeom prst="rect">
+            <a:avLst/>
+          </a:prstGeom>
+          <a:noFill/>
+        </p:spPr>
+        <p:txBody>
+          <a:bodyPr wrap="square" lIns="0" rIns="0" tIns="0" bIns="0">
+            <a:noAutofit/>
+          </a:bodyPr>
+          <a:lstStyle/>
+          <a:p>
+            <a:pPr marL="182880" indent="-164592">
+              <a:lnSpc>
+                <a:spcPts val="2200"/>
+              </a:lnSpc>
+              <a:spcAft>
+                <a:spcPts val="800"/>
+              </a:spcAft>
+              <a:buChar char="•"/>
+              <a:defRPr sz="1700" b="0">
+                <a:solidFill>
+                  <a:srgbClr val="334155"/>
+                </a:solidFill>
+                <a:latin typeface="DejaVu Sans"/>
+              </a:defRPr>
+            </a:pPr>
+            <a:r>
+              <a:t>Dedicated PostgreSQL and Redis services</a:t>
+            </a:r>
+          </a:p>
+          <a:p>
+            <a:pPr marL="182880" indent="-164592">
+              <a:lnSpc>
+                <a:spcPts val="2200"/>
+              </a:lnSpc>
+              <a:spcAft>
+                <a:spcPts val="800"/>
+              </a:spcAft>
+              <a:buChar char="•"/>
+              <a:defRPr sz="1700">
+                <a:solidFill>
+                  <a:srgbClr val="334155"/>
+                </a:solidFill>
+                <a:latin typeface="DejaVu Sans"/>
+              </a:defRPr>
+            </a:pPr>
+            <a:r>
+              <a:t>Renewed tenant-scoped read tokens</a:t>
+            </a:r>
+          </a:p>
+          <a:p>
+            <a:pPr marL="182880" indent="-164592">
+              <a:lnSpc>
+                <a:spcPts val="2200"/>
+              </a:lnSpc>
+              <a:spcAft>
+                <a:spcPts val="800"/>
+              </a:spcAft>
+              <a:buChar char="•"/>
+              <a:defRPr sz="1700">
+                <a:solidFill>
+                  <a:srgbClr val="334155"/>
+                </a:solidFill>
+                <a:latin typeface="DejaVu Sans"/>
+              </a:defRPr>
+            </a:pPr>
+            <a:r>
+              <a:t>Systemd services and scheduled collectors</a:t>
+            </a:r>
+          </a:p>
+          <a:p>
+            <a:pPr marL="182880" indent="-164592">
+              <a:lnSpc>
+                <a:spcPts val="2200"/>
+              </a:lnSpc>
+              <a:spcAft>
+                <a:spcPts val="800"/>
+              </a:spcAft>
+              <a:buChar char="•"/>
+              <a:defRPr sz="1700">
+                <a:solidFill>
+                  <a:srgbClr val="334155"/>
+                </a:solidFill>
+                <a:latin typeface="DejaVu Sans"/>
+              </a:defRPr>
+            </a:pPr>
+            <a:r>
+              <a:t>Containment and external alerts disabled</a:t>
+            </a:r>
+          </a:p>
+        </p:txBody>
+      </p:sp>
+      <p:sp>
+        <p:nvSpPr>
+          <p:cNvPr id="14" name="TextBox 13"/>
+          <p:cNvSpPr txBox="1"/>
+          <p:nvPr/>
+        </p:nvSpPr>
+        <p:spPr>
+          <a:xfrm>
+            <a:off x="502920" y="6080760"/>
+            <a:ext cx="11155680" cy="384048"/>
+          </a:xfrm>
+          <a:prstGeom prst="rect">
+            <a:avLst/>
+          </a:prstGeom>
+          <a:noFill/>
+        </p:spPr>
+        <p:txBody>
+          <a:bodyPr wrap="square" lIns="0" rIns="0" tIns="0" bIns="0">
+            <a:noAutofit/>
+          </a:bodyPr>
+          <a:lstStyle/>
+          <a:p>
+            <a:pPr>
+              <a:spcAft>
+                <a:spcPts val="0"/>
+              </a:spcAft>
+              <a:defRPr sz="1100" b="0">
+                <a:solidFill>
+                  <a:srgbClr val="64748B"/>
+                </a:solidFill>
+                <a:latin typeface="DejaVu Sans"/>
+              </a:defRPr>
+            </a:pPr>
+            <a:r>
+              <a:t>Coverage depends on configured sources and targets; installed scanners do not imply active coverage.</a:t>
+            </a:r>
+          </a:p>
+        </p:txBody>
+      </p:sp>
+      <p:sp>
+        <p:nvSpPr>
+          <p:cNvPr id="15" name="TextBox 14"/>
+          <p:cNvSpPr txBox="1"/>
+          <p:nvPr/>
+        </p:nvSpPr>
+        <p:spPr>
+          <a:xfrm>
+            <a:off x="502920" y="6519672"/>
+            <a:ext cx="10058400" cy="182880"/>
+          </a:xfrm>
+          <a:prstGeom prst="rect">
+            <a:avLst/>
+          </a:prstGeom>
+          <a:noFill/>
+        </p:spPr>
+        <p:txBody>
+          <a:bodyPr wrap="square" lIns="0" rIns="0" tIns="0" bIns="0">
+            <a:noAutofit/>
+          </a:bodyPr>
+          <a:lstStyle/>
+          <a:p>
+            <a:pPr>
+              <a:spcAft>
+                <a:spcPts val="0"/>
+              </a:spcAft>
+              <a:defRPr sz="900" b="0">
+                <a:solidFill>
+                  <a:srgbClr val="64748B"/>
+                </a:solidFill>
+                <a:latin typeface="DejaVu Sans"/>
+              </a:defRPr>
+            </a:pPr>
+            <a:r>
+              <a:t>CONFIDENTIAL • INTERNAL REVIEW  |  21 October 2026</a:t>
+            </a:r>
+          </a:p>
+        </p:txBody>
+      </p:sp>
+      <p:sp>
+        <p:nvSpPr>
+          <p:cNvPr id="16" name="TextBox 15"/>
+          <p:cNvSpPr txBox="1"/>
+          <p:nvPr/>
+        </p:nvSpPr>
+        <p:spPr>
+          <a:xfrm>
+            <a:off x="11045952" y="6519672"/>
+            <a:ext cx="685800" cy="182880"/>
+          </a:xfrm>
+          <a:prstGeom prst="rect">
+            <a:avLst/>
+          </a:prstGeom>
+          <a:noFill/>
+        </p:spPr>
+        <p:txBody>
+          <a:bodyPr wrap="square" lIns="0" rIns="0" tIns="0" bIns="0">
+            <a:noAutofit/>
+          </a:bodyPr>
+          <a:lstStyle/>
+          <a:p>
+            <a:pPr>
+              <a:spcAft>
+                <a:spcPts val="0"/>
+              </a:spcAft>
+              <a:defRPr sz="900" b="0">
+                <a:solidFill>
+                  <a:srgbClr val="64748B"/>
+                </a:solidFill>
+                <a:latin typeface="DejaVu Sans"/>
+              </a:defRPr>
+            </a:pPr>
+            <a:r>
+              <a:t>20 / 20</a:t>
             </a:r>
           </a:p>
         </p:txBody>
@@ -14826,7 +15671,7 @@
               </a:defRPr>
             </a:pPr>
             <a:r>
-              <a:t>CONFIDENTIAL • INTERNAL REVIEW  |  19 October 2026</a:t>
+              <a:t>CONFIDENTIAL • INTERNAL REVIEW  |  21 October 2026</a:t>
             </a:r>
           </a:p>
         </p:txBody>
@@ -14865,7 +15710,7 @@
               </a:defRPr>
             </a:pPr>
             <a:r>
-              <a:t>03 / 19</a:t>
+              <a:t>03 / 20</a:t>
             </a:r>
           </a:p>
         </p:txBody>
@@ -15560,7 +16405,7 @@
               </a:defRPr>
             </a:pPr>
             <a:r>
-              <a:t>CONFIDENTIAL • INTERNAL REVIEW  |  19 October 2026</a:t>
+              <a:t>CONFIDENTIAL • INTERNAL REVIEW  |  21 October 2026</a:t>
             </a:r>
           </a:p>
         </p:txBody>
@@ -15599,7 +16444,7 @@
               </a:defRPr>
             </a:pPr>
             <a:r>
-              <a:t>04 / 19</a:t>
+              <a:t>04 / 20</a:t>
             </a:r>
           </a:p>
         </p:txBody>
@@ -16274,7 +17119,7 @@
               </a:defRPr>
             </a:pPr>
             <a:r>
-              <a:t>CONFIDENTIAL • INTERNAL REVIEW  |  19 October 2026</a:t>
+              <a:t>CONFIDENTIAL • INTERNAL REVIEW  |  21 October 2026</a:t>
             </a:r>
           </a:p>
         </p:txBody>
@@ -16313,7 +17158,7 @@
               </a:defRPr>
             </a:pPr>
             <a:r>
-              <a:t>05 / 19</a:t>
+              <a:t>05 / 20</a:t>
             </a:r>
           </a:p>
         </p:txBody>
@@ -17028,7 +17873,7 @@
               </a:defRPr>
             </a:pPr>
             <a:r>
-              <a:t>CONFIDENTIAL • INTERNAL REVIEW  |  19 October 2026</a:t>
+              <a:t>CONFIDENTIAL • INTERNAL REVIEW  |  21 October 2026</a:t>
             </a:r>
           </a:p>
         </p:txBody>
@@ -17067,7 +17912,7 @@
               </a:defRPr>
             </a:pPr>
             <a:r>
-              <a:t>06 / 19</a:t>
+              <a:t>06 / 20</a:t>
             </a:r>
           </a:p>
         </p:txBody>
@@ -17782,7 +18627,7 @@
               </a:defRPr>
             </a:pPr>
             <a:r>
-              <a:t>CONFIDENTIAL • INTERNAL REVIEW  |  19 October 2026</a:t>
+              <a:t>CONFIDENTIAL • INTERNAL REVIEW  |  21 October 2026</a:t>
             </a:r>
           </a:p>
         </p:txBody>
@@ -17821,7 +18666,7 @@
               </a:defRPr>
             </a:pPr>
             <a:r>
-              <a:t>07 / 19</a:t>
+              <a:t>07 / 20</a:t>
             </a:r>
           </a:p>
         </p:txBody>
@@ -18536,7 +19381,7 @@
               </a:defRPr>
             </a:pPr>
             <a:r>
-              <a:t>CONFIDENTIAL • INTERNAL REVIEW  |  19 October 2026</a:t>
+              <a:t>CONFIDENTIAL • INTERNAL REVIEW  |  21 October 2026</a:t>
             </a:r>
           </a:p>
         </p:txBody>
@@ -18575,7 +19420,7 @@
               </a:defRPr>
             </a:pPr>
             <a:r>
-              <a:t>08 / 19</a:t>
+              <a:t>08 / 20</a:t>
             </a:r>
           </a:p>
         </p:txBody>
@@ -19290,7 +20135,7 @@
               </a:defRPr>
             </a:pPr>
             <a:r>
-              <a:t>CONFIDENTIAL • INTERNAL REVIEW  |  19 October 2026</a:t>
+              <a:t>CONFIDENTIAL • INTERNAL REVIEW  |  21 October 2026</a:t>
             </a:r>
           </a:p>
         </p:txBody>
@@ -19329,7 +20174,7 @@
               </a:defRPr>
             </a:pPr>
             <a:r>
-              <a:t>09 / 19</a:t>
+              <a:t>09 / 20</a:t>
             </a:r>
           </a:p>
         </p:txBody>
